--- a/assets/pitch/pitch-deck.pptx
+++ b/assets/pitch/pitch-deck.pptx
@@ -8,17 +8,6 @@
     <p:sldId id="256" r:id="rId7"/>
     <p:sldId id="257" r:id="rId9"/>
     <p:sldId id="258" r:id="rId10"/>
-    <p:sldId id="259" r:id="rId11"/>
-    <p:sldId id="260" r:id="rId12"/>
-    <p:sldId id="261" r:id="rId13"/>
-    <p:sldId id="262" r:id="rId14"/>
-    <p:sldId id="263" r:id="rId15"/>
-    <p:sldId id="264" r:id="rId16"/>
-    <p:sldId id="265" r:id="rId17"/>
-    <p:sldId id="266" r:id="rId18"/>
-    <p:sldId id="267" r:id="rId19"/>
-    <p:sldId id="268" r:id="rId20"/>
-    <p:sldId id="269" r:id="rId21"/>
   </p:sldIdLst>
   <p:sldSz cx="12191695" cy="6858000" type="screen4x3"/>
   <p:notesSz cx="6858000" cy="9144000"/>
@@ -515,357 +504,7 @@
           <a:lstStyle/>
           <a:p>
             <a:r>
-              <a:t>Open in one line: Maus robots make crepes on their own, every run is logged, and we turned those logs into measurements, models and next experiments. Everything in this deck comes from the repository's own documentation, its model cards, or its private data export. The repository is public; the Maus run data is not.</a:t>
-            </a:r>
-          </a:p>
-        </p:txBody>
-      </p:sp>
-      <p:sp>
-        <p:nvSpPr>
-          <p:cNvPr id="4" name="Slide Number Placeholder 3"/>
-          <p:cNvSpPr>
-            <a:spLocks noGrp="1"/>
-          </p:cNvSpPr>
-          <p:nvPr>
-            <p:ph type="sldNum" idx="5" sz="quarter"/>
-          </p:nvPr>
-        </p:nvSpPr>
-        <p:spPr/>
-      </p:sp>
-    </p:spTree>
-  </p:cSld>
-  <p:clrMapOvr>
-    <a:masterClrMapping/>
-  </p:clrMapOvr>
-</p:notes>
-</file>
-
-<file path=ppt/notesSlides/notesSlide10.xml><?xml version="1.0" encoding="utf-8"?>
-<p:notes xmlns:a="http://schemas.openxmlformats.org/drawingml/2006/main" xmlns:p="http://schemas.openxmlformats.org/presentationml/2006/main" xmlns:r="http://schemas.openxmlformats.org/officeDocument/2006/relationships">
-  <p:cSld>
-    <p:spTree>
-      <p:nvGrpSpPr>
-        <p:cNvPr id="1" name=""/>
-        <p:cNvGrpSpPr/>
-        <p:nvPr/>
-      </p:nvGrpSpPr>
-      <p:grpSpPr>
-        <a:xfrm>
-          <a:off x="0" y="0"/>
-          <a:ext cx="0" cy="0"/>
-          <a:chOff x="0" y="0"/>
-          <a:chExt cx="0" cy="0"/>
-        </a:xfrm>
-      </p:grpSpPr>
-      <p:sp>
-        <p:nvSpPr>
-          <p:cNvPr id="2" name="Slide Image Placeholder 1"/>
-          <p:cNvSpPr>
-            <a:spLocks noGrp="1"/>
-          </p:cNvSpPr>
-          <p:nvPr>
-            <p:ph type="sldImg" idx="2"/>
-          </p:nvPr>
-        </p:nvSpPr>
-        <p:spPr/>
-      </p:sp>
-      <p:sp>
-        <p:nvSpPr>
-          <p:cNvPr id="3" name="Notes Placeholder 2"/>
-          <p:cNvSpPr>
-            <a:spLocks noGrp="1"/>
-          </p:cNvSpPr>
-          <p:nvPr>
-            <p:ph type="body" idx="3" sz="quarter"/>
-          </p:nvPr>
-        </p:nvSpPr>
-        <p:spPr/>
-        <p:txBody>
-          <a:bodyPr/>
-          <a:lstStyle/>
-          <a:p>
-            <a:r>
-              <a:t>This is the map a jury looks for: the brief on the left, the verdict on the right. Be willing to say not delivered. Task 2 is the clearest miss; Level 2 is the second. Stating it plainly is stronger than a soft claim, because the repository's own status page says exactly this.</a:t>
-            </a:r>
-          </a:p>
-        </p:txBody>
-      </p:sp>
-      <p:sp>
-        <p:nvSpPr>
-          <p:cNvPr id="4" name="Slide Number Placeholder 3"/>
-          <p:cNvSpPr>
-            <a:spLocks noGrp="1"/>
-          </p:cNvSpPr>
-          <p:nvPr>
-            <p:ph type="sldNum" idx="5" sz="quarter"/>
-          </p:nvPr>
-        </p:nvSpPr>
-        <p:spPr/>
-      </p:sp>
-    </p:spTree>
-  </p:cSld>
-  <p:clrMapOvr>
-    <a:masterClrMapping/>
-  </p:clrMapOvr>
-</p:notes>
-</file>
-
-<file path=ppt/notesSlides/notesSlide11.xml><?xml version="1.0" encoding="utf-8"?>
-<p:notes xmlns:a="http://schemas.openxmlformats.org/drawingml/2006/main" xmlns:p="http://schemas.openxmlformats.org/presentationml/2006/main" xmlns:r="http://schemas.openxmlformats.org/officeDocument/2006/relationships">
-  <p:cSld>
-    <p:spTree>
-      <p:nvGrpSpPr>
-        <p:cNvPr id="1" name=""/>
-        <p:cNvGrpSpPr/>
-        <p:nvPr/>
-      </p:nvGrpSpPr>
-      <p:grpSpPr>
-        <a:xfrm>
-          <a:off x="0" y="0"/>
-          <a:ext cx="0" cy="0"/>
-          <a:chOff x="0" y="0"/>
-          <a:chExt cx="0" cy="0"/>
-        </a:xfrm>
-      </p:grpSpPr>
-      <p:sp>
-        <p:nvSpPr>
-          <p:cNvPr id="2" name="Slide Image Placeholder 1"/>
-          <p:cNvSpPr>
-            <a:spLocks noGrp="1"/>
-          </p:cNvSpPr>
-          <p:nvPr>
-            <p:ph type="sldImg" idx="2"/>
-          </p:nvPr>
-        </p:nvSpPr>
-        <p:spPr/>
-      </p:sp>
-      <p:sp>
-        <p:nvSpPr>
-          <p:cNvPr id="3" name="Notes Placeholder 2"/>
-          <p:cNvSpPr>
-            <a:spLocks noGrp="1"/>
-          </p:cNvSpPr>
-          <p:nvPr>
-            <p:ph type="body" idx="3" sz="quarter"/>
-          </p:nvPr>
-        </p:nvSpPr>
-        <p:spPr/>
-        <p:txBody>
-          <a:bodyPr/>
-          <a:lstStyle/>
-          <a:p>
-            <a:r>
-              <a:t>This slide exists on purpose. One unsupported claim in a judged repository discredits everything around it, so the weak numbers go up front with the file or command that produced them. The biggest single item left is landing the draft stack; the second is the missing inference entry point.</a:t>
-            </a:r>
-          </a:p>
-        </p:txBody>
-      </p:sp>
-      <p:sp>
-        <p:nvSpPr>
-          <p:cNvPr id="4" name="Slide Number Placeholder 3"/>
-          <p:cNvSpPr>
-            <a:spLocks noGrp="1"/>
-          </p:cNvSpPr>
-          <p:nvPr>
-            <p:ph type="sldNum" idx="5" sz="quarter"/>
-          </p:nvPr>
-        </p:nvSpPr>
-        <p:spPr/>
-      </p:sp>
-    </p:spTree>
-  </p:cSld>
-  <p:clrMapOvr>
-    <a:masterClrMapping/>
-  </p:clrMapOvr>
-</p:notes>
-</file>
-
-<file path=ppt/notesSlides/notesSlide12.xml><?xml version="1.0" encoding="utf-8"?>
-<p:notes xmlns:a="http://schemas.openxmlformats.org/drawingml/2006/main" xmlns:p="http://schemas.openxmlformats.org/presentationml/2006/main" xmlns:r="http://schemas.openxmlformats.org/officeDocument/2006/relationships">
-  <p:cSld>
-    <p:spTree>
-      <p:nvGrpSpPr>
-        <p:cNvPr id="1" name=""/>
-        <p:cNvGrpSpPr/>
-        <p:nvPr/>
-      </p:nvGrpSpPr>
-      <p:grpSpPr>
-        <a:xfrm>
-          <a:off x="0" y="0"/>
-          <a:ext cx="0" cy="0"/>
-          <a:chOff x="0" y="0"/>
-          <a:chExt cx="0" cy="0"/>
-        </a:xfrm>
-      </p:grpSpPr>
-      <p:sp>
-        <p:nvSpPr>
-          <p:cNvPr id="2" name="Slide Image Placeholder 1"/>
-          <p:cNvSpPr>
-            <a:spLocks noGrp="1"/>
-          </p:cNvSpPr>
-          <p:nvPr>
-            <p:ph type="sldImg" idx="2"/>
-          </p:nvPr>
-        </p:nvSpPr>
-        <p:spPr/>
-      </p:sp>
-      <p:sp>
-        <p:nvSpPr>
-          <p:cNvPr id="3" name="Notes Placeholder 2"/>
-          <p:cNvSpPr>
-            <a:spLocks noGrp="1"/>
-          </p:cNvSpPr>
-          <p:nvPr>
-            <p:ph type="body" idx="3" sz="quarter"/>
-          </p:nvPr>
-        </p:nvSpPr>
-        <p:spPr/>
-        <p:txBody>
-          <a:bodyPr/>
-          <a:lstStyle/>
-          <a:p>
-            <a:r>
-              <a:t>The DoE is a Definitive Screening Design: three levels per setting, main effects independent of each other and of curvature, plus three centre runs for noise. We never send anything to a robot; the sheet is a file someone runs by hand. The honest message is that the next answer comes from new data, not from more modelling on 138 runs.</a:t>
-            </a:r>
-          </a:p>
-        </p:txBody>
-      </p:sp>
-      <p:sp>
-        <p:nvSpPr>
-          <p:cNvPr id="4" name="Slide Number Placeholder 3"/>
-          <p:cNvSpPr>
-            <a:spLocks noGrp="1"/>
-          </p:cNvSpPr>
-          <p:nvPr>
-            <p:ph type="sldNum" idx="5" sz="quarter"/>
-          </p:nvPr>
-        </p:nvSpPr>
-        <p:spPr/>
-      </p:sp>
-    </p:spTree>
-  </p:cSld>
-  <p:clrMapOvr>
-    <a:masterClrMapping/>
-  </p:clrMapOvr>
-</p:notes>
-</file>
-
-<file path=ppt/notesSlides/notesSlide13.xml><?xml version="1.0" encoding="utf-8"?>
-<p:notes xmlns:a="http://schemas.openxmlformats.org/drawingml/2006/main" xmlns:p="http://schemas.openxmlformats.org/presentationml/2006/main" xmlns:r="http://schemas.openxmlformats.org/officeDocument/2006/relationships">
-  <p:cSld>
-    <p:spTree>
-      <p:nvGrpSpPr>
-        <p:cNvPr id="1" name=""/>
-        <p:cNvGrpSpPr/>
-        <p:nvPr/>
-      </p:nvGrpSpPr>
-      <p:grpSpPr>
-        <a:xfrm>
-          <a:off x="0" y="0"/>
-          <a:ext cx="0" cy="0"/>
-          <a:chOff x="0" y="0"/>
-          <a:chExt cx="0" cy="0"/>
-        </a:xfrm>
-      </p:grpSpPr>
-      <p:sp>
-        <p:nvSpPr>
-          <p:cNvPr id="2" name="Slide Image Placeholder 1"/>
-          <p:cNvSpPr>
-            <a:spLocks noGrp="1"/>
-          </p:cNvSpPr>
-          <p:nvPr>
-            <p:ph type="sldImg" idx="2"/>
-          </p:nvPr>
-        </p:nvSpPr>
-        <p:spPr/>
-      </p:sp>
-      <p:sp>
-        <p:nvSpPr>
-          <p:cNvPr id="3" name="Notes Placeholder 2"/>
-          <p:cNvSpPr>
-            <a:spLocks noGrp="1"/>
-          </p:cNvSpPr>
-          <p:nvPr>
-            <p:ph type="body" idx="3" sz="quarter"/>
-          </p:nvPr>
-        </p:nvSpPr>
-        <p:spPr/>
-        <p:txBody>
-          <a:bodyPr/>
-          <a:lstStyle/>
-          <a:p>
-            <a:r>
-              <a:t>Close on the one-minute check. Everything else in this deck should be verifiable from the repository; anything not verifiable is labelled as unverified in the docs. Be honest that the tests take about four minutes, not one, but they run offline exactly as claimed.</a:t>
-            </a:r>
-          </a:p>
-        </p:txBody>
-      </p:sp>
-      <p:sp>
-        <p:nvSpPr>
-          <p:cNvPr id="4" name="Slide Number Placeholder 3"/>
-          <p:cNvSpPr>
-            <a:spLocks noGrp="1"/>
-          </p:cNvSpPr>
-          <p:nvPr>
-            <p:ph type="sldNum" idx="5" sz="quarter"/>
-          </p:nvPr>
-        </p:nvSpPr>
-        <p:spPr/>
-      </p:sp>
-    </p:spTree>
-  </p:cSld>
-  <p:clrMapOvr>
-    <a:masterClrMapping/>
-  </p:clrMapOvr>
-</p:notes>
-</file>
-
-<file path=ppt/notesSlides/notesSlide14.xml><?xml version="1.0" encoding="utf-8"?>
-<p:notes xmlns:a="http://schemas.openxmlformats.org/drawingml/2006/main" xmlns:p="http://schemas.openxmlformats.org/presentationml/2006/main" xmlns:r="http://schemas.openxmlformats.org/officeDocument/2006/relationships">
-  <p:cSld>
-    <p:spTree>
-      <p:nvGrpSpPr>
-        <p:cNvPr id="1" name=""/>
-        <p:cNvGrpSpPr/>
-        <p:nvPr/>
-      </p:nvGrpSpPr>
-      <p:grpSpPr>
-        <a:xfrm>
-          <a:off x="0" y="0"/>
-          <a:ext cx="0" cy="0"/>
-          <a:chOff x="0" y="0"/>
-          <a:chExt cx="0" cy="0"/>
-        </a:xfrm>
-      </p:grpSpPr>
-      <p:sp>
-        <p:nvSpPr>
-          <p:cNvPr id="2" name="Slide Image Placeholder 1"/>
-          <p:cNvSpPr>
-            <a:spLocks noGrp="1"/>
-          </p:cNvSpPr>
-          <p:nvPr>
-            <p:ph type="sldImg" idx="2"/>
-          </p:nvPr>
-        </p:nvSpPr>
-        <p:spPr/>
-      </p:sp>
-      <p:sp>
-        <p:nvSpPr>
-          <p:cNvPr id="3" name="Notes Placeholder 2"/>
-          <p:cNvSpPr>
-            <a:spLocks noGrp="1"/>
-          </p:cNvSpPr>
-          <p:nvPr>
-            <p:ph type="body" idx="3" sz="quarter"/>
-          </p:nvPr>
-        </p:nvSpPr>
-        <p:spPr/>
-        <p:txBody>
-          <a:bodyPr/>
-          <a:lstStyle/>
-          <a:p>
-            <a:r>
-              <a:t>End on the repository and the status page, not on a model number. The value we bring Maus is a measured, documented pipeline and a clear list of what the next runs would settle.</a:t>
+              <a:t>Open in one line: Maus robots make crepes on their own, every run is logged, and we turned those logs into measurements, models and next experiments. Everything in this deck comes from the repository's own documentation, its model cards, or a private data export. The repository is public; the Maus run data is not.</a:t>
             </a:r>
           </a:p>
         </p:txBody>
@@ -935,7 +574,7 @@
           <a:lstStyle/>
           <a:p>
             <a:r>
-              <a:t>The robot already sees a lot; the problem is that the outcome is a verdict, not a measurement. That gap is what the whole project works on. State the brief plainly here, because the next slides score it honestly.</a:t>
+              <a:t>Four headline numbers, then the honest read said plainly. 828 runs logged, 138 vision-scored. Four check-verdict heads plus a fold-class model. The caveats are the point: three of four check heads do not generalize, fold-class is 0.99 on weak labels and collapses on a held-out robot, and 690 of 828 runs have no camera measurement because checks only exist from 13 October.</a:t>
             </a:r>
           </a:p>
         </p:txBody>
@@ -1005,427 +644,7 @@
           <a:lstStyle/>
           <a:p>
             <a:r>
-              <a:t>The account window and the camera-check cutoff explain nearly every limitation later. The 690 runs without measurements are not evidence of anything; they are simply unmeasured.</a:t>
-            </a:r>
-          </a:p>
-        </p:txBody>
-      </p:sp>
-      <p:sp>
-        <p:nvSpPr>
-          <p:cNvPr id="4" name="Slide Number Placeholder 3"/>
-          <p:cNvSpPr>
-            <a:spLocks noGrp="1"/>
-          </p:cNvSpPr>
-          <p:nvPr>
-            <p:ph type="sldNum" idx="5" sz="quarter"/>
-          </p:nvPr>
-        </p:nvSpPr>
-        <p:spPr/>
-      </p:sp>
-    </p:spTree>
-  </p:cSld>
-  <p:clrMapOvr>
-    <a:masterClrMapping/>
-  </p:clrMapOvr>
-</p:notes>
-</file>
-
-<file path=ppt/notesSlides/notesSlide4.xml><?xml version="1.0" encoding="utf-8"?>
-<p:notes xmlns:a="http://schemas.openxmlformats.org/drawingml/2006/main" xmlns:p="http://schemas.openxmlformats.org/presentationml/2006/main" xmlns:r="http://schemas.openxmlformats.org/officeDocument/2006/relationships">
-  <p:cSld>
-    <p:spTree>
-      <p:nvGrpSpPr>
-        <p:cNvPr id="1" name=""/>
-        <p:cNvGrpSpPr/>
-        <p:nvPr/>
-      </p:nvGrpSpPr>
-      <p:grpSpPr>
-        <a:xfrm>
-          <a:off x="0" y="0"/>
-          <a:ext cx="0" cy="0"/>
-          <a:chOff x="0" y="0"/>
-          <a:chExt cx="0" cy="0"/>
-        </a:xfrm>
-      </p:grpSpPr>
-      <p:sp>
-        <p:nvSpPr>
-          <p:cNvPr id="2" name="Slide Image Placeholder 1"/>
-          <p:cNvSpPr>
-            <a:spLocks noGrp="1"/>
-          </p:cNvSpPr>
-          <p:nvPr>
-            <p:ph type="sldImg" idx="2"/>
-          </p:nvPr>
-        </p:nvSpPr>
-        <p:spPr/>
-      </p:sp>
-      <p:sp>
-        <p:nvSpPr>
-          <p:cNvPr id="3" name="Notes Placeholder 2"/>
-          <p:cNvSpPr>
-            <a:spLocks noGrp="1"/>
-          </p:cNvSpPr>
-          <p:nvPr>
-            <p:ph type="body" idx="3" sz="quarter"/>
-          </p:nvPr>
-        </p:nvSpPr>
-        <p:spPr/>
-        <p:txBody>
-          <a:bodyPr/>
-          <a:lstStyle/>
-          <a:p>
-            <a:r>
-              <a:t>Order matters: raw data, then a standard container, then tables, then measurements, then models, then a viewer to inspect all of it. The models are experiments with cards, not shipped products; the next slides say why.</a:t>
-            </a:r>
-          </a:p>
-        </p:txBody>
-      </p:sp>
-      <p:sp>
-        <p:nvSpPr>
-          <p:cNvPr id="4" name="Slide Number Placeholder 3"/>
-          <p:cNvSpPr>
-            <a:spLocks noGrp="1"/>
-          </p:cNvSpPr>
-          <p:nvPr>
-            <p:ph type="sldNum" idx="5" sz="quarter"/>
-          </p:nvPr>
-        </p:nvSpPr>
-        <p:spPr/>
-      </p:sp>
-    </p:spTree>
-  </p:cSld>
-  <p:clrMapOvr>
-    <a:masterClrMapping/>
-  </p:clrMapOvr>
-</p:notes>
-</file>
-
-<file path=ppt/notesSlides/notesSlide5.xml><?xml version="1.0" encoding="utf-8"?>
-<p:notes xmlns:a="http://schemas.openxmlformats.org/drawingml/2006/main" xmlns:p="http://schemas.openxmlformats.org/presentationml/2006/main" xmlns:r="http://schemas.openxmlformats.org/officeDocument/2006/relationships">
-  <p:cSld>
-    <p:spTree>
-      <p:nvGrpSpPr>
-        <p:cNvPr id="1" name=""/>
-        <p:cNvGrpSpPr/>
-        <p:nvPr/>
-      </p:nvGrpSpPr>
-      <p:grpSpPr>
-        <a:xfrm>
-          <a:off x="0" y="0"/>
-          <a:ext cx="0" cy="0"/>
-          <a:chOff x="0" y="0"/>
-          <a:chExt cx="0" cy="0"/>
-        </a:xfrm>
-      </p:grpSpPr>
-      <p:sp>
-        <p:nvSpPr>
-          <p:cNvPr id="2" name="Slide Image Placeholder 1"/>
-          <p:cNvSpPr>
-            <a:spLocks noGrp="1"/>
-          </p:cNvSpPr>
-          <p:nvPr>
-            <p:ph type="sldImg" idx="2"/>
-          </p:nvPr>
-        </p:nvSpPr>
-        <p:spPr/>
-      </p:sp>
-      <p:sp>
-        <p:nvSpPr>
-          <p:cNvPr id="3" name="Notes Placeholder 2"/>
-          <p:cNvSpPr>
-            <a:spLocks noGrp="1"/>
-          </p:cNvSpPr>
-          <p:nvPr>
-            <p:ph type="body" idx="3" sz="quarter"/>
-          </p:nvPr>
-        </p:nvSpPr>
-        <p:spPr/>
-        <p:txBody>
-          <a:bodyPr/>
-          <a:lstStyle/>
-          <a:p>
-            <a:r>
-              <a:t>Two consequences. A failed check does not stop the run, so failure analysis cannot use where a run stopped. And spread and folds are the weak points worth measuring properly. These counts are the robot's own verdicts over runs with check data.</a:t>
-            </a:r>
-          </a:p>
-        </p:txBody>
-      </p:sp>
-      <p:sp>
-        <p:nvSpPr>
-          <p:cNvPr id="4" name="Slide Number Placeholder 3"/>
-          <p:cNvSpPr>
-            <a:spLocks noGrp="1"/>
-          </p:cNvSpPr>
-          <p:nvPr>
-            <p:ph type="sldNum" idx="5" sz="quarter"/>
-          </p:nvPr>
-        </p:nvSpPr>
-        <p:spPr/>
-      </p:sp>
-    </p:spTree>
-  </p:cSld>
-  <p:clrMapOvr>
-    <a:masterClrMapping/>
-  </p:clrMapOvr>
-</p:notes>
-</file>
-
-<file path=ppt/notesSlides/notesSlide6.xml><?xml version="1.0" encoding="utf-8"?>
-<p:notes xmlns:a="http://schemas.openxmlformats.org/drawingml/2006/main" xmlns:p="http://schemas.openxmlformats.org/presentationml/2006/main" xmlns:r="http://schemas.openxmlformats.org/officeDocument/2006/relationships">
-  <p:cSld>
-    <p:spTree>
-      <p:nvGrpSpPr>
-        <p:cNvPr id="1" name=""/>
-        <p:cNvGrpSpPr/>
-        <p:nvPr/>
-      </p:nvGrpSpPr>
-      <p:grpSpPr>
-        <a:xfrm>
-          <a:off x="0" y="0"/>
-          <a:ext cx="0" cy="0"/>
-          <a:chOff x="0" y="0"/>
-          <a:chExt cx="0" cy="0"/>
-        </a:xfrm>
-      </p:grpSpPr>
-      <p:sp>
-        <p:nvSpPr>
-          <p:cNvPr id="2" name="Slide Image Placeholder 1"/>
-          <p:cNvSpPr>
-            <a:spLocks noGrp="1"/>
-          </p:cNvSpPr>
-          <p:nvPr>
-            <p:ph type="sldImg" idx="2"/>
-          </p:nvPr>
-        </p:nvSpPr>
-        <p:spPr/>
-      </p:sp>
-      <p:sp>
-        <p:nvSpPr>
-          <p:cNvPr id="3" name="Notes Placeholder 2"/>
-          <p:cNvSpPr>
-            <a:spLocks noGrp="1"/>
-          </p:cNvSpPr>
-          <p:nvPr>
-            <p:ph type="body" idx="3" sz="quarter"/>
-          </p:nvPr>
-        </p:nvSpPr>
-        <p:spPr/>
-        <p:txBody>
-          <a:bodyPr/>
-          <a:lstStyle/>
-          <a:p>
-            <a:r>
-              <a:t>The figure shows two annotated examples we may publish: left, a spread check flagged for a large off-centre hole; right, a fold 2 check flagged as not a quarter fold. These are the robot's own annotations read back as numbers, not a new model. This is the one place we turn a verdict into a measurement.</a:t>
-            </a:r>
-          </a:p>
-        </p:txBody>
-      </p:sp>
-      <p:sp>
-        <p:nvSpPr>
-          <p:cNvPr id="4" name="Slide Number Placeholder 3"/>
-          <p:cNvSpPr>
-            <a:spLocks noGrp="1"/>
-          </p:cNvSpPr>
-          <p:nvPr>
-            <p:ph type="sldNum" idx="5" sz="quarter"/>
-          </p:nvPr>
-        </p:nvSpPr>
-        <p:spPr/>
-      </p:sp>
-    </p:spTree>
-  </p:cSld>
-  <p:clrMapOvr>
-    <a:masterClrMapping/>
-  </p:clrMapOvr>
-</p:notes>
-</file>
-
-<file path=ppt/notesSlides/notesSlide7.xml><?xml version="1.0" encoding="utf-8"?>
-<p:notes xmlns:a="http://schemas.openxmlformats.org/drawingml/2006/main" xmlns:p="http://schemas.openxmlformats.org/presentationml/2006/main" xmlns:r="http://schemas.openxmlformats.org/officeDocument/2006/relationships">
-  <p:cSld>
-    <p:spTree>
-      <p:nvGrpSpPr>
-        <p:cNvPr id="1" name=""/>
-        <p:cNvGrpSpPr/>
-        <p:nvPr/>
-      </p:nvGrpSpPr>
-      <p:grpSpPr>
-        <a:xfrm>
-          <a:off x="0" y="0"/>
-          <a:ext cx="0" cy="0"/>
-          <a:chOff x="0" y="0"/>
-          <a:chExt cx="0" cy="0"/>
-        </a:xfrm>
-      </p:grpSpPr>
-      <p:sp>
-        <p:nvSpPr>
-          <p:cNvPr id="2" name="Slide Image Placeholder 1"/>
-          <p:cNvSpPr>
-            <a:spLocks noGrp="1"/>
-          </p:cNvSpPr>
-          <p:nvPr>
-            <p:ph type="sldImg" idx="2"/>
-          </p:nvPr>
-        </p:nvSpPr>
-        <p:spPr/>
-      </p:sp>
-      <p:sp>
-        <p:nvSpPr>
-          <p:cNvPr id="3" name="Notes Placeholder 2"/>
-          <p:cNvSpPr>
-            <a:spLocks noGrp="1"/>
-          </p:cNvSpPr>
-          <p:nvPr>
-            <p:ph type="body" idx="3" sz="quarter"/>
-          </p:nvPr>
-        </p:nvSpPr>
-        <p:spPr/>
-        <p:txBody>
-          <a:bodyPr/>
-          <a:lstStyle/>
-          <a:p>
-            <a:r>
-              <a:t>This is the honest read the repository's own weak-number pages support but its status table does not repeat. The point is not that the models are bad; it is that we know exactly how weak they are, and we say so. The next slide shows the cross-robot picture.</a:t>
-            </a:r>
-          </a:p>
-        </p:txBody>
-      </p:sp>
-      <p:sp>
-        <p:nvSpPr>
-          <p:cNvPr id="4" name="Slide Number Placeholder 3"/>
-          <p:cNvSpPr>
-            <a:spLocks noGrp="1"/>
-          </p:cNvSpPr>
-          <p:nvPr>
-            <p:ph type="sldNum" idx="5" sz="quarter"/>
-          </p:nvPr>
-        </p:nvSpPr>
-        <p:spPr/>
-      </p:sp>
-    </p:spTree>
-  </p:cSld>
-  <p:clrMapOvr>
-    <a:masterClrMapping/>
-  </p:clrMapOvr>
-</p:notes>
-</file>
-
-<file path=ppt/notesSlides/notesSlide8.xml><?xml version="1.0" encoding="utf-8"?>
-<p:notes xmlns:a="http://schemas.openxmlformats.org/drawingml/2006/main" xmlns:p="http://schemas.openxmlformats.org/presentationml/2006/main" xmlns:r="http://schemas.openxmlformats.org/officeDocument/2006/relationships">
-  <p:cSld>
-    <p:spTree>
-      <p:nvGrpSpPr>
-        <p:cNvPr id="1" name=""/>
-        <p:cNvGrpSpPr/>
-        <p:nvPr/>
-      </p:nvGrpSpPr>
-      <p:grpSpPr>
-        <a:xfrm>
-          <a:off x="0" y="0"/>
-          <a:ext cx="0" cy="0"/>
-          <a:chOff x="0" y="0"/>
-          <a:chExt cx="0" cy="0"/>
-        </a:xfrm>
-      </p:grpSpPr>
-      <p:sp>
-        <p:nvSpPr>
-          <p:cNvPr id="2" name="Slide Image Placeholder 1"/>
-          <p:cNvSpPr>
-            <a:spLocks noGrp="1"/>
-          </p:cNvSpPr>
-          <p:nvPr>
-            <p:ph type="sldImg" idx="2"/>
-          </p:nvPr>
-        </p:nvSpPr>
-        <p:spPr/>
-      </p:sp>
-      <p:sp>
-        <p:nvSpPr>
-          <p:cNvPr id="3" name="Notes Placeholder 2"/>
-          <p:cNvSpPr>
-            <a:spLocks noGrp="1"/>
-          </p:cNvSpPr>
-          <p:nvPr>
-            <p:ph type="body" idx="3" sz="quarter"/>
-          </p:nvPr>
-        </p:nvSpPr>
-        <p:spPr/>
-        <p:txBody>
-          <a:bodyPr/>
-          <a:lstStyle/>
-          <a:p>
-            <a:r>
-              <a:t>Left: balanced accuracy per check, a robot's own holdout versus that robot held out entirely. push_off transfers well; spread and fold2 do not, which is the counterweight to any single headline number. Right: a deliberate failure case of the colour-and-connectivity pixel-mask suggester, which calls a dark stain a hole. That is why every suggestion is an editable draft a human confirms, never an accepted label.</a:t>
-            </a:r>
-          </a:p>
-        </p:txBody>
-      </p:sp>
-      <p:sp>
-        <p:nvSpPr>
-          <p:cNvPr id="4" name="Slide Number Placeholder 3"/>
-          <p:cNvSpPr>
-            <a:spLocks noGrp="1"/>
-          </p:cNvSpPr>
-          <p:nvPr>
-            <p:ph type="sldNum" idx="5" sz="quarter"/>
-          </p:nvPr>
-        </p:nvSpPr>
-        <p:spPr/>
-      </p:sp>
-    </p:spTree>
-  </p:cSld>
-  <p:clrMapOvr>
-    <a:masterClrMapping/>
-  </p:clrMapOvr>
-</p:notes>
-</file>
-
-<file path=ppt/notesSlides/notesSlide9.xml><?xml version="1.0" encoding="utf-8"?>
-<p:notes xmlns:a="http://schemas.openxmlformats.org/drawingml/2006/main" xmlns:p="http://schemas.openxmlformats.org/presentationml/2006/main" xmlns:r="http://schemas.openxmlformats.org/officeDocument/2006/relationships">
-  <p:cSld>
-    <p:spTree>
-      <p:nvGrpSpPr>
-        <p:cNvPr id="1" name=""/>
-        <p:cNvGrpSpPr/>
-        <p:nvPr/>
-      </p:nvGrpSpPr>
-      <p:grpSpPr>
-        <a:xfrm>
-          <a:off x="0" y="0"/>
-          <a:ext cx="0" cy="0"/>
-          <a:chOff x="0" y="0"/>
-          <a:chExt cx="0" cy="0"/>
-        </a:xfrm>
-      </p:grpSpPr>
-      <p:sp>
-        <p:nvSpPr>
-          <p:cNvPr id="2" name="Slide Image Placeholder 1"/>
-          <p:cNvSpPr>
-            <a:spLocks noGrp="1"/>
-          </p:cNvSpPr>
-          <p:nvPr>
-            <p:ph type="sldImg" idx="2"/>
-          </p:nvPr>
-        </p:nvSpPr>
-        <p:spPr/>
-      </p:sp>
-      <p:sp>
-        <p:nvSpPr>
-          <p:cNvPr id="3" name="Notes Placeholder 2"/>
-          <p:cNvSpPr>
-            <a:spLocks noGrp="1"/>
-          </p:cNvSpPr>
-          <p:nvPr>
-            <p:ph type="body" idx="3" sz="quarter"/>
-          </p:nvPr>
-        </p:nvSpPr>
-        <p:spPr/>
-        <p:txBody>
-          <a:bodyPr/>
-          <a:lstStyle/>
-          <a:p>
-            <a:r>
-              <a:t>The mask contract is strict on purpose: material and hole masks must not overlap, holes are enclosed gaps only, and an empty result is never recorded as no crepe. The prefill is plain colour and connectivity work, deliberately not a learned model. No model has been trained on these labels yet, which is the single biggest gap in the modelling story.</a:t>
+              <a:t>The repository is public at github.com/leonardoAB1/maus-crepe-insights, and there is a live site - the placeholder link in the deck still needs the real URL dropped in. The ask is one line: more check records and interleaved runs per robot, which is what turns every 'we cannot tell yet' into an answer. We never send anything to a robot; the next batch is a run sheet a person runs by hand.</a:t>
             </a:r>
           </a:p>
         </p:txBody>
@@ -4424,6 +3643,14 @@
 <file path=ppt/slides/slide1.xml><?xml version="1.0" encoding="utf-8"?>
 <p:sld xmlns:a="http://schemas.openxmlformats.org/drawingml/2006/main" xmlns:p="http://schemas.openxmlformats.org/presentationml/2006/main" xmlns:r="http://schemas.openxmlformats.org/officeDocument/2006/relationships">
   <p:cSld>
+    <p:bg>
+      <p:bgPr>
+        <a:solidFill>
+          <a:srgbClr val="FFF6EC"/>
+        </a:solidFill>
+        <a:effectLst/>
+      </p:bgPr>
+    </p:bg>
     <p:spTree>
       <p:nvGrpSpPr>
         <p:cNvPr id="1" name=""/>
@@ -4439,8 +3666,8 @@
         </p:nvSpPr>
         <p:spPr>
           <a:xfrm>
-            <a:off x="1097280" y="1920240"/>
-            <a:ext cx="9966960" cy="1280160"/>
+            <a:off x="822960" y="1417320"/>
+            <a:ext cx="10515600" cy="1188720"/>
           </a:xfrm>
           <a:prstGeom prst="rect">
             <a:avLst/>
@@ -4455,9 +3682,9 @@
           <a:p>
             <a:pPr algn="ctr"/>
             <a:r>
-              <a:rPr sz="4400" b="1">
+              <a:rPr sz="4800" b="1">
                 <a:solidFill>
-                  <a:srgbClr val="1A1A1A"/>
+                  <a:srgbClr val="4A3226"/>
                 </a:solidFill>
                 <a:latin typeface="DejaVu Sans"/>
               </a:rPr>
@@ -4474,8 +3701,8 @@
         </p:nvSpPr>
         <p:spPr>
           <a:xfrm>
-            <a:off x="1463040" y="3383280"/>
-            <a:ext cx="9235440" cy="2011680"/>
+            <a:off x="1188720" y="2880360"/>
+            <a:ext cx="9784080" cy="1097280"/>
           </a:xfrm>
           <a:prstGeom prst="rect">
             <a:avLst/>
@@ -4488,83 +3715,29 @@
           </a:bodyPr>
           <a:lstStyle/>
           <a:p>
-            <a:pPr algn="ctr">
-              <a:spcAft>
-                <a:spcPts val="600"/>
-              </a:spcAft>
-            </a:pPr>
-            <a:r>
-              <a:rPr sz="1800" b="0">
+            <a:pPr algn="ctr"/>
+            <a:r>
+              <a:rPr sz="2200" b="0">
                 <a:solidFill>
-                  <a:srgbClr val="1A1A1A"/>
+                  <a:srgbClr val="F28B9B"/>
                 </a:solidFill>
                 <a:latin typeface="DejaVu Sans"/>
               </a:rPr>
-              <a:t>Why crepe runs fail, and what to change</a:t>
-            </a:r>
-          </a:p>
-          <a:p>
-            <a:pPr algn="ctr">
-              <a:spcAft>
-                <a:spcPts val="600"/>
-              </a:spcAft>
-            </a:pPr>
-            <a:r>
-              <a:rPr sz="1400" b="0">
-                <a:solidFill>
-                  <a:srgbClr val="6B6B6B"/>
-                </a:solidFill>
-                <a:latin typeface="DejaVu Sans"/>
-              </a:rPr>
-              <a:t>BaselHack 2026, Maus Robotics challenge</a:t>
-            </a:r>
-          </a:p>
-          <a:p>
-            <a:pPr algn="ctr">
-              <a:spcAft>
-                <a:spcPts val="600"/>
-              </a:spcAft>
-            </a:pPr>
-            <a:r>
-              <a:rPr sz="1400" b="0">
-                <a:solidFill>
-                  <a:srgbClr val="6B6B6B"/>
-                </a:solidFill>
-                <a:latin typeface="DejaVu Sans"/>
-              </a:rPr>
-              <a:t>Repo: github.com/leonardoAB1/maus-crepe-insights</a:t>
-            </a:r>
-          </a:p>
-        </p:txBody>
-      </p:sp>
-    </p:spTree>
-  </p:cSld>
-  <p:clrMapOvr>
-    <a:masterClrMapping/>
-  </p:clrMapOvr>
-</p:sld>
-</file>
-
-<file path=ppt/slides/slide10.xml><?xml version="1.0" encoding="utf-8"?>
-<p:sld xmlns:a="http://schemas.openxmlformats.org/drawingml/2006/main" xmlns:p="http://schemas.openxmlformats.org/presentationml/2006/main" xmlns:r="http://schemas.openxmlformats.org/officeDocument/2006/relationships">
-  <p:cSld>
-    <p:spTree>
-      <p:nvGrpSpPr>
-        <p:cNvPr id="1" name=""/>
-        <p:cNvGrpSpPr/>
-        <p:nvPr/>
-      </p:nvGrpSpPr>
-      <p:grpSpPr/>
-      <p:sp>
-        <p:nvSpPr>
-          <p:cNvPr id="2" name="TextBox 1"/>
+              <a:t>We turned 828 robot crepe runs into measurements, models and next experiments.</a:t>
+            </a:r>
+          </a:p>
+        </p:txBody>
+      </p:sp>
+      <p:sp>
+        <p:nvSpPr>
+          <p:cNvPr id="4" name="TextBox 3"/>
           <p:cNvSpPr txBox="1"/>
           <p:nvPr/>
         </p:nvSpPr>
         <p:spPr>
           <a:xfrm>
-            <a:off x="548640" y="292608"/>
-            <a:ext cx="11064240" cy="822960"/>
+            <a:off x="1188720" y="4160520"/>
+            <a:ext cx="9784080" cy="548640"/>
           </a:xfrm>
           <a:prstGeom prst="rect">
             <a:avLst/>
@@ -4577,1536 +3750,15 @@
           </a:bodyPr>
           <a:lstStyle/>
           <a:p>
-            <a:pPr algn="l"/>
-            <a:r>
-              <a:rPr sz="3000" b="1">
+            <a:pPr algn="ctr"/>
+            <a:r>
+              <a:rPr sz="1400" b="0">
                 <a:solidFill>
-                  <a:srgbClr val="1A1A1A"/>
+                  <a:srgbClr val="9C7A63"/>
                 </a:solidFill>
                 <a:latin typeface="DejaVu Sans"/>
               </a:rPr>
-              <a:t>Brief coverage: three tasks, two levels</a:t>
-            </a:r>
-          </a:p>
-        </p:txBody>
-      </p:sp>
-      <p:graphicFrame>
-        <p:nvGraphicFramePr>
-          <p:cNvPr id="3" name="Table 2"/>
-          <p:cNvGraphicFramePr>
-            <a:graphicFrameLocks noGrp="1"/>
-          </p:cNvGraphicFramePr>
-          <p:nvPr/>
-        </p:nvGraphicFramePr>
-        <p:xfrm>
-          <a:off x="411480" y="1234440"/>
-          <a:ext cx="11384280" cy="4297680"/>
-        </p:xfrm>
-        <a:graphic>
-          <a:graphicData uri="http://schemas.openxmlformats.org/drawingml/2006/table">
-            <a:tbl>
-              <a:tblPr firstRow="1" bandRow="1">
-                <a:tableStyleId>{5C22544A-7EE6-4342-B048-85BDC9FD1C3A}</a:tableStyleId>
-              </a:tblPr>
-              <a:tblGrid>
-                <a:gridCol w="2651760"/>
-                <a:gridCol w="3200400"/>
-                <a:gridCol w="5532120"/>
-              </a:tblGrid>
-              <a:tr h="716280">
-                <a:tc>
-                  <a:txBody>
-                    <a:bodyPr wrap="square"/>
-                    <a:lstStyle/>
-                    <a:p>
-                      <a:r>
-                        <a:rPr sz="1100" b="1">
-                          <a:solidFill>
-                            <a:srgbClr val="FFFFFF"/>
-                          </a:solidFill>
-                          <a:latin typeface="DejaVu Sans"/>
-                        </a:rPr>
-                        <a:t>Brief item</a:t>
-                      </a:r>
-                    </a:p>
-                  </a:txBody>
-                  <a:tcPr marL="54864" marR="54864" marT="27432" marB="27432" anchor="t">
-                    <a:solidFill>
-                      <a:srgbClr val="1F4E79"/>
-                    </a:solidFill>
-                  </a:tcPr>
-                </a:tc>
-                <a:tc>
-                  <a:txBody>
-                    <a:bodyPr wrap="square"/>
-                    <a:lstStyle/>
-                    <a:p>
-                      <a:r>
-                        <a:rPr sz="1100" b="1">
-                          <a:solidFill>
-                            <a:srgbClr val="FFFFFF"/>
-                          </a:solidFill>
-                          <a:latin typeface="DejaVu Sans"/>
-                        </a:rPr>
-                        <a:t>Asked</a:t>
-                      </a:r>
-                    </a:p>
-                  </a:txBody>
-                  <a:tcPr marL="54864" marR="54864" marT="27432" marB="27432" anchor="t">
-                    <a:solidFill>
-                      <a:srgbClr val="1F4E79"/>
-                    </a:solidFill>
-                  </a:tcPr>
-                </a:tc>
-                <a:tc>
-                  <a:txBody>
-                    <a:bodyPr wrap="square"/>
-                    <a:lstStyle/>
-                    <a:p>
-                      <a:r>
-                        <a:rPr sz="1100" b="1">
-                          <a:solidFill>
-                            <a:srgbClr val="FFFFFF"/>
-                          </a:solidFill>
-                          <a:latin typeface="DejaVu Sans"/>
-                        </a:rPr>
-                        <a:t>Verdict</a:t>
-                      </a:r>
-                    </a:p>
-                  </a:txBody>
-                  <a:tcPr marL="54864" marR="54864" marT="27432" marB="27432" anchor="t">
-                    <a:solidFill>
-                      <a:srgbClr val="1F4E79"/>
-                    </a:solidFill>
-                  </a:tcPr>
-                </a:tc>
-              </a:tr>
-              <a:tr h="716280">
-                <a:tc>
-                  <a:txBody>
-                    <a:bodyPr wrap="square"/>
-                    <a:lstStyle/>
-                    <a:p>
-                      <a:r>
-                        <a:rPr sz="1100" b="0">
-                          <a:solidFill>
-                            <a:srgbClr val="1A1A1A"/>
-                          </a:solidFill>
-                          <a:latin typeface="DejaVu Sans"/>
-                        </a:rPr>
-                        <a:t>Task 1, spread quality</a:t>
-                      </a:r>
-                    </a:p>
-                  </a:txBody>
-                  <a:tcPr marL="54864" marR="54864" marT="27432" marB="27432" anchor="t">
-                    <a:solidFill>
-                      <a:srgbClr val="FFFFFF"/>
-                    </a:solidFill>
-                  </a:tcPr>
-                </a:tc>
-                <a:tc>
-                  <a:txBody>
-                    <a:bodyPr wrap="square"/>
-                    <a:lstStyle/>
-                    <a:p>
-                      <a:r>
-                        <a:rPr sz="1100" b="0">
-                          <a:solidFill>
-                            <a:srgbClr val="1A1A1A"/>
-                          </a:solidFill>
-                          <a:latin typeface="DejaVu Sans"/>
-                        </a:rPr>
-                        <a:t>mask, diameter, quality score</a:t>
-                      </a:r>
-                    </a:p>
-                  </a:txBody>
-                  <a:tcPr marL="54864" marR="54864" marT="27432" marB="27432" anchor="t">
-                    <a:solidFill>
-                      <a:srgbClr val="FFFFFF"/>
-                    </a:solidFill>
-                  </a:tcPr>
-                </a:tc>
-                <a:tc>
-                  <a:txBody>
-                    <a:bodyPr wrap="square"/>
-                    <a:lstStyle/>
-                    <a:p>
-                      <a:r>
-                        <a:rPr sz="1100" b="0">
-                          <a:solidFill>
-                            <a:srgbClr val="1A1A1A"/>
-                          </a:solidFill>
-                          <a:latin typeface="DejaVu Sans"/>
-                        </a:rPr>
-                        <a:t>partial: per-run vision metrics over 138 runs (diameter, centre offset, circularity, holes, uncovered fraction) and a classical pixel-mask suggester; no spread model</a:t>
-                      </a:r>
-                    </a:p>
-                  </a:txBody>
-                  <a:tcPr marL="54864" marR="54864" marT="27432" marB="27432" anchor="t">
-                    <a:solidFill>
-                      <a:srgbClr val="FFFFFF"/>
-                    </a:solidFill>
-                  </a:tcPr>
-                </a:tc>
-              </a:tr>
-              <a:tr h="716280">
-                <a:tc>
-                  <a:txBody>
-                    <a:bodyPr wrap="square"/>
-                    <a:lstStyle/>
-                    <a:p>
-                      <a:r>
-                        <a:rPr sz="1100" b="0">
-                          <a:solidFill>
-                            <a:srgbClr val="1A1A1A"/>
-                          </a:solidFill>
-                          <a:latin typeface="DejaVu Sans"/>
-                        </a:rPr>
-                        <a:t>Task 2, position and orientation</a:t>
-                      </a:r>
-                    </a:p>
-                  </a:txBody>
-                  <a:tcPr marL="54864" marR="54864" marT="27432" marB="27432" anchor="t">
-                    <a:solidFill>
-                      <a:srgbClr val="EEF3F9"/>
-                    </a:solidFill>
-                  </a:tcPr>
-                </a:tc>
-                <a:tc>
-                  <a:txBody>
-                    <a:bodyPr wrap="square"/>
-                    <a:lstStyle/>
-                    <a:p>
-                      <a:r>
-                        <a:rPr sz="1100" b="0">
-                          <a:solidFill>
-                            <a:srgbClr val="1A1A1A"/>
-                          </a:solidFill>
-                          <a:latin typeface="DejaVu Sans"/>
-                        </a:rPr>
-                        <a:t>centre (x, y) and angle for the spatula</a:t>
-                      </a:r>
-                    </a:p>
-                  </a:txBody>
-                  <a:tcPr marL="54864" marR="54864" marT="27432" marB="27432" anchor="t">
-                    <a:solidFill>
-                      <a:srgbClr val="EEF3F9"/>
-                    </a:solidFill>
-                  </a:tcPr>
-                </a:tc>
-                <a:tc>
-                  <a:txBody>
-                    <a:bodyPr wrap="square"/>
-                    <a:lstStyle/>
-                    <a:p>
-                      <a:r>
-                        <a:rPr sz="1100" b="0">
-                          <a:solidFill>
-                            <a:srgbClr val="1A1A1A"/>
-                          </a:solidFill>
-                          <a:latin typeface="DejaVu Sans"/>
-                        </a:rPr>
-                        <a:t>not delivered: centre offset is a recorded metric; the fold geometry computes an edge angle but the straight-edge gate accepted 0 of the 854 measured frames</a:t>
-                      </a:r>
-                    </a:p>
-                  </a:txBody>
-                  <a:tcPr marL="54864" marR="54864" marT="27432" marB="27432" anchor="t">
-                    <a:solidFill>
-                      <a:srgbClr val="EEF3F9"/>
-                    </a:solidFill>
-                  </a:tcPr>
-                </a:tc>
-              </a:tr>
-              <a:tr h="716280">
-                <a:tc>
-                  <a:txBody>
-                    <a:bodyPr wrap="square"/>
-                    <a:lstStyle/>
-                    <a:p>
-                      <a:r>
-                        <a:rPr sz="1100" b="0">
-                          <a:solidFill>
-                            <a:srgbClr val="1A1A1A"/>
-                          </a:solidFill>
-                          <a:latin typeface="DejaVu Sans"/>
-                        </a:rPr>
-                        <a:t>Task 3, fold detection</a:t>
-                      </a:r>
-                    </a:p>
-                  </a:txBody>
-                  <a:tcPr marL="54864" marR="54864" marT="27432" marB="27432" anchor="t">
-                    <a:solidFill>
-                      <a:srgbClr val="FFFFFF"/>
-                    </a:solidFill>
-                  </a:tcPr>
-                </a:tc>
-                <a:tc>
-                  <a:txBody>
-                    <a:bodyPr wrap="square"/>
-                    <a:lstStyle/>
-                    <a:p>
-                      <a:r>
-                        <a:rPr sz="1100" b="0">
-                          <a:solidFill>
-                            <a:srgbClr val="1A1A1A"/>
-                          </a:solidFill>
-                          <a:latin typeface="DejaVu Sans"/>
-                        </a:rPr>
-                        <a:t>flat / half / quarter / triangle plus edge angle</a:t>
-                      </a:r>
-                    </a:p>
-                  </a:txBody>
-                  <a:tcPr marL="54864" marR="54864" marT="27432" marB="27432" anchor="t">
-                    <a:solidFill>
-                      <a:srgbClr val="FFFFFF"/>
-                    </a:solidFill>
-                  </a:tcPr>
-                </a:tc>
-                <a:tc>
-                  <a:txBody>
-                    <a:bodyPr wrap="square"/>
-                    <a:lstStyle/>
-                    <a:p>
-                      <a:r>
-                        <a:rPr sz="1100" b="0">
-                          <a:solidFill>
-                            <a:srgbClr val="1A1A1A"/>
-                          </a:solidFill>
-                          <a:latin typeface="DejaVu Sans"/>
-                        </a:rPr>
-                        <a:t>partial: fold-class ONNX, four classes, on weak labels; the triangle fold is unsupported by design</a:t>
-                      </a:r>
-                    </a:p>
-                  </a:txBody>
-                  <a:tcPr marL="54864" marR="54864" marT="27432" marB="27432" anchor="t">
-                    <a:solidFill>
-                      <a:srgbClr val="FFFFFF"/>
-                    </a:solidFill>
-                  </a:tcPr>
-                </a:tc>
-              </a:tr>
-              <a:tr h="716280">
-                <a:tc>
-                  <a:txBody>
-                    <a:bodyPr wrap="square"/>
-                    <a:lstStyle/>
-                    <a:p>
-                      <a:r>
-                        <a:rPr sz="1100" b="0">
-                          <a:solidFill>
-                            <a:srgbClr val="1A1A1A"/>
-                          </a:solidFill>
-                          <a:latin typeface="DejaVu Sans"/>
-                        </a:rPr>
-                        <a:t>Level 1, works on Maus data</a:t>
-                      </a:r>
-                    </a:p>
-                  </a:txBody>
-                  <a:tcPr marL="54864" marR="54864" marT="27432" marB="27432" anchor="t">
-                    <a:solidFill>
-                      <a:srgbClr val="EEF3F9"/>
-                    </a:solidFill>
-                  </a:tcPr>
-                </a:tc>
-                <a:tc>
-                  <a:txBody>
-                    <a:bodyPr wrap="square"/>
-                    <a:lstStyle/>
-                    <a:p>
-                      <a:r>
-                        <a:rPr sz="1100" b="0">
-                          <a:solidFill>
-                            <a:srgbClr val="1A1A1A"/>
-                          </a:solidFill>
-                          <a:latin typeface="DejaVu Sans"/>
-                        </a:rPr>
-                        <a:t>model scored against the robot verdicts</a:t>
-                      </a:r>
-                    </a:p>
-                  </a:txBody>
-                  <a:tcPr marL="54864" marR="54864" marT="27432" marB="27432" anchor="t">
-                    <a:solidFill>
-                      <a:srgbClr val="EEF3F9"/>
-                    </a:solidFill>
-                  </a:tcPr>
-                </a:tc>
-                <a:tc>
-                  <a:txBody>
-                    <a:bodyPr wrap="square"/>
-                    <a:lstStyle/>
-                    <a:p>
-                      <a:r>
-                        <a:rPr sz="1100" b="0">
-                          <a:solidFill>
-                            <a:srgbClr val="1A1A1A"/>
-                          </a:solidFill>
-                          <a:latin typeface="DejaVu Sans"/>
-                        </a:rPr>
-                        <a:t>partial: check-verdict heads with agreement metrics on holdouts of 31 to 61 frames; three of four cards do not generalize</a:t>
-                      </a:r>
-                    </a:p>
-                  </a:txBody>
-                  <a:tcPr marL="54864" marR="54864" marT="27432" marB="27432" anchor="t">
-                    <a:solidFill>
-                      <a:srgbClr val="EEF3F9"/>
-                    </a:solidFill>
-                  </a:tcPr>
-                </a:tc>
-              </a:tr>
-              <a:tr h="716280">
-                <a:tc>
-                  <a:txBody>
-                    <a:bodyPr wrap="square"/>
-                    <a:lstStyle/>
-                    <a:p>
-                      <a:r>
-                        <a:rPr sz="1100" b="0">
-                          <a:solidFill>
-                            <a:srgbClr val="1A1A1A"/>
-                          </a:solidFill>
-                          <a:latin typeface="DejaVu Sans"/>
-                        </a:rPr>
-                        <a:t>Level 2, real time on a Pi 5</a:t>
-                      </a:r>
-                    </a:p>
-                  </a:txBody>
-                  <a:tcPr marL="54864" marR="54864" marT="27432" marB="27432" anchor="t">
-                    <a:solidFill>
-                      <a:srgbClr val="FFFFFF"/>
-                    </a:solidFill>
-                  </a:tcPr>
-                </a:tc>
-                <a:tc>
-                  <a:txBody>
-                    <a:bodyPr wrap="square"/>
-                    <a:lstStyle/>
-                    <a:p>
-                      <a:r>
-                        <a:rPr sz="1100" b="0">
-                          <a:solidFill>
-                            <a:srgbClr val="1A1A1A"/>
-                          </a:solidFill>
-                          <a:latin typeface="DejaVu Sans"/>
-                        </a:rPr>
-                        <a:t>under about 300 ms per frame</a:t>
-                      </a:r>
-                    </a:p>
-                  </a:txBody>
-                  <a:tcPr marL="54864" marR="54864" marT="27432" marB="27432" anchor="t">
-                    <a:solidFill>
-                      <a:srgbClr val="FFFFFF"/>
-                    </a:solidFill>
-                  </a:tcPr>
-                </a:tc>
-                <a:tc>
-                  <a:txBody>
-                    <a:bodyPr wrap="square"/>
-                    <a:lstStyle/>
-                    <a:p>
-                      <a:r>
-                        <a:rPr sz="1100" b="0">
-                          <a:solidFill>
-                            <a:srgbClr val="1A1A1A"/>
-                          </a:solidFill>
-                          <a:latin typeface="DejaVu Sans"/>
-                        </a:rPr>
-                        <a:t>not demonstrated: 4 ms per frame on a desktop CPU; the Pi figure is an unmeasured estimate and the arm64 environment lives in draft PR #162</a:t>
-                      </a:r>
-                    </a:p>
-                  </a:txBody>
-                  <a:tcPr marL="54864" marR="54864" marT="27432" marB="27432" anchor="t">
-                    <a:solidFill>
-                      <a:srgbClr val="FFFFFF"/>
-                    </a:solidFill>
-                  </a:tcPr>
-                </a:tc>
-              </a:tr>
-            </a:tbl>
-          </a:graphicData>
-        </a:graphic>
-      </p:graphicFrame>
-      <p:sp>
-        <p:nvSpPr>
-          <p:cNvPr id="4" name="TextBox 3"/>
-          <p:cNvSpPr txBox="1"/>
-          <p:nvPr/>
-        </p:nvSpPr>
-        <p:spPr>
-          <a:xfrm>
-            <a:off x="548640" y="6327648"/>
-            <a:ext cx="9601200" cy="365760"/>
-          </a:xfrm>
-          <a:prstGeom prst="rect">
-            <a:avLst/>
-          </a:prstGeom>
-          <a:noFill/>
-        </p:spPr>
-        <p:txBody>
-          <a:bodyPr wrap="square">
-            <a:spAutoFit/>
-          </a:bodyPr>
-          <a:lstStyle/>
-          <a:p>
-            <a:r>
-              <a:rPr sz="1000" b="0">
-                <a:solidFill>
-                  <a:srgbClr val="6B6B6B"/>
-                </a:solidFill>
-                <a:latin typeface="DejaVu Sans"/>
-              </a:rPr>
-              <a:t>Source: status.md (branch), audit report</a:t>
-            </a:r>
-          </a:p>
-        </p:txBody>
-      </p:sp>
-      <p:sp>
-        <p:nvSpPr>
-          <p:cNvPr id="5" name="TextBox 4"/>
-          <p:cNvSpPr txBox="1"/>
-          <p:nvPr/>
-        </p:nvSpPr>
-        <p:spPr>
-          <a:xfrm>
-            <a:off x="11247120" y="6327648"/>
-            <a:ext cx="548640" cy="365760"/>
-          </a:xfrm>
-          <a:prstGeom prst="rect">
-            <a:avLst/>
-          </a:prstGeom>
-          <a:noFill/>
-        </p:spPr>
-        <p:txBody>
-          <a:bodyPr wrap="square">
-            <a:spAutoFit/>
-          </a:bodyPr>
-          <a:lstStyle/>
-          <a:p>
-            <a:pPr algn="r"/>
-            <a:r>
-              <a:rPr sz="1000" b="0">
-                <a:solidFill>
-                  <a:srgbClr val="6B6B6B"/>
-                </a:solidFill>
-                <a:latin typeface="DejaVu Sans"/>
-              </a:rPr>
-              <a:t>10</a:t>
-            </a:r>
-          </a:p>
-        </p:txBody>
-      </p:sp>
-    </p:spTree>
-  </p:cSld>
-  <p:clrMapOvr>
-    <a:masterClrMapping/>
-  </p:clrMapOvr>
-</p:sld>
-</file>
-
-<file path=ppt/slides/slide11.xml><?xml version="1.0" encoding="utf-8"?>
-<p:sld xmlns:a="http://schemas.openxmlformats.org/drawingml/2006/main" xmlns:p="http://schemas.openxmlformats.org/presentationml/2006/main" xmlns:r="http://schemas.openxmlformats.org/officeDocument/2006/relationships">
-  <p:cSld>
-    <p:spTree>
-      <p:nvGrpSpPr>
-        <p:cNvPr id="1" name=""/>
-        <p:cNvGrpSpPr/>
-        <p:nvPr/>
-      </p:nvGrpSpPr>
-      <p:grpSpPr/>
-      <p:sp>
-        <p:nvSpPr>
-          <p:cNvPr id="2" name="TextBox 1"/>
-          <p:cNvSpPr txBox="1"/>
-          <p:nvPr/>
-        </p:nvSpPr>
-        <p:spPr>
-          <a:xfrm>
-            <a:off x="548640" y="292608"/>
-            <a:ext cx="11064240" cy="822960"/>
-          </a:xfrm>
-          <a:prstGeom prst="rect">
-            <a:avLst/>
-          </a:prstGeom>
-          <a:noFill/>
-        </p:spPr>
-        <p:txBody>
-          <a:bodyPr wrap="square">
-            <a:spAutoFit/>
-          </a:bodyPr>
-          <a:lstStyle/>
-          <a:p>
-            <a:pPr algn="l"/>
-            <a:r>
-              <a:rPr sz="3000" b="1">
-                <a:solidFill>
-                  <a:srgbClr val="1A1A1A"/>
-                </a:solidFill>
-                <a:latin typeface="DejaVu Sans"/>
-              </a:rPr>
-              <a:t>What does not work yet</a:t>
-            </a:r>
-          </a:p>
-        </p:txBody>
-      </p:sp>
-      <p:sp>
-        <p:nvSpPr>
-          <p:cNvPr id="3" name="TextBox 2"/>
-          <p:cNvSpPr txBox="1"/>
-          <p:nvPr/>
-        </p:nvSpPr>
-        <p:spPr>
-          <a:xfrm>
-            <a:off x="640080" y="1234440"/>
-            <a:ext cx="10972800" cy="4754880"/>
-          </a:xfrm>
-          <a:prstGeom prst="rect">
-            <a:avLst/>
-          </a:prstGeom>
-          <a:noFill/>
-        </p:spPr>
-        <p:txBody>
-          <a:bodyPr wrap="square">
-            <a:spAutoFit/>
-          </a:bodyPr>
-          <a:lstStyle/>
-          <a:p>
-            <a:pPr>
-              <a:lnSpc>
-                <a:spcPct val="100000"/>
-              </a:lnSpc>
-              <a:spcAft>
-                <a:spcPts val="1000"/>
-              </a:spcAft>
-            </a:pPr>
-            <a:r>
-              <a:rPr sz="1500" b="0">
-                <a:solidFill>
-                  <a:srgbClr val="1A1A1A"/>
-                </a:solidFill>
-                <a:latin typeface="DejaVu Sans"/>
-              </a:rPr>
-              <a:t>The end-to-end deliverable is missing: no single entry point turns one frame into all the decisions (issue #95 is still open)</a:t>
-            </a:r>
-          </a:p>
-          <a:p>
-            <a:pPr>
-              <a:lnSpc>
-                <a:spcPct val="100000"/>
-              </a:lnSpc>
-              <a:spcAft>
-                <a:spcPts val="1000"/>
-              </a:spcAft>
-            </a:pPr>
-            <a:r>
-              <a:rPr sz="1500" b="0">
-                <a:solidFill>
-                  <a:srgbClr val="1A1A1A"/>
-                </a:solidFill>
-                <a:latin typeface="DejaVu Sans"/>
-              </a:rPr>
-              <a:t>The newest work is not on main: five draft pull requests (#137, #156, #158, #160, #162), 45 commits and 63 files ahead; the fold-segmentation PR has been open since Saturday and calls itself not fit for use</a:t>
-            </a:r>
-          </a:p>
-          <a:p>
-            <a:pPr>
-              <a:lnSpc>
-                <a:spcPct val="100000"/>
-              </a:lnSpc>
-              <a:spcAft>
-                <a:spcPts val="1000"/>
-              </a:spcAft>
-            </a:pPr>
-            <a:r>
-              <a:rPr sz="1500" b="0">
-                <a:solidFill>
-                  <a:srgbClr val="1A1A1A"/>
-                </a:solidFill>
-                <a:latin typeface="DejaVu Sans"/>
-              </a:rPr>
-              <a:t>The models are weak: three of four check heads do not generalize, fold-risk is worse than chance, and no model has been trained on human labels</a:t>
-            </a:r>
-          </a:p>
-          <a:p>
-            <a:pPr>
-              <a:lnSpc>
-                <a:spcPct val="100000"/>
-              </a:lnSpc>
-              <a:spcAft>
-                <a:spcPts val="1000"/>
-              </a:spcAft>
-            </a:pPr>
-            <a:r>
-              <a:rPr sz="1500" b="0">
-                <a:solidFill>
-                  <a:srgbClr val="1A1A1A"/>
-                </a:solidFill>
-                <a:latin typeface="DejaVu Sans"/>
-              </a:rPr>
-              <a:t>Coverage: vision measurements cover 138 of 828 runs, all in October, and 117 of the 148 failed runs have no check data at all</a:t>
-            </a:r>
-          </a:p>
-          <a:p>
-            <a:pPr>
-              <a:lnSpc>
-                <a:spcPct val="100000"/>
-              </a:lnSpc>
-              <a:spcAft>
-                <a:spcPts val="1000"/>
-              </a:spcAft>
-            </a:pPr>
-            <a:r>
-              <a:rPr sz="1500" b="0">
-                <a:solidFill>
-                  <a:srgbClr val="1A1A1A"/>
-                </a:solidFill>
-                <a:latin typeface="DejaVu Sans"/>
-              </a:rPr>
-              <a:t>The material-mask model does not exist; the deviation pipeline has only ever run on stand-in masks</a:t>
-            </a:r>
-          </a:p>
-          <a:p>
-            <a:pPr>
-              <a:lnSpc>
-                <a:spcPct val="100000"/>
-              </a:lnSpc>
-              <a:spcAft>
-                <a:spcPts val="1000"/>
-              </a:spcAft>
-            </a:pPr>
-            <a:r>
-              <a:rPr sz="1500" b="0">
-                <a:solidFill>
-                  <a:srgbClr val="1A1A1A"/>
-                </a:solidFill>
-                <a:latin typeface="DejaVu Sans"/>
-              </a:rPr>
-              <a:t>A fresh clone reproduces the code and the offline tests, not the numbers: the machine data is private</a:t>
-            </a:r>
-          </a:p>
-        </p:txBody>
-      </p:sp>
-      <p:sp>
-        <p:nvSpPr>
-          <p:cNvPr id="4" name="TextBox 3"/>
-          <p:cNvSpPr txBox="1"/>
-          <p:nvPr/>
-        </p:nvSpPr>
-        <p:spPr>
-          <a:xfrm>
-            <a:off x="548640" y="6327648"/>
-            <a:ext cx="9601200" cy="365760"/>
-          </a:xfrm>
-          <a:prstGeom prst="rect">
-            <a:avLst/>
-          </a:prstGeom>
-          <a:noFill/>
-        </p:spPr>
-        <p:txBody>
-          <a:bodyPr wrap="square">
-            <a:spAutoFit/>
-          </a:bodyPr>
-          <a:lstStyle/>
-          <a:p>
-            <a:r>
-              <a:rPr sz="1000" b="0">
-                <a:solidFill>
-                  <a:srgbClr val="6B6B6B"/>
-                </a:solidFill>
-                <a:latin typeface="DejaVu Sans"/>
-              </a:rPr>
-              <a:t>Source: audit report, status.md</a:t>
-            </a:r>
-          </a:p>
-        </p:txBody>
-      </p:sp>
-      <p:sp>
-        <p:nvSpPr>
-          <p:cNvPr id="5" name="TextBox 4"/>
-          <p:cNvSpPr txBox="1"/>
-          <p:nvPr/>
-        </p:nvSpPr>
-        <p:spPr>
-          <a:xfrm>
-            <a:off x="11247120" y="6327648"/>
-            <a:ext cx="548640" cy="365760"/>
-          </a:xfrm>
-          <a:prstGeom prst="rect">
-            <a:avLst/>
-          </a:prstGeom>
-          <a:noFill/>
-        </p:spPr>
-        <p:txBody>
-          <a:bodyPr wrap="square">
-            <a:spAutoFit/>
-          </a:bodyPr>
-          <a:lstStyle/>
-          <a:p>
-            <a:pPr algn="r"/>
-            <a:r>
-              <a:rPr sz="1000" b="0">
-                <a:solidFill>
-                  <a:srgbClr val="6B6B6B"/>
-                </a:solidFill>
-                <a:latin typeface="DejaVu Sans"/>
-              </a:rPr>
-              <a:t>11</a:t>
-            </a:r>
-          </a:p>
-        </p:txBody>
-      </p:sp>
-    </p:spTree>
-  </p:cSld>
-  <p:clrMapOvr>
-    <a:masterClrMapping/>
-  </p:clrMapOvr>
-</p:sld>
-</file>
-
-<file path=ppt/slides/slide12.xml><?xml version="1.0" encoding="utf-8"?>
-<p:sld xmlns:a="http://schemas.openxmlformats.org/drawingml/2006/main" xmlns:p="http://schemas.openxmlformats.org/presentationml/2006/main" xmlns:r="http://schemas.openxmlformats.org/officeDocument/2006/relationships">
-  <p:cSld>
-    <p:spTree>
-      <p:nvGrpSpPr>
-        <p:cNvPr id="1" name=""/>
-        <p:cNvGrpSpPr/>
-        <p:nvPr/>
-      </p:nvGrpSpPr>
-      <p:grpSpPr/>
-      <p:sp>
-        <p:nvSpPr>
-          <p:cNvPr id="2" name="TextBox 1"/>
-          <p:cNvSpPr txBox="1"/>
-          <p:nvPr/>
-        </p:nvSpPr>
-        <p:spPr>
-          <a:xfrm>
-            <a:off x="548640" y="292608"/>
-            <a:ext cx="11064240" cy="822960"/>
-          </a:xfrm>
-          <a:prstGeom prst="rect">
-            <a:avLst/>
-          </a:prstGeom>
-          <a:noFill/>
-        </p:spPr>
-        <p:txBody>
-          <a:bodyPr wrap="square">
-            <a:spAutoFit/>
-          </a:bodyPr>
-          <a:lstStyle/>
-          <a:p>
-            <a:pPr algn="l"/>
-            <a:r>
-              <a:rPr sz="3000" b="1">
-                <a:solidFill>
-                  <a:srgbClr val="1A1A1A"/>
-                </a:solidFill>
-                <a:latin typeface="DejaVu Sans"/>
-              </a:rPr>
-              <a:t>What would change the answer</a:t>
-            </a:r>
-          </a:p>
-        </p:txBody>
-      </p:sp>
-      <p:sp>
-        <p:nvSpPr>
-          <p:cNvPr id="3" name="TextBox 2"/>
-          <p:cNvSpPr txBox="1"/>
-          <p:nvPr/>
-        </p:nvSpPr>
-        <p:spPr>
-          <a:xfrm>
-            <a:off x="640080" y="1234440"/>
-            <a:ext cx="10972800" cy="4754880"/>
-          </a:xfrm>
-          <a:prstGeom prst="rect">
-            <a:avLst/>
-          </a:prstGeom>
-          <a:noFill/>
-        </p:spPr>
-        <p:txBody>
-          <a:bodyPr wrap="square">
-            <a:spAutoFit/>
-          </a:bodyPr>
-          <a:lstStyle/>
-          <a:p>
-            <a:pPr>
-              <a:lnSpc>
-                <a:spcPct val="100000"/>
-              </a:lnSpc>
-              <a:spcAft>
-                <a:spcPts val="1000"/>
-              </a:spcAft>
-            </a:pPr>
-            <a:r>
-              <a:rPr sz="1500" b="0">
-                <a:solidFill>
-                  <a:srgbClr val="1A1A1A"/>
-                </a:solidFill>
-                <a:latin typeface="DejaVu Sans"/>
-              </a:rPr>
-              <a:t>More check records: 117 of the 148 failed runs have none, so why runs fail is unanswerable from this export for about 79 percent of them</a:t>
-            </a:r>
-          </a:p>
-          <a:p>
-            <a:pPr>
-              <a:lnSpc>
-                <a:spcPct val="100000"/>
-              </a:lnSpc>
-              <a:spcAft>
-                <a:spcPts val="1000"/>
-              </a:spcAft>
-            </a:pPr>
-            <a:r>
-              <a:rPr sz="1500" b="0">
-                <a:solidFill>
-                  <a:srgbClr val="1A1A1A"/>
-                </a:solidFill>
-                <a:latin typeface="DejaVu Sans"/>
-              </a:rPr>
-              <a:t>More runs per robot, interleaved in time: about 140 to 150 would separate robot from era, which today coincide</a:t>
-            </a:r>
-          </a:p>
-          <a:p>
-            <a:pPr>
-              <a:lnSpc>
-                <a:spcPct val="100000"/>
-              </a:lnSpc>
-              <a:spcAft>
-                <a:spcPts val="1000"/>
-              </a:spcAft>
-            </a:pPr>
-            <a:r>
-              <a:rPr sz="1500" b="0">
-                <a:solidFill>
-                  <a:srgbClr val="1A1A1A"/>
-                </a:solidFill>
-                <a:latin typeface="DejaVu Sans"/>
-              </a:rPr>
-              <a:t>A held-out evaluation on human labels: every current metric is agreement with the robot, not with reality</a:t>
-            </a:r>
-          </a:p>
-          <a:p>
-            <a:pPr>
-              <a:lnSpc>
-                <a:spcPct val="100000"/>
-              </a:lnSpc>
-              <a:spcAft>
-                <a:spcPts val="1000"/>
-              </a:spcAft>
-            </a:pPr>
-            <a:r>
-              <a:rPr sz="1500" b="0">
-                <a:solidFill>
-                  <a:srgbClr val="1A1A1A"/>
-                </a:solidFill>
-                <a:latin typeface="DejaVu Sans"/>
-              </a:rPr>
-              <a:t>A reviewed mask export plus a material-mask model, so the deviation pipeline sees a real prediction against a real mask</a:t>
-            </a:r>
-          </a:p>
-          <a:p>
-            <a:pPr>
-              <a:lnSpc>
-                <a:spcPct val="100000"/>
-              </a:lnSpc>
-              <a:spcAft>
-                <a:spcPts val="1000"/>
-              </a:spcAft>
-            </a:pPr>
-            <a:r>
-              <a:rPr sz="1500" b="0">
-                <a:solidFill>
-                  <a:srgbClr val="1A1A1A"/>
-                </a:solidFill>
-                <a:latin typeface="DejaVu Sans"/>
-              </a:rPr>
-              <a:t>Real Raspberry Pi 5 timing: 4 ms is a desktop number, and the Level 2 claim needs a measured board</a:t>
-            </a:r>
-          </a:p>
-          <a:p>
-            <a:pPr>
-              <a:lnSpc>
-                <a:spcPct val="100000"/>
-              </a:lnSpc>
-              <a:spcAft>
-                <a:spcPts val="1000"/>
-              </a:spcAft>
-            </a:pPr>
-            <a:r>
-              <a:rPr sz="1500" b="0">
-                <a:solidFill>
-                  <a:srgbClr val="1A1A1A"/>
-                </a:solidFill>
-                <a:latin typeface="DejaVu Sans"/>
-              </a:rPr>
-              <a:t>A designed batch, not more history: 19 runs varying six settings independently, run sheet ready for Maus</a:t>
-            </a:r>
-          </a:p>
-        </p:txBody>
-      </p:sp>
-      <p:sp>
-        <p:nvSpPr>
-          <p:cNvPr id="4" name="TextBox 3"/>
-          <p:cNvSpPr txBox="1"/>
-          <p:nvPr/>
-        </p:nvSpPr>
-        <p:spPr>
-          <a:xfrm>
-            <a:off x="548640" y="6327648"/>
-            <a:ext cx="9601200" cy="365760"/>
-          </a:xfrm>
-          <a:prstGeom prst="rect">
-            <a:avLst/>
-          </a:prstGeom>
-          <a:noFill/>
-        </p:spPr>
-        <p:txBody>
-          <a:bodyPr wrap="square">
-            <a:spAutoFit/>
-          </a:bodyPr>
-          <a:lstStyle/>
-          <a:p>
-            <a:r>
-              <a:rPr sz="1000" b="0">
-                <a:solidFill>
-                  <a:srgbClr val="6B6B6B"/>
-                </a:solidFill>
-                <a:latin typeface="DejaVu Sans"/>
-              </a:rPr>
-              <a:t>Source: fold-risk.md, doe.md, audit report</a:t>
-            </a:r>
-          </a:p>
-        </p:txBody>
-      </p:sp>
-      <p:sp>
-        <p:nvSpPr>
-          <p:cNvPr id="5" name="TextBox 4"/>
-          <p:cNvSpPr txBox="1"/>
-          <p:nvPr/>
-        </p:nvSpPr>
-        <p:spPr>
-          <a:xfrm>
-            <a:off x="11247120" y="6327648"/>
-            <a:ext cx="548640" cy="365760"/>
-          </a:xfrm>
-          <a:prstGeom prst="rect">
-            <a:avLst/>
-          </a:prstGeom>
-          <a:noFill/>
-        </p:spPr>
-        <p:txBody>
-          <a:bodyPr wrap="square">
-            <a:spAutoFit/>
-          </a:bodyPr>
-          <a:lstStyle/>
-          <a:p>
-            <a:pPr algn="r"/>
-            <a:r>
-              <a:rPr sz="1000" b="0">
-                <a:solidFill>
-                  <a:srgbClr val="6B6B6B"/>
-                </a:solidFill>
-                <a:latin typeface="DejaVu Sans"/>
-              </a:rPr>
-              <a:t>12</a:t>
-            </a:r>
-          </a:p>
-        </p:txBody>
-      </p:sp>
-    </p:spTree>
-  </p:cSld>
-  <p:clrMapOvr>
-    <a:masterClrMapping/>
-  </p:clrMapOvr>
-</p:sld>
-</file>
-
-<file path=ppt/slides/slide13.xml><?xml version="1.0" encoding="utf-8"?>
-<p:sld xmlns:a="http://schemas.openxmlformats.org/drawingml/2006/main" xmlns:p="http://schemas.openxmlformats.org/presentationml/2006/main" xmlns:r="http://schemas.openxmlformats.org/officeDocument/2006/relationships">
-  <p:cSld>
-    <p:spTree>
-      <p:nvGrpSpPr>
-        <p:cNvPr id="1" name=""/>
-        <p:cNvGrpSpPr/>
-        <p:nvPr/>
-      </p:nvGrpSpPr>
-      <p:grpSpPr/>
-      <p:sp>
-        <p:nvSpPr>
-          <p:cNvPr id="2" name="TextBox 1"/>
-          <p:cNvSpPr txBox="1"/>
-          <p:nvPr/>
-        </p:nvSpPr>
-        <p:spPr>
-          <a:xfrm>
-            <a:off x="548640" y="292608"/>
-            <a:ext cx="11064240" cy="822960"/>
-          </a:xfrm>
-          <a:prstGeom prst="rect">
-            <a:avLst/>
-          </a:prstGeom>
-          <a:noFill/>
-        </p:spPr>
-        <p:txBody>
-          <a:bodyPr wrap="square">
-            <a:spAutoFit/>
-          </a:bodyPr>
-          <a:lstStyle/>
-          <a:p>
-            <a:pPr algn="l"/>
-            <a:r>
-              <a:rPr sz="3000" b="1">
-                <a:solidFill>
-                  <a:srgbClr val="1A1A1A"/>
-                </a:solidFill>
-                <a:latin typeface="DejaVu Sans"/>
-              </a:rPr>
-              <a:t>Check it yourself in a minute</a:t>
-            </a:r>
-          </a:p>
-        </p:txBody>
-      </p:sp>
-      <p:sp>
-        <p:nvSpPr>
-          <p:cNvPr id="3" name="TextBox 2"/>
-          <p:cNvSpPr txBox="1"/>
-          <p:nvPr/>
-        </p:nvSpPr>
-        <p:spPr>
-          <a:xfrm>
-            <a:off x="640080" y="1234440"/>
-            <a:ext cx="10972800" cy="4754880"/>
-          </a:xfrm>
-          <a:prstGeom prst="rect">
-            <a:avLst/>
-          </a:prstGeom>
-          <a:noFill/>
-        </p:spPr>
-        <p:txBody>
-          <a:bodyPr wrap="square">
-            <a:spAutoFit/>
-          </a:bodyPr>
-          <a:lstStyle/>
-          <a:p>
-            <a:pPr>
-              <a:lnSpc>
-                <a:spcPct val="100000"/>
-              </a:lnSpc>
-              <a:spcAft>
-                <a:spcPts val="1000"/>
-              </a:spcAft>
-            </a:pPr>
-            <a:r>
-              <a:rPr sz="1500" b="0">
-                <a:solidFill>
-                  <a:srgbClr val="1A1A1A"/>
-                </a:solidFill>
-                <a:latin typeface="DejaVu Sans"/>
-              </a:rPr>
-              <a:t>Repo: github.com/leonardoAB1/maus-crepe-insights (public; the Maus run data is private and stays out of Git)</a:t>
-            </a:r>
-          </a:p>
-          <a:p>
-            <a:pPr>
-              <a:lnSpc>
-                <a:spcPct val="100000"/>
-              </a:lnSpc>
-              <a:spcAft>
-                <a:spcPts val="1000"/>
-              </a:spcAft>
-            </a:pPr>
-            <a:r>
-              <a:rPr sz="1500" b="0">
-                <a:solidFill>
-                  <a:srgbClr val="1A1A1A"/>
-                </a:solidFill>
-                <a:latin typeface="DejaVu Sans"/>
-              </a:rPr>
-              <a:t>Offline check, no data needed: cd code &amp;&amp; pixi install &amp;&amp; pixi run test &amp;&amp; pixi run lint</a:t>
-            </a:r>
-          </a:p>
-          <a:p>
-            <a:pPr>
-              <a:lnSpc>
-                <a:spcPct val="100000"/>
-              </a:lnSpc>
-              <a:spcAft>
-                <a:spcPts val="1000"/>
-              </a:spcAft>
-            </a:pPr>
-            <a:r>
-              <a:rPr sz="1500" b="0">
-                <a:solidFill>
-                  <a:srgbClr val="1A1A1A"/>
-                </a:solidFill>
-                <a:latin typeface="DejaVu Sans"/>
-              </a:rPr>
-              <a:t>The suite runs in about four minutes: 625 passed, 66 skipped, exit 0</a:t>
-            </a:r>
-          </a:p>
-          <a:p>
-            <a:pPr>
-              <a:lnSpc>
-                <a:spcPct val="100000"/>
-              </a:lnSpc>
-              <a:spcAft>
-                <a:spcPts val="1000"/>
-              </a:spcAft>
-            </a:pPr>
-            <a:r>
-              <a:rPr sz="1500" b="0">
-                <a:solidFill>
-                  <a:srgbClr val="1A1A1A"/>
-                </a:solidFill>
-                <a:latin typeface="DejaVu Sans"/>
-              </a:rPr>
-              <a:t>Model cards with holdouts, per-robot and leave-one-robot-out checks, and explicit generalization verdicts: code/models/</a:t>
-            </a:r>
-          </a:p>
-          <a:p>
-            <a:pPr>
-              <a:lnSpc>
-                <a:spcPct val="100000"/>
-              </a:lnSpc>
-              <a:spcAft>
-                <a:spcPts val="1000"/>
-              </a:spcAft>
-            </a:pPr>
-            <a:r>
-              <a:rPr sz="1500" b="0">
-                <a:solidFill>
-                  <a:srgbClr val="1A1A1A"/>
-                </a:solidFill>
-                <a:latin typeface="DejaVu Sans"/>
-              </a:rPr>
-              <a:t>Status page, every number with its source: documentation/status.md</a:t>
-            </a:r>
-          </a:p>
-          <a:p>
-            <a:pPr>
-              <a:lnSpc>
-                <a:spcPct val="100000"/>
-              </a:lnSpc>
-              <a:spcAft>
-                <a:spcPts val="1000"/>
-              </a:spcAft>
-            </a:pPr>
-            <a:r>
-              <a:rPr sz="1500" b="0">
-                <a:solidFill>
-                  <a:srgbClr val="1A1A1A"/>
-                </a:solidFill>
-                <a:latin typeface="DejaVu Sans"/>
-              </a:rPr>
-              <a:t>Licence: PolyForm Noncommercial 1.0.0</a:t>
-            </a:r>
-          </a:p>
-        </p:txBody>
-      </p:sp>
-      <p:sp>
-        <p:nvSpPr>
-          <p:cNvPr id="4" name="TextBox 3"/>
-          <p:cNvSpPr txBox="1"/>
-          <p:nvPr/>
-        </p:nvSpPr>
-        <p:spPr>
-          <a:xfrm>
-            <a:off x="548640" y="6327648"/>
-            <a:ext cx="9601200" cy="365760"/>
-          </a:xfrm>
-          <a:prstGeom prst="rect">
-            <a:avLst/>
-          </a:prstGeom>
-          <a:noFill/>
-        </p:spPr>
-        <p:txBody>
-          <a:bodyPr wrap="square">
-            <a:spAutoFit/>
-          </a:bodyPr>
-          <a:lstStyle/>
-          <a:p>
-            <a:r>
-              <a:rPr sz="1000" b="0">
-                <a:solidFill>
-                  <a:srgbClr val="6B6B6B"/>
-                </a:solidFill>
-                <a:latin typeface="DejaVu Sans"/>
-              </a:rPr>
-              <a:t>Sourced in the repository</a:t>
-            </a:r>
-          </a:p>
-        </p:txBody>
-      </p:sp>
-      <p:sp>
-        <p:nvSpPr>
-          <p:cNvPr id="5" name="TextBox 4"/>
-          <p:cNvSpPr txBox="1"/>
-          <p:nvPr/>
-        </p:nvSpPr>
-        <p:spPr>
-          <a:xfrm>
-            <a:off x="11247120" y="6327648"/>
-            <a:ext cx="548640" cy="365760"/>
-          </a:xfrm>
-          <a:prstGeom prst="rect">
-            <a:avLst/>
-          </a:prstGeom>
-          <a:noFill/>
-        </p:spPr>
-        <p:txBody>
-          <a:bodyPr wrap="square">
-            <a:spAutoFit/>
-          </a:bodyPr>
-          <a:lstStyle/>
-          <a:p>
-            <a:pPr algn="r"/>
-            <a:r>
-              <a:rPr sz="1000" b="0">
-                <a:solidFill>
-                  <a:srgbClr val="6B6B6B"/>
-                </a:solidFill>
-                <a:latin typeface="DejaVu Sans"/>
-              </a:rPr>
-              <a:t>13</a:t>
-            </a:r>
-          </a:p>
-        </p:txBody>
-      </p:sp>
-    </p:spTree>
-  </p:cSld>
-  <p:clrMapOvr>
-    <a:masterClrMapping/>
-  </p:clrMapOvr>
-</p:sld>
-</file>
-
-<file path=ppt/slides/slide14.xml><?xml version="1.0" encoding="utf-8"?>
-<p:sld xmlns:a="http://schemas.openxmlformats.org/drawingml/2006/main" xmlns:p="http://schemas.openxmlformats.org/presentationml/2006/main" xmlns:r="http://schemas.openxmlformats.org/officeDocument/2006/relationships">
-  <p:cSld>
-    <p:spTree>
-      <p:nvGrpSpPr>
-        <p:cNvPr id="1" name=""/>
-        <p:cNvGrpSpPr/>
-        <p:nvPr/>
-      </p:nvGrpSpPr>
-      <p:grpSpPr/>
-      <p:sp>
-        <p:nvSpPr>
-          <p:cNvPr id="2" name="TextBox 1"/>
-          <p:cNvSpPr txBox="1"/>
-          <p:nvPr/>
-        </p:nvSpPr>
-        <p:spPr>
-          <a:xfrm>
-            <a:off x="548640" y="292608"/>
-            <a:ext cx="11064240" cy="822960"/>
-          </a:xfrm>
-          <a:prstGeom prst="rect">
-            <a:avLst/>
-          </a:prstGeom>
-          <a:noFill/>
-        </p:spPr>
-        <p:txBody>
-          <a:bodyPr wrap="square">
-            <a:spAutoFit/>
-          </a:bodyPr>
-          <a:lstStyle/>
-          <a:p>
-            <a:pPr algn="l"/>
-            <a:r>
-              <a:rPr sz="3000" b="1">
-                <a:solidFill>
-                  <a:srgbClr val="1A1A1A"/>
-                </a:solidFill>
-                <a:latin typeface="DejaVu Sans"/>
-              </a:rPr>
-              <a:t>Where to look</a:t>
-            </a:r>
-          </a:p>
-        </p:txBody>
-      </p:sp>
-      <p:sp>
-        <p:nvSpPr>
-          <p:cNvPr id="3" name="TextBox 2"/>
-          <p:cNvSpPr txBox="1"/>
-          <p:nvPr/>
-        </p:nvSpPr>
-        <p:spPr>
-          <a:xfrm>
-            <a:off x="640080" y="1234440"/>
-            <a:ext cx="10972800" cy="4754880"/>
-          </a:xfrm>
-          <a:prstGeom prst="rect">
-            <a:avLst/>
-          </a:prstGeom>
-          <a:noFill/>
-        </p:spPr>
-        <p:txBody>
-          <a:bodyPr wrap="square">
-            <a:spAutoFit/>
-          </a:bodyPr>
-          <a:lstStyle/>
-          <a:p>
-            <a:pPr>
-              <a:lnSpc>
-                <a:spcPct val="100000"/>
-              </a:lnSpc>
-              <a:spcAft>
-                <a:spcPts val="1000"/>
-              </a:spcAft>
-            </a:pPr>
-            <a:r>
-              <a:rPr sz="1500" b="0">
-                <a:solidFill>
-                  <a:srgbClr val="1A1A1A"/>
-                </a:solidFill>
-                <a:latin typeface="DejaVu Sans"/>
-              </a:rPr>
-              <a:t>documentation/status.md: what works and what does not, every number with its source</a:t>
-            </a:r>
-          </a:p>
-          <a:p>
-            <a:pPr>
-              <a:lnSpc>
-                <a:spcPct val="100000"/>
-              </a:lnSpc>
-              <a:spcAft>
-                <a:spcPts val="1000"/>
-              </a:spcAft>
-            </a:pPr>
-            <a:r>
-              <a:rPr sz="1500" b="0">
-                <a:solidFill>
-                  <a:srgbClr val="1A1A1A"/>
-                </a:solidFill>
-                <a:latin typeface="DejaVu Sans"/>
-              </a:rPr>
-              <a:t>code/models/: model cards with holdout metrics and explicit generalization verdicts</a:t>
-            </a:r>
-          </a:p>
-          <a:p>
-            <a:pPr>
-              <a:lnSpc>
-                <a:spcPct val="100000"/>
-              </a:lnSpc>
-              <a:spcAft>
-                <a:spcPts val="1000"/>
-              </a:spcAft>
-            </a:pPr>
-            <a:r>
-              <a:rPr sz="1500" b="0">
-                <a:solidFill>
-                  <a:srgbClr val="1A1A1A"/>
-                </a:solidFill>
-                <a:latin typeface="DejaVu Sans"/>
-              </a:rPr>
-              <a:t>documentation/system/crepe-stages.md: the robot's stages, and where runs fail</a:t>
-            </a:r>
-          </a:p>
-          <a:p>
-            <a:pPr>
-              <a:lnSpc>
-                <a:spcPct val="100000"/>
-              </a:lnSpc>
-              <a:spcAft>
-                <a:spcPts val="1000"/>
-              </a:spcAft>
-            </a:pPr>
-            <a:r>
-              <a:rPr sz="1500" b="0">
-                <a:solidFill>
-                  <a:srgbClr val="1A1A1A"/>
-                </a:solidFill>
-                <a:latin typeface="DejaVu Sans"/>
-              </a:rPr>
-              <a:t>documentation/data/pipeline.md: dashboard to MCAP to tables, and the vision score columns</a:t>
-            </a:r>
-          </a:p>
-          <a:p>
-            <a:pPr>
-              <a:lnSpc>
-                <a:spcPct val="100000"/>
-              </a:lnSpc>
-              <a:spcAft>
-                <a:spcPts val="1000"/>
-              </a:spcAft>
-            </a:pPr>
-            <a:r>
-              <a:rPr sz="1500" b="0">
-                <a:solidFill>
-                  <a:srgbClr val="1A1A1A"/>
-                </a:solidFill>
-                <a:latin typeface="DejaVu Sans"/>
-              </a:rPr>
-              <a:t>Take away: an honest, documented pipeline with real measurements; the models are experiments, and the next runs are the fix</a:t>
-            </a:r>
-          </a:p>
-        </p:txBody>
-      </p:sp>
-      <p:sp>
-        <p:nvSpPr>
-          <p:cNvPr id="4" name="TextBox 3"/>
-          <p:cNvSpPr txBox="1"/>
-          <p:nvPr/>
-        </p:nvSpPr>
-        <p:spPr>
-          <a:xfrm>
-            <a:off x="548640" y="6327648"/>
-            <a:ext cx="9601200" cy="365760"/>
-          </a:xfrm>
-          <a:prstGeom prst="rect">
-            <a:avLst/>
-          </a:prstGeom>
-          <a:noFill/>
-        </p:spPr>
-        <p:txBody>
-          <a:bodyPr wrap="square">
-            <a:spAutoFit/>
-          </a:bodyPr>
-          <a:lstStyle/>
-          <a:p>
-            <a:r>
-              <a:rPr sz="1000" b="0">
-                <a:solidFill>
-                  <a:srgbClr val="6B6B6B"/>
-                </a:solidFill>
-                <a:latin typeface="DejaVu Sans"/>
-              </a:rPr>
-              <a:t>CrepeFlow, BaselHack 2026</a:t>
-            </a:r>
-          </a:p>
-        </p:txBody>
-      </p:sp>
-      <p:sp>
-        <p:nvSpPr>
-          <p:cNvPr id="5" name="TextBox 4"/>
-          <p:cNvSpPr txBox="1"/>
-          <p:nvPr/>
-        </p:nvSpPr>
-        <p:spPr>
-          <a:xfrm>
-            <a:off x="11247120" y="6327648"/>
-            <a:ext cx="548640" cy="365760"/>
-          </a:xfrm>
-          <a:prstGeom prst="rect">
-            <a:avLst/>
-          </a:prstGeom>
-          <a:noFill/>
-        </p:spPr>
-        <p:txBody>
-          <a:bodyPr wrap="square">
-            <a:spAutoFit/>
-          </a:bodyPr>
-          <a:lstStyle/>
-          <a:p>
-            <a:pPr algn="r"/>
-            <a:r>
-              <a:rPr sz="1000" b="0">
-                <a:solidFill>
-                  <a:srgbClr val="6B6B6B"/>
-                </a:solidFill>
-                <a:latin typeface="DejaVu Sans"/>
-              </a:rPr>
-              <a:t>14</a:t>
+              <a:t>BaselHack 2026 - Maus Robotics challenge</a:t>
             </a:r>
           </a:p>
         </p:txBody>
@@ -6122,6 +3774,14 @@
 <file path=ppt/slides/slide2.xml><?xml version="1.0" encoding="utf-8"?>
 <p:sld xmlns:a="http://schemas.openxmlformats.org/drawingml/2006/main" xmlns:p="http://schemas.openxmlformats.org/presentationml/2006/main" xmlns:r="http://schemas.openxmlformats.org/officeDocument/2006/relationships">
   <p:cSld>
+    <p:bg>
+      <p:bgPr>
+        <a:solidFill>
+          <a:srgbClr val="FFF6EC"/>
+        </a:solidFill>
+        <a:effectLst/>
+      </p:bgPr>
+    </p:bg>
     <p:spTree>
       <p:nvGrpSpPr>
         <p:cNvPr id="1" name=""/>
@@ -6155,25 +3815,381 @@
             <a:r>
               <a:rPr sz="3000" b="1">
                 <a:solidFill>
-                  <a:srgbClr val="1A1A1A"/>
+                  <a:srgbClr val="4A3226"/>
                 </a:solidFill>
                 <a:latin typeface="DejaVu Sans"/>
               </a:rPr>
-              <a:t>The problem, and what Maus asked for</a:t>
-            </a:r>
-          </a:p>
-        </p:txBody>
-      </p:sp>
-      <p:sp>
-        <p:nvSpPr>
-          <p:cNvPr id="3" name="TextBox 2"/>
+              <a:t>What we built</a:t>
+            </a:r>
+          </a:p>
+        </p:txBody>
+      </p:sp>
+      <p:sp>
+        <p:nvSpPr>
+          <p:cNvPr id="3" name="Rounded Rectangle 2"/>
+          <p:cNvSpPr/>
+          <p:nvPr/>
+        </p:nvSpPr>
+        <p:spPr>
+          <a:xfrm>
+            <a:off x="365760" y="1325880"/>
+            <a:ext cx="2658618" cy="2286000"/>
+          </a:xfrm>
+          <a:prstGeom prst="roundRect">
+            <a:avLst>
+              <a:gd name="adj" fmla="val 12000"/>
+            </a:avLst>
+          </a:prstGeom>
+          <a:solidFill>
+            <a:srgbClr val="E8A87C"/>
+          </a:solidFill>
+          <a:ln w="15875">
+            <a:solidFill>
+              <a:srgbClr val="E8A87C"/>
+            </a:solidFill>
+          </a:ln>
+          <a:effectLst/>
+        </p:spPr>
+        <p:style>
+          <a:lnRef idx="1">
+            <a:schemeClr val="accent1"/>
+          </a:lnRef>
+          <a:fillRef idx="3">
+            <a:schemeClr val="accent1"/>
+          </a:fillRef>
+          <a:effectRef idx="2">
+            <a:schemeClr val="accent1"/>
+          </a:effectRef>
+          <a:fontRef idx="minor">
+            <a:schemeClr val="lt1"/>
+          </a:fontRef>
+        </p:style>
+        <p:txBody>
+          <a:bodyPr rtlCol="0" anchor="ctr" wrap="square" lIns="164592" rIns="164592" tIns="219456" bIns="146304"/>
+          <a:lstStyle/>
+          <a:p>
+            <a:pPr algn="l"/>
+            <a:r>
+              <a:rPr sz="4000" b="1">
+                <a:solidFill>
+                  <a:srgbClr val="4A3226"/>
+                </a:solidFill>
+                <a:latin typeface="DejaVu Sans"/>
+              </a:rPr>
+              <a:t>828</a:t>
+            </a:r>
+          </a:p>
+          <a:p>
+            <a:pPr algn="l">
+              <a:spcBef>
+                <a:spcPts val="400"/>
+              </a:spcBef>
+            </a:pPr>
+            <a:r>
+              <a:rPr sz="1500" b="1">
+                <a:solidFill>
+                  <a:srgbClr val="4A3226"/>
+                </a:solidFill>
+                <a:latin typeface="DejaVu Sans"/>
+              </a:rPr>
+              <a:t>runs logged</a:t>
+            </a:r>
+          </a:p>
+          <a:p>
+            <a:pPr algn="l">
+              <a:spcBef>
+                <a:spcPts val="600"/>
+              </a:spcBef>
+            </a:pPr>
+            <a:r>
+              <a:rPr sz="1100" b="0">
+                <a:solidFill>
+                  <a:srgbClr val="4A3226"/>
+                </a:solidFill>
+                <a:latin typeface="DejaVu Sans"/>
+              </a:rPr>
+              <a:t>2 Sep to 30 Oct 2026</a:t>
+            </a:r>
+          </a:p>
+        </p:txBody>
+      </p:sp>
+      <p:sp>
+        <p:nvSpPr>
+          <p:cNvPr id="4" name="Rounded Rectangle 3"/>
+          <p:cNvSpPr/>
+          <p:nvPr/>
+        </p:nvSpPr>
+        <p:spPr>
+          <a:xfrm>
+            <a:off x="3298698" y="1325880"/>
+            <a:ext cx="2658618" cy="2286000"/>
+          </a:xfrm>
+          <a:prstGeom prst="roundRect">
+            <a:avLst>
+              <a:gd name="adj" fmla="val 12000"/>
+            </a:avLst>
+          </a:prstGeom>
+          <a:solidFill>
+            <a:srgbClr val="F28B9B"/>
+          </a:solidFill>
+          <a:ln w="15875">
+            <a:solidFill>
+              <a:srgbClr val="E8A87C"/>
+            </a:solidFill>
+          </a:ln>
+          <a:effectLst/>
+        </p:spPr>
+        <p:style>
+          <a:lnRef idx="1">
+            <a:schemeClr val="accent1"/>
+          </a:lnRef>
+          <a:fillRef idx="3">
+            <a:schemeClr val="accent1"/>
+          </a:fillRef>
+          <a:effectRef idx="2">
+            <a:schemeClr val="accent1"/>
+          </a:effectRef>
+          <a:fontRef idx="minor">
+            <a:schemeClr val="lt1"/>
+          </a:fontRef>
+        </p:style>
+        <p:txBody>
+          <a:bodyPr rtlCol="0" anchor="ctr" wrap="square" lIns="164592" rIns="164592" tIns="219456" bIns="146304"/>
+          <a:lstStyle/>
+          <a:p>
+            <a:pPr algn="l"/>
+            <a:r>
+              <a:rPr sz="4000" b="1">
+                <a:solidFill>
+                  <a:srgbClr val="4A3226"/>
+                </a:solidFill>
+                <a:latin typeface="DejaVu Sans"/>
+              </a:rPr>
+              <a:t>138</a:t>
+            </a:r>
+          </a:p>
+          <a:p>
+            <a:pPr algn="l">
+              <a:spcBef>
+                <a:spcPts val="400"/>
+              </a:spcBef>
+            </a:pPr>
+            <a:r>
+              <a:rPr sz="1500" b="1">
+                <a:solidFill>
+                  <a:srgbClr val="4A3226"/>
+                </a:solidFill>
+                <a:latin typeface="DejaVu Sans"/>
+              </a:rPr>
+              <a:t>vision-scored runs</a:t>
+            </a:r>
+          </a:p>
+          <a:p>
+            <a:pPr algn="l">
+              <a:spcBef>
+                <a:spcPts val="600"/>
+              </a:spcBef>
+            </a:pPr>
+            <a:r>
+              <a:rPr sz="1100" b="0">
+                <a:solidFill>
+                  <a:srgbClr val="4A3226"/>
+                </a:solidFill>
+                <a:latin typeface="DejaVu Sans"/>
+              </a:rPr>
+              <a:t>all in October</a:t>
+            </a:r>
+          </a:p>
+        </p:txBody>
+      </p:sp>
+      <p:sp>
+        <p:nvSpPr>
+          <p:cNvPr id="5" name="Rounded Rectangle 4"/>
+          <p:cNvSpPr/>
+          <p:nvPr/>
+        </p:nvSpPr>
+        <p:spPr>
+          <a:xfrm>
+            <a:off x="6231636" y="1325880"/>
+            <a:ext cx="2658618" cy="2286000"/>
+          </a:xfrm>
+          <a:prstGeom prst="roundRect">
+            <a:avLst>
+              <a:gd name="adj" fmla="val 12000"/>
+            </a:avLst>
+          </a:prstGeom>
+          <a:solidFill>
+            <a:srgbClr val="E8A87C"/>
+          </a:solidFill>
+          <a:ln w="15875">
+            <a:solidFill>
+              <a:srgbClr val="E8A87C"/>
+            </a:solidFill>
+          </a:ln>
+          <a:effectLst/>
+        </p:spPr>
+        <p:style>
+          <a:lnRef idx="1">
+            <a:schemeClr val="accent1"/>
+          </a:lnRef>
+          <a:fillRef idx="3">
+            <a:schemeClr val="accent1"/>
+          </a:fillRef>
+          <a:effectRef idx="2">
+            <a:schemeClr val="accent1"/>
+          </a:effectRef>
+          <a:fontRef idx="minor">
+            <a:schemeClr val="lt1"/>
+          </a:fontRef>
+        </p:style>
+        <p:txBody>
+          <a:bodyPr rtlCol="0" anchor="ctr" wrap="square" lIns="164592" rIns="164592" tIns="219456" bIns="146304"/>
+          <a:lstStyle/>
+          <a:p>
+            <a:pPr algn="l"/>
+            <a:r>
+              <a:rPr sz="4000" b="1">
+                <a:solidFill>
+                  <a:srgbClr val="4A3226"/>
+                </a:solidFill>
+                <a:latin typeface="DejaVu Sans"/>
+              </a:rPr>
+              <a:t>4</a:t>
+            </a:r>
+          </a:p>
+          <a:p>
+            <a:pPr algn="l">
+              <a:spcBef>
+                <a:spcPts val="400"/>
+              </a:spcBef>
+            </a:pPr>
+            <a:r>
+              <a:rPr sz="1500" b="1">
+                <a:solidFill>
+                  <a:srgbClr val="4A3226"/>
+                </a:solidFill>
+                <a:latin typeface="DejaVu Sans"/>
+              </a:rPr>
+              <a:t>check-verdict heads</a:t>
+            </a:r>
+          </a:p>
+          <a:p>
+            <a:pPr algn="l">
+              <a:spcBef>
+                <a:spcPts val="600"/>
+              </a:spcBef>
+            </a:pPr>
+            <a:r>
+              <a:rPr sz="1100" b="0">
+                <a:solidFill>
+                  <a:srgbClr val="4A3226"/>
+                </a:solidFill>
+                <a:latin typeface="DejaVu Sans"/>
+              </a:rPr>
+              <a:t>one per check, ONNX</a:t>
+            </a:r>
+          </a:p>
+        </p:txBody>
+      </p:sp>
+      <p:sp>
+        <p:nvSpPr>
+          <p:cNvPr id="6" name="Rounded Rectangle 5"/>
+          <p:cNvSpPr/>
+          <p:nvPr/>
+        </p:nvSpPr>
+        <p:spPr>
+          <a:xfrm>
+            <a:off x="9164574" y="1325880"/>
+            <a:ext cx="2658618" cy="2286000"/>
+          </a:xfrm>
+          <a:prstGeom prst="roundRect">
+            <a:avLst>
+              <a:gd name="adj" fmla="val 12000"/>
+            </a:avLst>
+          </a:prstGeom>
+          <a:solidFill>
+            <a:srgbClr val="F28B9B"/>
+          </a:solidFill>
+          <a:ln w="15875">
+            <a:solidFill>
+              <a:srgbClr val="E8A87C"/>
+            </a:solidFill>
+          </a:ln>
+          <a:effectLst/>
+        </p:spPr>
+        <p:style>
+          <a:lnRef idx="1">
+            <a:schemeClr val="accent1"/>
+          </a:lnRef>
+          <a:fillRef idx="3">
+            <a:schemeClr val="accent1"/>
+          </a:fillRef>
+          <a:effectRef idx="2">
+            <a:schemeClr val="accent1"/>
+          </a:effectRef>
+          <a:fontRef idx="minor">
+            <a:schemeClr val="lt1"/>
+          </a:fontRef>
+        </p:style>
+        <p:txBody>
+          <a:bodyPr rtlCol="0" anchor="ctr" wrap="square" lIns="164592" rIns="164592" tIns="219456" bIns="146304"/>
+          <a:lstStyle/>
+          <a:p>
+            <a:pPr algn="l"/>
+            <a:r>
+              <a:rPr sz="4000" b="1">
+                <a:solidFill>
+                  <a:srgbClr val="4A3226"/>
+                </a:solidFill>
+                <a:latin typeface="DejaVu Sans"/>
+              </a:rPr>
+              <a:t>1</a:t>
+            </a:r>
+          </a:p>
+          <a:p>
+            <a:pPr algn="l">
+              <a:spcBef>
+                <a:spcPts val="400"/>
+              </a:spcBef>
+            </a:pPr>
+            <a:r>
+              <a:rPr sz="1500" b="1">
+                <a:solidFill>
+                  <a:srgbClr val="4A3226"/>
+                </a:solidFill>
+                <a:latin typeface="DejaVu Sans"/>
+              </a:rPr>
+              <a:t>fold-class model</a:t>
+            </a:r>
+          </a:p>
+          <a:p>
+            <a:pPr algn="l">
+              <a:spcBef>
+                <a:spcPts val="600"/>
+              </a:spcBef>
+            </a:pPr>
+            <a:r>
+              <a:rPr sz="1100" b="0">
+                <a:solidFill>
+                  <a:srgbClr val="4A3226"/>
+                </a:solidFill>
+                <a:latin typeface="DejaVu Sans"/>
+              </a:rPr>
+              <a:t>empty / flat / half / quarter</a:t>
+            </a:r>
+          </a:p>
+        </p:txBody>
+      </p:sp>
+      <p:sp>
+        <p:nvSpPr>
+          <p:cNvPr id="7" name="TextBox 6"/>
           <p:cNvSpPr txBox="1"/>
           <p:nvPr/>
         </p:nvSpPr>
         <p:spPr>
           <a:xfrm>
-            <a:off x="640080" y="1234440"/>
-            <a:ext cx="10972800" cy="4754880"/>
+            <a:off x="640080" y="3977640"/>
+            <a:ext cx="10972800" cy="2103120"/>
           </a:xfrm>
           <a:prstGeom prst="rect">
             <a:avLst/>
@@ -6191,17 +4207,17 @@
                 <a:spcPct val="100000"/>
               </a:lnSpc>
               <a:spcAft>
-                <a:spcPts val="1000"/>
+                <a:spcPts val="900"/>
               </a:spcAft>
             </a:pPr>
             <a:r>
-              <a:rPr sz="1500" b="0">
+              <a:rPr sz="1300" b="0">
                 <a:solidFill>
-                  <a:srgbClr val="1A1A1A"/>
+                  <a:srgbClr val="4A3226"/>
                 </a:solidFill>
                 <a:latin typeface="DejaVu Sans"/>
               </a:rPr>
-              <a:t>The robot decides everything on board: a Raspberry Pi 5, ROS 2, two Duet motion boards, a camera over the hotplate</a:t>
+              <a:t>- Honest read: three of four check heads do not generalize (balanced accuracy 0.67 to 0.92 on 31 to 61 frame holdouts).</a:t>
             </a:r>
           </a:p>
           <a:p>
@@ -6210,17 +4226,17 @@
                 <a:spcPct val="100000"/>
               </a:lnSpc>
               <a:spcAft>
-                <a:spcPts val="1000"/>
+                <a:spcPts val="900"/>
               </a:spcAft>
             </a:pPr>
             <a:r>
-              <a:rPr sz="1500" b="0">
+              <a:rPr sz="1300" b="0">
                 <a:solidFill>
-                  <a:srgbClr val="1A1A1A"/>
+                  <a:srgbClr val="4A3226"/>
                 </a:solidFill>
                 <a:latin typeface="DejaVu Sans"/>
               </a:rPr>
-              <a:t>Every run is logged: phases, ROS logs, about 110 recipe settings, camera checks with images, video</a:t>
+              <a:t>- fold-class scores 0.99 on 110 frames, but on weak labels; quarter recall drops to 0.02 of 82 frames when maus-quin is held out.</a:t>
             </a:r>
           </a:p>
           <a:p>
@@ -6229,62 +4245,24 @@
                 <a:spcPct val="100000"/>
               </a:lnSpc>
               <a:spcAft>
-                <a:spcPts val="1000"/>
+                <a:spcPts val="900"/>
               </a:spcAft>
             </a:pPr>
             <a:r>
-              <a:rPr sz="1500" b="0">
+              <a:rPr sz="1300" b="0">
                 <a:solidFill>
-                  <a:srgbClr val="1A1A1A"/>
+                  <a:srgbClr val="4A3226"/>
                 </a:solidFill>
                 <a:latin typeface="DejaVu Sans"/>
               </a:rPr>
-              <a:t>A failure is recorded as pass or fail plus one short message: no measurement, no reason, no direction to change</a:t>
-            </a:r>
-          </a:p>
-          <a:p>
-            <a:pPr>
-              <a:lnSpc>
-                <a:spcPct val="100000"/>
-              </a:lnSpc>
-              <a:spcAft>
-                <a:spcPts val="1000"/>
-              </a:spcAft>
-            </a:pPr>
-            <a:r>
-              <a:rPr sz="1500" b="0">
-                <a:solidFill>
-                  <a:srgbClr val="1A1A1A"/>
-                </a:solidFill>
-                <a:latin typeface="DejaVu Sans"/>
-              </a:rPr>
-              <a:t>Maus asked for three things: spread quality (mask, diameter, quality score); position and orientation (centre and angle for the spatula); fold detection (flat / half / quarter / triangle plus edge angle)</a:t>
-            </a:r>
-          </a:p>
-          <a:p>
-            <a:pPr>
-              <a:lnSpc>
-                <a:spcPct val="100000"/>
-              </a:lnSpc>
-              <a:spcAft>
-                <a:spcPts val="1000"/>
-              </a:spcAft>
-            </a:pPr>
-            <a:r>
-              <a:rPr sz="1500" b="0">
-                <a:solidFill>
-                  <a:srgbClr val="1A1A1A"/>
-                </a:solidFill>
-                <a:latin typeface="DejaVu Sans"/>
-              </a:rPr>
-              <a:t>Scored at two levels. Level 1: works on Maus data, scored against the robot's own checks. Level 2: real time, under about 300 ms per frame on a Raspberry Pi 5 CPU</a:t>
-            </a:r>
-          </a:p>
-        </p:txBody>
-      </p:sp>
-      <p:sp>
-        <p:nvSpPr>
-          <p:cNvPr id="4" name="TextBox 3"/>
+              <a:t>- 690 of the 828 runs have no camera measurement at all - checks only exist from 13 October, so they are unmeasured, not evidence.</a:t>
+            </a:r>
+          </a:p>
+        </p:txBody>
+      </p:sp>
+      <p:sp>
+        <p:nvSpPr>
+          <p:cNvPr id="8" name="TextBox 7"/>
           <p:cNvSpPr txBox="1"/>
           <p:nvPr/>
         </p:nvSpPr>
@@ -6307,18 +4285,18 @@
             <a:r>
               <a:rPr sz="1000" b="0">
                 <a:solidFill>
-                  <a:srgbClr val="6B6B6B"/>
+                  <a:srgbClr val="9C7A63"/>
                 </a:solidFill>
                 <a:latin typeface="DejaVu Sans"/>
               </a:rPr>
-              <a:t>Source: repo challenge table (PR #86), system.md</a:t>
-            </a:r>
-          </a:p>
-        </p:txBody>
-      </p:sp>
-      <p:sp>
-        <p:nvSpPr>
-          <p:cNvPr id="5" name="TextBox 4"/>
+              <a:t>Source: runs.parquet, vision.parquet, model cards</a:t>
+            </a:r>
+          </a:p>
+        </p:txBody>
+      </p:sp>
+      <p:sp>
+        <p:nvSpPr>
+          <p:cNvPr id="9" name="TextBox 8"/>
           <p:cNvSpPr txBox="1"/>
           <p:nvPr/>
         </p:nvSpPr>
@@ -6342,7 +4320,7 @@
             <a:r>
               <a:rPr sz="1000" b="0">
                 <a:solidFill>
-                  <a:srgbClr val="6B6B6B"/>
+                  <a:srgbClr val="9C7A63"/>
                 </a:solidFill>
                 <a:latin typeface="DejaVu Sans"/>
               </a:rPr>
@@ -6362,6 +4340,14 @@
 <file path=ppt/slides/slide3.xml><?xml version="1.0" encoding="utf-8"?>
 <p:sld xmlns:a="http://schemas.openxmlformats.org/drawingml/2006/main" xmlns:p="http://schemas.openxmlformats.org/presentationml/2006/main" xmlns:r="http://schemas.openxmlformats.org/officeDocument/2006/relationships">
   <p:cSld>
+    <p:bg>
+      <p:bgPr>
+        <a:solidFill>
+          <a:srgbClr val="FFF6EC"/>
+        </a:solidFill>
+        <a:effectLst/>
+      </p:bgPr>
+    </p:bg>
     <p:spTree>
       <p:nvGrpSpPr>
         <p:cNvPr id="1" name=""/>
@@ -6395,11 +4381,11 @@
             <a:r>
               <a:rPr sz="3000" b="1">
                 <a:solidFill>
-                  <a:srgbClr val="1A1A1A"/>
+                  <a:srgbClr val="4A3226"/>
                 </a:solidFill>
                 <a:latin typeface="DejaVu Sans"/>
               </a:rPr>
-              <a:t>What we had to work with</a:t>
+              <a:t>See it live</a:t>
             </a:r>
           </a:p>
         </p:txBody>
@@ -6412,8 +4398,8 @@
         </p:nvSpPr>
         <p:spPr>
           <a:xfrm>
-            <a:off x="640080" y="1234440"/>
-            <a:ext cx="10972800" cy="4754880"/>
+            <a:off x="640080" y="1463040"/>
+            <a:ext cx="10972800" cy="4572000"/>
           </a:xfrm>
           <a:prstGeom prst="rect">
             <a:avLst/>
@@ -6431,17 +4417,17 @@
                 <a:spcPct val="100000"/>
               </a:lnSpc>
               <a:spcAft>
-                <a:spcPts val="1000"/>
+                <a:spcPts val="2600"/>
               </a:spcAft>
             </a:pPr>
             <a:r>
-              <a:rPr sz="1500" b="0">
+              <a:rPr sz="2000" b="1">
                 <a:solidFill>
-                  <a:srgbClr val="1A1A1A"/>
+                  <a:srgbClr val="F28B9B"/>
                 </a:solidFill>
                 <a:latin typeface="DejaVu Sans"/>
               </a:rPr>
-              <a:t>828 runs, 2 September to 30 October 2026 (UTC), visible to one hackathon dashboard account</a:t>
+              <a:t>Website: https://YOUR-WEBSITE-HERE.example</a:t>
             </a:r>
           </a:p>
           <a:p>
@@ -6450,17 +4436,17 @@
                 <a:spcPct val="100000"/>
               </a:lnSpc>
               <a:spcAft>
-                <a:spcPts val="1000"/>
+                <a:spcPts val="2600"/>
               </a:spcAft>
             </a:pPr>
             <a:r>
-              <a:rPr sz="1500" b="0">
+              <a:rPr sz="2000" b="1">
                 <a:solidFill>
-                  <a:srgbClr val="1A1A1A"/>
+                  <a:srgbClr val="E8A87C"/>
                 </a:solidFill>
                 <a:latin typeface="DejaVu Sans"/>
               </a:rPr>
-              <a:t>Three robots: maus-pixi 410 runs, maus-quin 384, maus-otto 34</a:t>
+              <a:t>Repo: https://github.com/leonardoAB1/maus-crepe-insights</a:t>
             </a:r>
           </a:p>
           <a:p>
@@ -6469,74 +4455,17 @@
                 <a:spcPct val="100000"/>
               </a:lnSpc>
               <a:spcAft>
-                <a:spcPts val="1000"/>
+                <a:spcPts val="1200"/>
               </a:spcAft>
             </a:pPr>
             <a:r>
-              <a:rPr sz="1500" b="0">
+              <a:rPr sz="1700" b="0">
                 <a:solidFill>
-                  <a:srgbClr val="1A1A1A"/>
+                  <a:srgbClr val="4A3226"/>
                 </a:solidFill>
                 <a:latin typeface="DejaVu Sans"/>
               </a:rPr>
-              <a:t>633 test runs, 195 customer runs</a:t>
-            </a:r>
-          </a:p>
-          <a:p>
-            <a:pPr>
-              <a:lnSpc>
-                <a:spcPct val="100000"/>
-              </a:lnSpc>
-              <a:spcAft>
-                <a:spcPts val="1000"/>
-              </a:spcAft>
-            </a:pPr>
-            <a:r>
-              <a:rPr sz="1500" b="0">
-                <a:solidFill>
-                  <a:srgbClr val="1A1A1A"/>
-                </a:solidFill>
-                <a:latin typeface="DejaVu Sans"/>
-              </a:rPr>
-              <a:t>Outcomes: 470 succeeded, 148 not_succeeded, 129 aborted, 81 canceled</a:t>
-            </a:r>
-          </a:p>
-          <a:p>
-            <a:pPr>
-              <a:lnSpc>
-                <a:spcPct val="100000"/>
-              </a:lnSpc>
-              <a:spcAft>
-                <a:spcPts val="1000"/>
-              </a:spcAft>
-            </a:pPr>
-            <a:r>
-              <a:rPr sz="1500" b="0">
-                <a:solidFill>
-                  <a:srgbClr val="1A1A1A"/>
-                </a:solidFill>
-                <a:latin typeface="DejaVu Sans"/>
-              </a:rPr>
-              <a:t>Camera checks with images exist only from 13 October: 160 of the 828 runs, so 690 runs have no measurement at all</a:t>
-            </a:r>
-          </a:p>
-          <a:p>
-            <a:pPr>
-              <a:lnSpc>
-                <a:spcPct val="100000"/>
-              </a:lnSpc>
-              <a:spcAft>
-                <a:spcPts val="1000"/>
-              </a:spcAft>
-            </a:pPr>
-            <a:r>
-              <a:rPr sz="1500" b="0">
-                <a:solidFill>
-                  <a:srgbClr val="1A1A1A"/>
-                </a:solidFill>
-                <a:latin typeface="DejaVu Sans"/>
-              </a:rPr>
-              <a:t>Every one of the 148 not_succeeded runs ends at plate_load, and 117 of them have no check data</a:t>
+              <a:t>Ask: more check records, because 117 of the 148 failed runs have none, and about 140 to 150 interleaved runs per robot, to turn the open questions into answers.</a:t>
             </a:r>
           </a:p>
         </p:txBody>
@@ -6566,11 +4495,11 @@
             <a:r>
               <a:rPr sz="1000" b="0">
                 <a:solidFill>
-                  <a:srgbClr val="6B6B6B"/>
+                  <a:srgbClr val="9C7A63"/>
                 </a:solidFill>
                 <a:latin typeface="DejaVu Sans"/>
               </a:rPr>
-              <a:t>Source: runs.parquet (828 rows), audit report</a:t>
+              <a:t>Public repo; the Maus run data stays out of Git</a:t>
             </a:r>
           </a:p>
         </p:txBody>
@@ -6601,1779 +4530,11 @@
             <a:r>
               <a:rPr sz="1000" b="0">
                 <a:solidFill>
-                  <a:srgbClr val="6B6B6B"/>
+                  <a:srgbClr val="9C7A63"/>
                 </a:solidFill>
                 <a:latin typeface="DejaVu Sans"/>
               </a:rPr>
               <a:t>3</a:t>
-            </a:r>
-          </a:p>
-        </p:txBody>
-      </p:sp>
-    </p:spTree>
-  </p:cSld>
-  <p:clrMapOvr>
-    <a:masterClrMapping/>
-  </p:clrMapOvr>
-</p:sld>
-</file>
-
-<file path=ppt/slides/slide4.xml><?xml version="1.0" encoding="utf-8"?>
-<p:sld xmlns:a="http://schemas.openxmlformats.org/drawingml/2006/main" xmlns:p="http://schemas.openxmlformats.org/presentationml/2006/main" xmlns:r="http://schemas.openxmlformats.org/officeDocument/2006/relationships">
-  <p:cSld>
-    <p:spTree>
-      <p:nvGrpSpPr>
-        <p:cNvPr id="1" name=""/>
-        <p:cNvGrpSpPr/>
-        <p:nvPr/>
-      </p:nvGrpSpPr>
-      <p:grpSpPr/>
-      <p:sp>
-        <p:nvSpPr>
-          <p:cNvPr id="2" name="TextBox 1"/>
-          <p:cNvSpPr txBox="1"/>
-          <p:nvPr/>
-        </p:nvSpPr>
-        <p:spPr>
-          <a:xfrm>
-            <a:off x="548640" y="292608"/>
-            <a:ext cx="11064240" cy="822960"/>
-          </a:xfrm>
-          <a:prstGeom prst="rect">
-            <a:avLst/>
-          </a:prstGeom>
-          <a:noFill/>
-        </p:spPr>
-        <p:txBody>
-          <a:bodyPr wrap="square">
-            <a:spAutoFit/>
-          </a:bodyPr>
-          <a:lstStyle/>
-          <a:p>
-            <a:pPr algn="l"/>
-            <a:r>
-              <a:rPr sz="3000" b="1">
-                <a:solidFill>
-                  <a:srgbClr val="1A1A1A"/>
-                </a:solidFill>
-                <a:latin typeface="DejaVu Sans"/>
-              </a:rPr>
-              <a:t>What we built</a:t>
-            </a:r>
-          </a:p>
-        </p:txBody>
-      </p:sp>
-      <p:sp>
-        <p:nvSpPr>
-          <p:cNvPr id="3" name="TextBox 2"/>
-          <p:cNvSpPr txBox="1"/>
-          <p:nvPr/>
-        </p:nvSpPr>
-        <p:spPr>
-          <a:xfrm>
-            <a:off x="640080" y="1234440"/>
-            <a:ext cx="10972800" cy="4754880"/>
-          </a:xfrm>
-          <a:prstGeom prst="rect">
-            <a:avLst/>
-          </a:prstGeom>
-          <a:noFill/>
-        </p:spPr>
-        <p:txBody>
-          <a:bodyPr wrap="square">
-            <a:spAutoFit/>
-          </a:bodyPr>
-          <a:lstStyle/>
-          <a:p>
-            <a:pPr>
-              <a:lnSpc>
-                <a:spcPct val="100000"/>
-              </a:lnSpc>
-              <a:spcAft>
-                <a:spcPts val="1000"/>
-              </a:spcAft>
-            </a:pPr>
-            <a:r>
-              <a:rPr sz="1500" b="0">
-                <a:solidFill>
-                  <a:srgbClr val="1A1A1A"/>
-                </a:solidFill>
-                <a:latin typeface="DejaVu Sans"/>
-              </a:rPr>
-              <a:t>Export: a read-only dashboard client over MCP and OAuth, into raw run JSON plus check images and video</a:t>
-            </a:r>
-          </a:p>
-          <a:p>
-            <a:pPr>
-              <a:lnSpc>
-                <a:spcPct val="100000"/>
-              </a:lnSpc>
-              <a:spcAft>
-                <a:spcPts val="1000"/>
-              </a:spcAft>
-            </a:pPr>
-            <a:r>
-              <a:rPr sz="1500" b="0">
-                <a:solidFill>
-                  <a:srgbClr val="1A1A1A"/>
-                </a:solidFill>
-                <a:latin typeface="DejaVu Sans"/>
-              </a:rPr>
-              <a:t>MCAP: one ROS 2 profile file per run, 828 of them, ready for Foxglove and ros2 bag tools</a:t>
-            </a:r>
-          </a:p>
-          <a:p>
-            <a:pPr>
-              <a:lnSpc>
-                <a:spcPct val="100000"/>
-              </a:lnSpc>
-              <a:spcAft>
-                <a:spcPts val="1000"/>
-              </a:spcAft>
-            </a:pPr>
-            <a:r>
-              <a:rPr sz="1500" b="0">
-                <a:solidFill>
-                  <a:srgbClr val="1A1A1A"/>
-                </a:solidFill>
-                <a:latin typeface="DejaVu Sans"/>
-              </a:rPr>
-              <a:t>Tables: runs.parquet, 828 rows and 177 columns; vision.parquet, 138 scored runs</a:t>
-            </a:r>
-          </a:p>
-          <a:p>
-            <a:pPr>
-              <a:lnSpc>
-                <a:spcPct val="100000"/>
-              </a:lnSpc>
-              <a:spcAft>
-                <a:spcPts val="1000"/>
-              </a:spcAft>
-            </a:pPr>
-            <a:r>
-              <a:rPr sz="1500" b="0">
-                <a:solidFill>
-                  <a:srgbClr val="1A1A1A"/>
-                </a:solidFill>
-                <a:latin typeface="DejaVu Sans"/>
-              </a:rPr>
-              <a:t>Vision scores: the robot's own check overlays read back as numbers per run</a:t>
-            </a:r>
-          </a:p>
-          <a:p>
-            <a:pPr>
-              <a:lnSpc>
-                <a:spcPct val="100000"/>
-              </a:lnSpc>
-              <a:spcAft>
-                <a:spcPts val="1000"/>
-              </a:spcAft>
-            </a:pPr>
-            <a:r>
-              <a:rPr sz="1500" b="0">
-                <a:solidFill>
-                  <a:srgbClr val="1A1A1A"/>
-                </a:solidFill>
-                <a:latin typeface="DejaVu Sans"/>
-              </a:rPr>
-              <a:t>Models: ONNX heads with a model card each, trained and scored by one shared per-robot harness</a:t>
-            </a:r>
-          </a:p>
-          <a:p>
-            <a:pPr>
-              <a:lnSpc>
-                <a:spcPct val="100000"/>
-              </a:lnSpc>
-              <a:spcAft>
-                <a:spcPts val="1000"/>
-              </a:spcAft>
-            </a:pPr>
-            <a:r>
-              <a:rPr sz="1500" b="0">
-                <a:solidFill>
-                  <a:srgbClr val="1A1A1A"/>
-                </a:solidFill>
-                <a:latin typeface="DejaVu Sans"/>
-              </a:rPr>
-              <a:t>Labeling: a private local Label Studio 1.23.2 app, phase labels and material/hole masks</a:t>
-            </a:r>
-          </a:p>
-          <a:p>
-            <a:pPr>
-              <a:lnSpc>
-                <a:spcPct val="100000"/>
-              </a:lnSpc>
-              <a:spcAft>
-                <a:spcPts val="1000"/>
-              </a:spcAft>
-            </a:pPr>
-            <a:r>
-              <a:rPr sz="1500" b="0">
-                <a:solidFill>
-                  <a:srgbClr val="1A1A1A"/>
-                </a:solidFill>
-                <a:latin typeface="DejaVu Sans"/>
-              </a:rPr>
-              <a:t>Local run viewer: plays a run video and draws what the pipeline knows per frame</a:t>
-            </a:r>
-          </a:p>
-        </p:txBody>
-      </p:sp>
-      <p:sp>
-        <p:nvSpPr>
-          <p:cNvPr id="4" name="TextBox 3"/>
-          <p:cNvSpPr txBox="1"/>
-          <p:nvPr/>
-        </p:nvSpPr>
-        <p:spPr>
-          <a:xfrm>
-            <a:off x="548640" y="6327648"/>
-            <a:ext cx="9601200" cy="365760"/>
-          </a:xfrm>
-          <a:prstGeom prst="rect">
-            <a:avLst/>
-          </a:prstGeom>
-          <a:noFill/>
-        </p:spPr>
-        <p:txBody>
-          <a:bodyPr wrap="square">
-            <a:spAutoFit/>
-          </a:bodyPr>
-          <a:lstStyle/>
-          <a:p>
-            <a:r>
-              <a:rPr sz="1000" b="0">
-                <a:solidFill>
-                  <a:srgbClr val="6B6B6B"/>
-                </a:solidFill>
-                <a:latin typeface="DejaVu Sans"/>
-              </a:rPr>
-              <a:t>Stays in the gitignored data/</a:t>
-            </a:r>
-          </a:p>
-        </p:txBody>
-      </p:sp>
-      <p:sp>
-        <p:nvSpPr>
-          <p:cNvPr id="5" name="TextBox 4"/>
-          <p:cNvSpPr txBox="1"/>
-          <p:nvPr/>
-        </p:nvSpPr>
-        <p:spPr>
-          <a:xfrm>
-            <a:off x="11247120" y="6327648"/>
-            <a:ext cx="548640" cy="365760"/>
-          </a:xfrm>
-          <a:prstGeom prst="rect">
-            <a:avLst/>
-          </a:prstGeom>
-          <a:noFill/>
-        </p:spPr>
-        <p:txBody>
-          <a:bodyPr wrap="square">
-            <a:spAutoFit/>
-          </a:bodyPr>
-          <a:lstStyle/>
-          <a:p>
-            <a:pPr algn="r"/>
-            <a:r>
-              <a:rPr sz="1000" b="0">
-                <a:solidFill>
-                  <a:srgbClr val="6B6B6B"/>
-                </a:solidFill>
-                <a:latin typeface="DejaVu Sans"/>
-              </a:rPr>
-              <a:t>4</a:t>
-            </a:r>
-          </a:p>
-        </p:txBody>
-      </p:sp>
-    </p:spTree>
-  </p:cSld>
-  <p:clrMapOvr>
-    <a:masterClrMapping/>
-  </p:clrMapOvr>
-</p:sld>
-</file>
-
-<file path=ppt/slides/slide5.xml><?xml version="1.0" encoding="utf-8"?>
-<p:sld xmlns:a="http://schemas.openxmlformats.org/drawingml/2006/main" xmlns:p="http://schemas.openxmlformats.org/presentationml/2006/main" xmlns:r="http://schemas.openxmlformats.org/officeDocument/2006/relationships">
-  <p:cSld>
-    <p:spTree>
-      <p:nvGrpSpPr>
-        <p:cNvPr id="1" name=""/>
-        <p:cNvGrpSpPr/>
-        <p:nvPr/>
-      </p:nvGrpSpPr>
-      <p:grpSpPr/>
-      <p:sp>
-        <p:nvSpPr>
-          <p:cNvPr id="2" name="TextBox 1"/>
-          <p:cNvSpPr txBox="1"/>
-          <p:nvPr/>
-        </p:nvSpPr>
-        <p:spPr>
-          <a:xfrm>
-            <a:off x="548640" y="292608"/>
-            <a:ext cx="11064240" cy="822960"/>
-          </a:xfrm>
-          <a:prstGeom prst="rect">
-            <a:avLst/>
-          </a:prstGeom>
-          <a:noFill/>
-        </p:spPr>
-        <p:txBody>
-          <a:bodyPr wrap="square">
-            <a:spAutoFit/>
-          </a:bodyPr>
-          <a:lstStyle/>
-          <a:p>
-            <a:pPr algn="l"/>
-            <a:r>
-              <a:rPr sz="3000" b="1">
-                <a:solidFill>
-                  <a:srgbClr val="1A1A1A"/>
-                </a:solidFill>
-                <a:latin typeface="DejaVu Sans"/>
-              </a:rPr>
-              <a:t>Where runs fail</a:t>
-            </a:r>
-          </a:p>
-        </p:txBody>
-      </p:sp>
-      <p:sp>
-        <p:nvSpPr>
-          <p:cNvPr id="3" name="TextBox 2"/>
-          <p:cNvSpPr txBox="1"/>
-          <p:nvPr/>
-        </p:nvSpPr>
-        <p:spPr>
-          <a:xfrm>
-            <a:off x="640080" y="1234440"/>
-            <a:ext cx="10972800" cy="4754880"/>
-          </a:xfrm>
-          <a:prstGeom prst="rect">
-            <a:avLst/>
-          </a:prstGeom>
-          <a:noFill/>
-        </p:spPr>
-        <p:txBody>
-          <a:bodyPr wrap="square">
-            <a:spAutoFit/>
-          </a:bodyPr>
-          <a:lstStyle/>
-          <a:p>
-            <a:pPr>
-              <a:lnSpc>
-                <a:spcPct val="100000"/>
-              </a:lnSpc>
-              <a:spcAft>
-                <a:spcPts val="1000"/>
-              </a:spcAft>
-            </a:pPr>
-            <a:r>
-              <a:rPr sz="1500" b="0">
-                <a:solidFill>
-                  <a:srgbClr val="1A1A1A"/>
-                </a:solidFill>
-                <a:latin typeface="DejaVu Sans"/>
-              </a:rPr>
-              <a:t>Check fail rates over the runs that recorded a check (the robot's own verdicts):</a:t>
-            </a:r>
-          </a:p>
-          <a:p>
-            <a:pPr>
-              <a:lnSpc>
-                <a:spcPct val="100000"/>
-              </a:lnSpc>
-              <a:spcAft>
-                <a:spcPts val="1000"/>
-              </a:spcAft>
-            </a:pPr>
-            <a:r>
-              <a:rPr sz="1500" b="0">
-                <a:solidFill>
-                  <a:srgbClr val="1A1A1A"/>
-                </a:solidFill>
-                <a:latin typeface="DejaVu Sans"/>
-              </a:rPr>
-              <a:t>plate_present 30/79, spread 38/163, fold1 19/138, fold2 34/135</a:t>
-            </a:r>
-          </a:p>
-          <a:p>
-            <a:pPr>
-              <a:lnSpc>
-                <a:spcPct val="100000"/>
-              </a:lnSpc>
-              <a:spcAft>
-                <a:spcPts val="1000"/>
-              </a:spcAft>
-            </a:pPr>
-            <a:r>
-              <a:rPr sz="1500" b="0">
-                <a:solidFill>
-                  <a:srgbClr val="1A1A1A"/>
-                </a:solidFill>
-                <a:latin typeface="DejaVu Sans"/>
-              </a:rPr>
-              <a:t>plate_clean 20/182, plate_loaded 38/172</a:t>
-            </a:r>
-          </a:p>
-          <a:p>
-            <a:pPr>
-              <a:lnSpc>
-                <a:spcPct val="100000"/>
-              </a:lnSpc>
-              <a:spcAft>
-                <a:spcPts val="1000"/>
-              </a:spcAft>
-            </a:pPr>
-            <a:r>
-              <a:rPr sz="1500" b="0">
-                <a:solidFill>
-                  <a:srgbClr val="1A1A1A"/>
-                </a:solidFill>
-                <a:latin typeface="DejaVu Sans"/>
-              </a:rPr>
-              <a:t>push_off 140/259: it usually fails once by design while the plate is rotated and rechecked</a:t>
-            </a:r>
-          </a:p>
-          <a:p>
-            <a:pPr>
-              <a:lnSpc>
-                <a:spcPct val="100000"/>
-              </a:lnSpc>
-              <a:spcAft>
-                <a:spcPts val="1000"/>
-              </a:spcAft>
-            </a:pPr>
-            <a:r>
-              <a:rPr sz="1500" b="0">
-                <a:solidFill>
-                  <a:srgbClr val="1A1A1A"/>
-                </a:solidFill>
-                <a:latin typeface="DejaVu Sans"/>
-              </a:rPr>
-              <a:t>Among runs with check data, spread and the two folds explain most not_succeeded runs</a:t>
-            </a:r>
-          </a:p>
-          <a:p>
-            <a:pPr>
-              <a:lnSpc>
-                <a:spcPct val="100000"/>
-              </a:lnSpc>
-              <a:spcAft>
-                <a:spcPts val="1000"/>
-              </a:spcAft>
-            </a:pPr>
-            <a:r>
-              <a:rPr sz="1500" b="0">
-                <a:solidFill>
-                  <a:srgbClr val="1A1A1A"/>
-                </a:solidFill>
-                <a:latin typeface="DejaVu Sans"/>
-              </a:rPr>
-              <a:t>Every not_succeeded run ends at plate_load: the robot finishes the cycle, so the reason must come from the checks and logs, not from where the run stopped</a:t>
-            </a:r>
-          </a:p>
-          <a:p>
-            <a:pPr>
-              <a:lnSpc>
-                <a:spcPct val="100000"/>
-              </a:lnSpc>
-              <a:spcAft>
-                <a:spcPts val="1000"/>
-              </a:spcAft>
-            </a:pPr>
-            <a:r>
-              <a:rPr sz="1500" b="0">
-                <a:solidFill>
-                  <a:srgbClr val="1A1A1A"/>
-                </a:solidFill>
-                <a:latin typeface="DejaVu Sans"/>
-              </a:rPr>
-              <a:t>Cancels cluster in cook (34 of 66), the longest stage: likely a customer-facing wait</a:t>
-            </a:r>
-          </a:p>
-        </p:txBody>
-      </p:sp>
-      <p:sp>
-        <p:nvSpPr>
-          <p:cNvPr id="4" name="TextBox 3"/>
-          <p:cNvSpPr txBox="1"/>
-          <p:nvPr/>
-        </p:nvSpPr>
-        <p:spPr>
-          <a:xfrm>
-            <a:off x="548640" y="6327648"/>
-            <a:ext cx="9601200" cy="365760"/>
-          </a:xfrm>
-          <a:prstGeom prst="rect">
-            <a:avLst/>
-          </a:prstGeom>
-          <a:noFill/>
-        </p:spPr>
-        <p:txBody>
-          <a:bodyPr wrap="square">
-            <a:spAutoFit/>
-          </a:bodyPr>
-          <a:lstStyle/>
-          <a:p>
-            <a:r>
-              <a:rPr sz="1000" b="0">
-                <a:solidFill>
-                  <a:srgbClr val="6B6B6B"/>
-                </a:solidFill>
-                <a:latin typeface="DejaVu Sans"/>
-              </a:rPr>
-              <a:t>Source: crepe-stages.md</a:t>
-            </a:r>
-          </a:p>
-        </p:txBody>
-      </p:sp>
-      <p:sp>
-        <p:nvSpPr>
-          <p:cNvPr id="5" name="TextBox 4"/>
-          <p:cNvSpPr txBox="1"/>
-          <p:nvPr/>
-        </p:nvSpPr>
-        <p:spPr>
-          <a:xfrm>
-            <a:off x="11247120" y="6327648"/>
-            <a:ext cx="548640" cy="365760"/>
-          </a:xfrm>
-          <a:prstGeom prst="rect">
-            <a:avLst/>
-          </a:prstGeom>
-          <a:noFill/>
-        </p:spPr>
-        <p:txBody>
-          <a:bodyPr wrap="square">
-            <a:spAutoFit/>
-          </a:bodyPr>
-          <a:lstStyle/>
-          <a:p>
-            <a:pPr algn="r"/>
-            <a:r>
-              <a:rPr sz="1000" b="0">
-                <a:solidFill>
-                  <a:srgbClr val="6B6B6B"/>
-                </a:solidFill>
-                <a:latin typeface="DejaVu Sans"/>
-              </a:rPr>
-              <a:t>5</a:t>
-            </a:r>
-          </a:p>
-        </p:txBody>
-      </p:sp>
-    </p:spTree>
-  </p:cSld>
-  <p:clrMapOvr>
-    <a:masterClrMapping/>
-  </p:clrMapOvr>
-</p:sld>
-</file>
-
-<file path=ppt/slides/slide6.xml><?xml version="1.0" encoding="utf-8"?>
-<p:sld xmlns:a="http://schemas.openxmlformats.org/drawingml/2006/main" xmlns:p="http://schemas.openxmlformats.org/presentationml/2006/main" xmlns:r="http://schemas.openxmlformats.org/officeDocument/2006/relationships">
-  <p:cSld>
-    <p:spTree>
-      <p:nvGrpSpPr>
-        <p:cNvPr id="1" name=""/>
-        <p:cNvGrpSpPr/>
-        <p:nvPr/>
-      </p:nvGrpSpPr>
-      <p:grpSpPr/>
-      <p:sp>
-        <p:nvSpPr>
-          <p:cNvPr id="2" name="TextBox 1"/>
-          <p:cNvSpPr txBox="1"/>
-          <p:nvPr/>
-        </p:nvSpPr>
-        <p:spPr>
-          <a:xfrm>
-            <a:off x="548640" y="292608"/>
-            <a:ext cx="11064240" cy="822960"/>
-          </a:xfrm>
-          <a:prstGeom prst="rect">
-            <a:avLst/>
-          </a:prstGeom>
-          <a:noFill/>
-        </p:spPr>
-        <p:txBody>
-          <a:bodyPr wrap="square">
-            <a:spAutoFit/>
-          </a:bodyPr>
-          <a:lstStyle/>
-          <a:p>
-            <a:pPr algn="l"/>
-            <a:r>
-              <a:rPr sz="3000" b="1">
-                <a:solidFill>
-                  <a:srgbClr val="1A1A1A"/>
-                </a:solidFill>
-                <a:latin typeface="DejaVu Sans"/>
-              </a:rPr>
-              <a:t>Reading the check overlays</a:t>
-            </a:r>
-          </a:p>
-        </p:txBody>
-      </p:sp>
-      <p:sp>
-        <p:nvSpPr>
-          <p:cNvPr id="3" name="TextBox 2"/>
-          <p:cNvSpPr txBox="1"/>
-          <p:nvPr/>
-        </p:nvSpPr>
-        <p:spPr>
-          <a:xfrm>
-            <a:off x="640080" y="1234440"/>
-            <a:ext cx="10972800" cy="2103120"/>
-          </a:xfrm>
-          <a:prstGeom prst="rect">
-            <a:avLst/>
-          </a:prstGeom>
-          <a:noFill/>
-        </p:spPr>
-        <p:txBody>
-          <a:bodyPr wrap="square">
-            <a:spAutoFit/>
-          </a:bodyPr>
-          <a:lstStyle/>
-          <a:p>
-            <a:pPr>
-              <a:lnSpc>
-                <a:spcPct val="100000"/>
-              </a:lnSpc>
-              <a:spcAft>
-                <a:spcPts val="1000"/>
-              </a:spcAft>
-            </a:pPr>
-            <a:r>
-              <a:rPr sz="1500" b="0">
-                <a:solidFill>
-                  <a:srgbClr val="1A1A1A"/>
-                </a:solidFill>
-                <a:latin typeface="DejaVu Sans"/>
-              </a:rPr>
-              <a:t>The robot's check overlay is already a top-down view with its own marks: crepe outline, holes, ideal fold shape, bare plate</a:t>
-            </a:r>
-          </a:p>
-          <a:p>
-            <a:pPr>
-              <a:lnSpc>
-                <a:spcPct val="100000"/>
-              </a:lnSpc>
-              <a:spcAft>
-                <a:spcPts val="1000"/>
-              </a:spcAft>
-            </a:pPr>
-            <a:r>
-              <a:rPr sz="1500" b="0">
-                <a:solidFill>
-                  <a:srgbClr val="1A1A1A"/>
-                </a:solidFill>
-                <a:latin typeface="DejaVu Sans"/>
-              </a:rPr>
-              <a:t>We read those marks back as numbers per run: diameter, area, centre offset, circularity, hole fraction, residue, fold overlap, fold2 / fold1 ratio, browning</a:t>
-            </a:r>
-          </a:p>
-          <a:p>
-            <a:pPr>
-              <a:lnSpc>
-                <a:spcPct val="100000"/>
-              </a:lnSpc>
-              <a:spcAft>
-                <a:spcPts val="1000"/>
-              </a:spcAft>
-            </a:pPr>
-            <a:r>
-              <a:rPr sz="1500" b="0">
-                <a:solidFill>
-                  <a:srgbClr val="1A1A1A"/>
-                </a:solidFill>
-                <a:latin typeface="DejaVu Sans"/>
-              </a:rPr>
-              <a:t>So a failure becomes measurable instead of pass or fail</a:t>
-            </a:r>
-          </a:p>
-          <a:p>
-            <a:pPr>
-              <a:lnSpc>
-                <a:spcPct val="100000"/>
-              </a:lnSpc>
-              <a:spcAft>
-                <a:spcPts val="1000"/>
-              </a:spcAft>
-            </a:pPr>
-            <a:r>
-              <a:rPr sz="1500" b="0">
-                <a:solidFill>
-                  <a:srgbClr val="1A1A1A"/>
-                </a:solidFill>
-                <a:latin typeface="DejaVu Sans"/>
-              </a:rPr>
-              <a:t>Sizes are relative to the robot's analysis zone; no millimetre scale for the plate is published</a:t>
-            </a:r>
-          </a:p>
-        </p:txBody>
-      </p:sp>
-      <p:pic>
-        <p:nvPicPr>
-          <p:cNvPr id="4" name="Picture 3" descr="vision-scores-example.jpg"/>
-          <p:cNvPicPr>
-            <a:picLocks noChangeAspect="1"/>
-          </p:cNvPicPr>
-          <p:nvPr/>
-        </p:nvPicPr>
-        <p:blipFill>
-          <a:blip r:embed="rId2"/>
-          <a:stretch>
-            <a:fillRect/>
-          </a:stretch>
-        </p:blipFill>
-        <p:spPr>
-          <a:xfrm>
-            <a:off x="2377440" y="3611880"/>
-            <a:ext cx="5542005" cy="3154680"/>
-          </a:xfrm>
-          <a:prstGeom prst="rect">
-            <a:avLst/>
-          </a:prstGeom>
-        </p:spPr>
-      </p:pic>
-      <p:sp>
-        <p:nvSpPr>
-          <p:cNvPr id="5" name="TextBox 4"/>
-          <p:cNvSpPr txBox="1"/>
-          <p:nvPr/>
-        </p:nvSpPr>
-        <p:spPr>
-          <a:xfrm>
-            <a:off x="548640" y="6327648"/>
-            <a:ext cx="9601200" cy="365760"/>
-          </a:xfrm>
-          <a:prstGeom prst="rect">
-            <a:avLst/>
-          </a:prstGeom>
-          <a:noFill/>
-        </p:spPr>
-        <p:txBody>
-          <a:bodyPr wrap="square">
-            <a:spAutoFit/>
-          </a:bodyPr>
-          <a:lstStyle/>
-          <a:p>
-            <a:r>
-              <a:rPr sz="1000" b="0">
-                <a:solidFill>
-                  <a:srgbClr val="6B6B6B"/>
-                </a:solidFill>
-                <a:latin typeface="DejaVu Sans"/>
-              </a:rPr>
-              <a:t>Source: data/pipeline.md</a:t>
-            </a:r>
-          </a:p>
-        </p:txBody>
-      </p:sp>
-      <p:sp>
-        <p:nvSpPr>
-          <p:cNvPr id="6" name="TextBox 5"/>
-          <p:cNvSpPr txBox="1"/>
-          <p:nvPr/>
-        </p:nvSpPr>
-        <p:spPr>
-          <a:xfrm>
-            <a:off x="11247120" y="6327648"/>
-            <a:ext cx="548640" cy="365760"/>
-          </a:xfrm>
-          <a:prstGeom prst="rect">
-            <a:avLst/>
-          </a:prstGeom>
-          <a:noFill/>
-        </p:spPr>
-        <p:txBody>
-          <a:bodyPr wrap="square">
-            <a:spAutoFit/>
-          </a:bodyPr>
-          <a:lstStyle/>
-          <a:p>
-            <a:pPr algn="r"/>
-            <a:r>
-              <a:rPr sz="1000" b="0">
-                <a:solidFill>
-                  <a:srgbClr val="6B6B6B"/>
-                </a:solidFill>
-                <a:latin typeface="DejaVu Sans"/>
-              </a:rPr>
-              <a:t>6</a:t>
-            </a:r>
-          </a:p>
-        </p:txBody>
-      </p:sp>
-    </p:spTree>
-  </p:cSld>
-  <p:clrMapOvr>
-    <a:masterClrMapping/>
-  </p:clrMapOvr>
-</p:sld>
-</file>
-
-<file path=ppt/slides/slide7.xml><?xml version="1.0" encoding="utf-8"?>
-<p:sld xmlns:a="http://schemas.openxmlformats.org/drawingml/2006/main" xmlns:p="http://schemas.openxmlformats.org/presentationml/2006/main" xmlns:r="http://schemas.openxmlformats.org/officeDocument/2006/relationships">
-  <p:cSld>
-    <p:spTree>
-      <p:nvGrpSpPr>
-        <p:cNvPr id="1" name=""/>
-        <p:cNvGrpSpPr/>
-        <p:nvPr/>
-      </p:nvGrpSpPr>
-      <p:grpSpPr/>
-      <p:sp>
-        <p:nvSpPr>
-          <p:cNvPr id="2" name="TextBox 1"/>
-          <p:cNvSpPr txBox="1"/>
-          <p:nvPr/>
-        </p:nvSpPr>
-        <p:spPr>
-          <a:xfrm>
-            <a:off x="548640" y="292608"/>
-            <a:ext cx="11064240" cy="822960"/>
-          </a:xfrm>
-          <a:prstGeom prst="rect">
-            <a:avLst/>
-          </a:prstGeom>
-          <a:noFill/>
-        </p:spPr>
-        <p:txBody>
-          <a:bodyPr wrap="square">
-            <a:spAutoFit/>
-          </a:bodyPr>
-          <a:lstStyle/>
-          <a:p>
-            <a:pPr algn="l"/>
-            <a:r>
-              <a:rPr sz="3000" b="1">
-                <a:solidFill>
-                  <a:srgbClr val="1A1A1A"/>
-                </a:solidFill>
-                <a:latin typeface="DejaVu Sans"/>
-              </a:rPr>
-              <a:t>Models: what the numbers actually say</a:t>
-            </a:r>
-          </a:p>
-        </p:txBody>
-      </p:sp>
-      <p:graphicFrame>
-        <p:nvGraphicFramePr>
-          <p:cNvPr id="3" name="Table 2"/>
-          <p:cNvGraphicFramePr>
-            <a:graphicFrameLocks noGrp="1"/>
-          </p:cNvGraphicFramePr>
-          <p:nvPr/>
-        </p:nvGraphicFramePr>
-        <p:xfrm>
-          <a:off x="411480" y="1234440"/>
-          <a:ext cx="11384280" cy="4297680"/>
-        </p:xfrm>
-        <a:graphic>
-          <a:graphicData uri="http://schemas.openxmlformats.org/drawingml/2006/table">
-            <a:tbl>
-              <a:tblPr firstRow="1" bandRow="1">
-                <a:tableStyleId>{5C22544A-7EE6-4342-B048-85BDC9FD1C3A}</a:tableStyleId>
-              </a:tblPr>
-              <a:tblGrid>
-                <a:gridCol w="2743200"/>
-                <a:gridCol w="2926080"/>
-                <a:gridCol w="5715000"/>
-              </a:tblGrid>
-              <a:tr h="716280">
-                <a:tc>
-                  <a:txBody>
-                    <a:bodyPr wrap="square"/>
-                    <a:lstStyle/>
-                    <a:p>
-                      <a:r>
-                        <a:rPr sz="1100" b="1">
-                          <a:solidFill>
-                            <a:srgbClr val="FFFFFF"/>
-                          </a:solidFill>
-                          <a:latin typeface="DejaVu Sans"/>
-                        </a:rPr>
-                        <a:t>Model</a:t>
-                      </a:r>
-                    </a:p>
-                  </a:txBody>
-                  <a:tcPr marL="54864" marR="54864" marT="27432" marB="27432" anchor="t">
-                    <a:solidFill>
-                      <a:srgbClr val="1F4E79"/>
-                    </a:solidFill>
-                  </a:tcPr>
-                </a:tc>
-                <a:tc>
-                  <a:txBody>
-                    <a:bodyPr wrap="square"/>
-                    <a:lstStyle/>
-                    <a:p>
-                      <a:r>
-                        <a:rPr sz="1100" b="1">
-                          <a:solidFill>
-                            <a:srgbClr val="FFFFFF"/>
-                          </a:solidFill>
-                          <a:latin typeface="DejaVu Sans"/>
-                        </a:rPr>
-                        <a:t>Task it answers</a:t>
-                      </a:r>
-                    </a:p>
-                  </a:txBody>
-                  <a:tcPr marL="54864" marR="54864" marT="27432" marB="27432" anchor="t">
-                    <a:solidFill>
-                      <a:srgbClr val="1F4E79"/>
-                    </a:solidFill>
-                  </a:tcPr>
-                </a:tc>
-                <a:tc>
-                  <a:txBody>
-                    <a:bodyPr wrap="square"/>
-                    <a:lstStyle/>
-                    <a:p>
-                      <a:r>
-                        <a:rPr sz="1100" b="1">
-                          <a:solidFill>
-                            <a:srgbClr val="FFFFFF"/>
-                          </a:solidFill>
-                          <a:latin typeface="DejaVu Sans"/>
-                        </a:rPr>
-                        <a:t>Honest holdout read</a:t>
-                      </a:r>
-                    </a:p>
-                  </a:txBody>
-                  <a:tcPr marL="54864" marR="54864" marT="27432" marB="27432" anchor="t">
-                    <a:solidFill>
-                      <a:srgbClr val="1F4E79"/>
-                    </a:solidFill>
-                  </a:tcPr>
-                </a:tc>
-              </a:tr>
-              <a:tr h="716280">
-                <a:tc>
-                  <a:txBody>
-                    <a:bodyPr wrap="square"/>
-                    <a:lstStyle/>
-                    <a:p>
-                      <a:r>
-                        <a:rPr sz="1100" b="0">
-                          <a:solidFill>
-                            <a:srgbClr val="1A1A1A"/>
-                          </a:solidFill>
-                          <a:latin typeface="DejaVu Sans"/>
-                        </a:rPr>
-                        <a:t>check-verdict, 4 heads</a:t>
-                      </a:r>
-                    </a:p>
-                  </a:txBody>
-                  <a:tcPr marL="54864" marR="54864" marT="27432" marB="27432" anchor="t">
-                    <a:solidFill>
-                      <a:srgbClr val="FFFFFF"/>
-                    </a:solidFill>
-                  </a:tcPr>
-                </a:tc>
-                <a:tc>
-                  <a:txBody>
-                    <a:bodyPr wrap="square"/>
-                    <a:lstStyle/>
-                    <a:p>
-                      <a:r>
-                        <a:rPr sz="1100" b="0">
-                          <a:solidFill>
-                            <a:srgbClr val="1A1A1A"/>
-                          </a:solidFill>
-                          <a:latin typeface="DejaVu Sans"/>
-                        </a:rPr>
-                        <a:t>did the check pass</a:t>
-                      </a:r>
-                    </a:p>
-                  </a:txBody>
-                  <a:tcPr marL="54864" marR="54864" marT="27432" marB="27432" anchor="t">
-                    <a:solidFill>
-                      <a:srgbClr val="FFFFFF"/>
-                    </a:solidFill>
-                  </a:tcPr>
-                </a:tc>
-                <a:tc>
-                  <a:txBody>
-                    <a:bodyPr wrap="square"/>
-                    <a:lstStyle/>
-                    <a:p>
-                      <a:r>
-                        <a:rPr sz="1100" b="0">
-                          <a:solidFill>
-                            <a:srgbClr val="1A1A1A"/>
-                          </a:solidFill>
-                          <a:latin typeface="DejaVu Sans"/>
-                        </a:rPr>
-                        <a:t>31 to 61 frames per check, balanced accuracy 0.67 to 0.92. Three of four cards say generalizes: false; a logistic regression on the robot's own overlay beats the fold2 head, 0.88 to 0.67</a:t>
-                      </a:r>
-                    </a:p>
-                  </a:txBody>
-                  <a:tcPr marL="54864" marR="54864" marT="27432" marB="27432" anchor="t">
-                    <a:solidFill>
-                      <a:srgbClr val="FFFFFF"/>
-                    </a:solidFill>
-                  </a:tcPr>
-                </a:tc>
-              </a:tr>
-              <a:tr h="716280">
-                <a:tc>
-                  <a:txBody>
-                    <a:bodyPr wrap="square"/>
-                    <a:lstStyle/>
-                    <a:p>
-                      <a:r>
-                        <a:rPr sz="1100" b="0">
-                          <a:solidFill>
-                            <a:srgbClr val="1A1A1A"/>
-                          </a:solidFill>
-                          <a:latin typeface="DejaVu Sans"/>
-                        </a:rPr>
-                        <a:t>fold-class</a:t>
-                      </a:r>
-                    </a:p>
-                  </a:txBody>
-                  <a:tcPr marL="54864" marR="54864" marT="27432" marB="27432" anchor="t">
-                    <a:solidFill>
-                      <a:srgbClr val="EEF3F9"/>
-                    </a:solidFill>
-                  </a:tcPr>
-                </a:tc>
-                <a:tc>
-                  <a:txBody>
-                    <a:bodyPr wrap="square"/>
-                    <a:lstStyle/>
-                    <a:p>
-                      <a:r>
-                        <a:rPr sz="1100" b="0">
-                          <a:solidFill>
-                            <a:srgbClr val="1A1A1A"/>
-                          </a:solidFill>
-                          <a:latin typeface="DejaVu Sans"/>
-                        </a:rPr>
-                        <a:t>empty / flat / half / quarter</a:t>
-                      </a:r>
-                    </a:p>
-                  </a:txBody>
-                  <a:tcPr marL="54864" marR="54864" marT="27432" marB="27432" anchor="t">
-                    <a:solidFill>
-                      <a:srgbClr val="EEF3F9"/>
-                    </a:solidFill>
-                  </a:tcPr>
-                </a:tc>
-                <a:tc>
-                  <a:txBody>
-                    <a:bodyPr wrap="square"/>
-                    <a:lstStyle/>
-                    <a:p>
-                      <a:r>
-                        <a:rPr sz="1100" b="0">
-                          <a:solidFill>
-                            <a:srgbClr val="1A1A1A"/>
-                          </a:solidFill>
-                          <a:latin typeface="DejaVu Sans"/>
-                        </a:rPr>
-                        <a:t>110 frames, balanced accuracy 0.99, but on weak labels. The card's own leakage probe fails, and holding out maus-quin drops quarter recall to 0.02 of 82 frames</a:t>
-                      </a:r>
-                    </a:p>
-                  </a:txBody>
-                  <a:tcPr marL="54864" marR="54864" marT="27432" marB="27432" anchor="t">
-                    <a:solidFill>
-                      <a:srgbClr val="EEF3F9"/>
-                    </a:solidFill>
-                  </a:tcPr>
-                </a:tc>
-              </a:tr>
-              <a:tr h="716280">
-                <a:tc>
-                  <a:txBody>
-                    <a:bodyPr wrap="square"/>
-                    <a:lstStyle/>
-                    <a:p>
-                      <a:r>
-                        <a:rPr sz="1100" b="0">
-                          <a:solidFill>
-                            <a:srgbClr val="1A1A1A"/>
-                          </a:solidFill>
-                          <a:latin typeface="DejaVu Sans"/>
-                        </a:rPr>
-                        <a:t>failure-reason</a:t>
-                      </a:r>
-                    </a:p>
-                  </a:txBody>
-                  <a:tcPr marL="54864" marR="54864" marT="27432" marB="27432" anchor="t">
-                    <a:solidFill>
-                      <a:srgbClr val="FFFFFF"/>
-                    </a:solidFill>
-                  </a:tcPr>
-                </a:tc>
-                <a:tc>
-                  <a:txBody>
-                    <a:bodyPr wrap="square"/>
-                    <a:lstStyle/>
-                    <a:p>
-                      <a:r>
-                        <a:rPr sz="1100" b="0">
-                          <a:solidFill>
-                            <a:srgbClr val="1A1A1A"/>
-                          </a:solidFill>
-                          <a:latin typeface="DejaVu Sans"/>
-                        </a:rPr>
-                        <a:t>why the fold failed</a:t>
-                      </a:r>
-                    </a:p>
-                  </a:txBody>
-                  <a:tcPr marL="54864" marR="54864" marT="27432" marB="27432" anchor="t">
-                    <a:solidFill>
-                      <a:srgbClr val="FFFFFF"/>
-                    </a:solidFill>
-                  </a:tcPr>
-                </a:tc>
-                <a:tc>
-                  <a:txBody>
-                    <a:bodyPr wrap="square"/>
-                    <a:lstStyle/>
-                    <a:p>
-                      <a:r>
-                        <a:rPr sz="1100" b="0">
-                          <a:solidFill>
-                            <a:srgbClr val="1A1A1A"/>
-                          </a:solidFill>
-                          <a:latin typeface="DejaVu Sans"/>
-                        </a:rPr>
-                        <a:t>one deployable head: spread too_small, 13 holdout frames. The fold2 heads are research only, where the trivial rule scores set-F1 1.00 against the 0.73 the card quotes</a:t>
-                      </a:r>
-                    </a:p>
-                  </a:txBody>
-                  <a:tcPr marL="54864" marR="54864" marT="27432" marB="27432" anchor="t">
-                    <a:solidFill>
-                      <a:srgbClr val="FFFFFF"/>
-                    </a:solidFill>
-                  </a:tcPr>
-                </a:tc>
-              </a:tr>
-              <a:tr h="716280">
-                <a:tc>
-                  <a:txBody>
-                    <a:bodyPr wrap="square"/>
-                    <a:lstStyle/>
-                    <a:p>
-                      <a:r>
-                        <a:rPr sz="1100" b="0">
-                          <a:solidFill>
-                            <a:srgbClr val="1A1A1A"/>
-                          </a:solidFill>
-                          <a:latin typeface="DejaVu Sans"/>
-                        </a:rPr>
-                        <a:t>frame-embedder</a:t>
-                      </a:r>
-                    </a:p>
-                  </a:txBody>
-                  <a:tcPr marL="54864" marR="54864" marT="27432" marB="27432" anchor="t">
-                    <a:solidFill>
-                      <a:srgbClr val="EEF3F9"/>
-                    </a:solidFill>
-                  </a:tcPr>
-                </a:tc>
-                <a:tc>
-                  <a:txBody>
-                    <a:bodyPr wrap="square"/>
-                    <a:lstStyle/>
-                    <a:p>
-                      <a:r>
-                        <a:rPr sz="1100" b="0">
-                          <a:solidFill>
-                            <a:srgbClr val="1A1A1A"/>
-                          </a:solidFill>
-                          <a:latin typeface="DejaVu Sans"/>
-                        </a:rPr>
-                        <a:t>an embedding per frame</a:t>
-                      </a:r>
-                    </a:p>
-                  </a:txBody>
-                  <a:tcPr marL="54864" marR="54864" marT="27432" marB="27432" anchor="t">
-                    <a:solidFill>
-                      <a:srgbClr val="EEF3F9"/>
-                    </a:solidFill>
-                  </a:tcPr>
-                </a:tc>
-                <a:tc>
-                  <a:txBody>
-                    <a:bodyPr wrap="square"/>
-                    <a:lstStyle/>
-                    <a:p>
-                      <a:r>
-                        <a:rPr sz="1100" b="0">
-                          <a:solidFill>
-                            <a:srgbClr val="1A1A1A"/>
-                          </a:solidFill>
-                          <a:latin typeface="DejaVu Sans"/>
-                        </a:rPr>
-                        <a:t>about 4 ms per frame on a desktop CPU; the Raspberry Pi figure is an unmeasured estimate, not a board reading</a:t>
-                      </a:r>
-                    </a:p>
-                  </a:txBody>
-                  <a:tcPr marL="54864" marR="54864" marT="27432" marB="27432" anchor="t">
-                    <a:solidFill>
-                      <a:srgbClr val="EEF3F9"/>
-                    </a:solidFill>
-                  </a:tcPr>
-                </a:tc>
-              </a:tr>
-              <a:tr h="716280">
-                <a:tc>
-                  <a:txBody>
-                    <a:bodyPr wrap="square"/>
-                    <a:lstStyle/>
-                    <a:p>
-                      <a:r>
-                        <a:rPr sz="1100" b="0">
-                          <a:solidFill>
-                            <a:srgbClr val="1A1A1A"/>
-                          </a:solidFill>
-                          <a:latin typeface="DejaVu Sans"/>
-                        </a:rPr>
-                        <a:t>fold-risk</a:t>
-                      </a:r>
-                    </a:p>
-                  </a:txBody>
-                  <a:tcPr marL="54864" marR="54864" marT="27432" marB="27432" anchor="t">
-                    <a:solidFill>
-                      <a:srgbClr val="FFFFFF"/>
-                    </a:solidFill>
-                  </a:tcPr>
-                </a:tc>
-                <a:tc>
-                  <a:txBody>
-                    <a:bodyPr wrap="square"/>
-                    <a:lstStyle/>
-                    <a:p>
-                      <a:r>
-                        <a:rPr sz="1100" b="0">
-                          <a:solidFill>
-                            <a:srgbClr val="1A1A1A"/>
-                          </a:solidFill>
-                          <a:latin typeface="DejaVu Sans"/>
-                        </a:rPr>
-                        <a:t>spread predicts fold failure</a:t>
-                      </a:r>
-                    </a:p>
-                  </a:txBody>
-                  <a:tcPr marL="54864" marR="54864" marT="27432" marB="27432" anchor="t">
-                    <a:solidFill>
-                      <a:srgbClr val="FFFFFF"/>
-                    </a:solidFill>
-                  </a:tcPr>
-                </a:tc>
-                <a:tc>
-                  <a:txBody>
-                    <a:bodyPr wrap="square"/>
-                    <a:lstStyle/>
-                    <a:p>
-                      <a:r>
-                        <a:rPr sz="1100" b="0">
-                          <a:solidFill>
-                            <a:srgbClr val="1A1A1A"/>
-                          </a:solidFill>
-                          <a:latin typeface="DejaVu Sans"/>
-                        </a:rPr>
-                        <a:t>balanced accuracy 0.29, worse than chance; the permutation test reports beats_null: false. Research only</a:t>
-                      </a:r>
-                    </a:p>
-                  </a:txBody>
-                  <a:tcPr marL="54864" marR="54864" marT="27432" marB="27432" anchor="t">
-                    <a:solidFill>
-                      <a:srgbClr val="FFFFFF"/>
-                    </a:solidFill>
-                  </a:tcPr>
-                </a:tc>
-              </a:tr>
-            </a:tbl>
-          </a:graphicData>
-        </a:graphic>
-      </p:graphicFrame>
-      <p:sp>
-        <p:nvSpPr>
-          <p:cNvPr id="4" name="TextBox 3"/>
-          <p:cNvSpPr txBox="1"/>
-          <p:nvPr/>
-        </p:nvSpPr>
-        <p:spPr>
-          <a:xfrm>
-            <a:off x="548640" y="6327648"/>
-            <a:ext cx="9601200" cy="365760"/>
-          </a:xfrm>
-          <a:prstGeom prst="rect">
-            <a:avLst/>
-          </a:prstGeom>
-          <a:noFill/>
-        </p:spPr>
-        <p:txBody>
-          <a:bodyPr wrap="square">
-            <a:spAutoFit/>
-          </a:bodyPr>
-          <a:lstStyle/>
-          <a:p>
-            <a:r>
-              <a:rPr sz="1000" b="0">
-                <a:solidFill>
-                  <a:srgbClr val="6B6B6B"/>
-                </a:solidFill>
-                <a:latin typeface="DejaVu Sans"/>
-              </a:rPr>
-              <a:t>Labels are robot verdicts, not ground truth</a:t>
-            </a:r>
-          </a:p>
-        </p:txBody>
-      </p:sp>
-      <p:sp>
-        <p:nvSpPr>
-          <p:cNvPr id="5" name="TextBox 4"/>
-          <p:cNvSpPr txBox="1"/>
-          <p:nvPr/>
-        </p:nvSpPr>
-        <p:spPr>
-          <a:xfrm>
-            <a:off x="11247120" y="6327648"/>
-            <a:ext cx="548640" cy="365760"/>
-          </a:xfrm>
-          <a:prstGeom prst="rect">
-            <a:avLst/>
-          </a:prstGeom>
-          <a:noFill/>
-        </p:spPr>
-        <p:txBody>
-          <a:bodyPr wrap="square">
-            <a:spAutoFit/>
-          </a:bodyPr>
-          <a:lstStyle/>
-          <a:p>
-            <a:pPr algn="r"/>
-            <a:r>
-              <a:rPr sz="1000" b="0">
-                <a:solidFill>
-                  <a:srgbClr val="6B6B6B"/>
-                </a:solidFill>
-                <a:latin typeface="DejaVu Sans"/>
-              </a:rPr>
-              <a:t>7</a:t>
-            </a:r>
-          </a:p>
-        </p:txBody>
-      </p:sp>
-    </p:spTree>
-  </p:cSld>
-  <p:clrMapOvr>
-    <a:masterClrMapping/>
-  </p:clrMapOvr>
-</p:sld>
-</file>
-
-<file path=ppt/slides/slide8.xml><?xml version="1.0" encoding="utf-8"?>
-<p:sld xmlns:a="http://schemas.openxmlformats.org/drawingml/2006/main" xmlns:p="http://schemas.openxmlformats.org/presentationml/2006/main" xmlns:r="http://schemas.openxmlformats.org/officeDocument/2006/relationships">
-  <p:cSld>
-    <p:spTree>
-      <p:nvGrpSpPr>
-        <p:cNvPr id="1" name=""/>
-        <p:cNvGrpSpPr/>
-        <p:nvPr/>
-      </p:nvGrpSpPr>
-      <p:grpSpPr/>
-      <p:sp>
-        <p:nvSpPr>
-          <p:cNvPr id="2" name="TextBox 1"/>
-          <p:cNvSpPr txBox="1"/>
-          <p:nvPr/>
-        </p:nvSpPr>
-        <p:spPr>
-          <a:xfrm>
-            <a:off x="548640" y="292608"/>
-            <a:ext cx="11064240" cy="822960"/>
-          </a:xfrm>
-          <a:prstGeom prst="rect">
-            <a:avLst/>
-          </a:prstGeom>
-          <a:noFill/>
-        </p:spPr>
-        <p:txBody>
-          <a:bodyPr wrap="square">
-            <a:spAutoFit/>
-          </a:bodyPr>
-          <a:lstStyle/>
-          <a:p>
-            <a:pPr algn="l"/>
-            <a:r>
-              <a:rPr sz="3000" b="1">
-                <a:solidFill>
-                  <a:srgbClr val="1A1A1A"/>
-                </a:solidFill>
-                <a:latin typeface="DejaVu Sans"/>
-              </a:rPr>
-              <a:t>Cross-robot reality check</a:t>
-            </a:r>
-          </a:p>
-        </p:txBody>
-      </p:sp>
-      <p:pic>
-        <p:nvPicPr>
-          <p:cNvPr id="3" name="Picture 2" descr="check-verdict-robots.png"/>
-          <p:cNvPicPr>
-            <a:picLocks noChangeAspect="1"/>
-          </p:cNvPicPr>
-          <p:nvPr/>
-        </p:nvPicPr>
-        <p:blipFill>
-          <a:blip r:embed="rId2"/>
-          <a:stretch>
-            <a:fillRect/>
-          </a:stretch>
-        </p:blipFill>
-        <p:spPr>
-          <a:xfrm>
-            <a:off x="457200" y="1417320"/>
-            <a:ext cx="7589520" cy="1897380"/>
-          </a:xfrm>
-          <a:prstGeom prst="rect">
-            <a:avLst/>
-          </a:prstGeom>
-        </p:spPr>
-      </p:pic>
-      <p:pic>
-        <p:nvPicPr>
-          <p:cNvPr id="4" name="Picture 3" descr="pixel-mask-example.png"/>
-          <p:cNvPicPr>
-            <a:picLocks noChangeAspect="1"/>
-          </p:cNvPicPr>
-          <p:nvPr/>
-        </p:nvPicPr>
-        <p:blipFill>
-          <a:blip r:embed="rId3"/>
-          <a:stretch>
-            <a:fillRect/>
-          </a:stretch>
-        </p:blipFill>
-        <p:spPr>
-          <a:xfrm>
-            <a:off x="8321040" y="1417320"/>
-            <a:ext cx="3291840" cy="1963881"/>
-          </a:xfrm>
-          <a:prstGeom prst="rect">
-            <a:avLst/>
-          </a:prstGeom>
-        </p:spPr>
-      </p:pic>
-      <p:sp>
-        <p:nvSpPr>
-          <p:cNvPr id="5" name="TextBox 4"/>
-          <p:cNvSpPr txBox="1"/>
-          <p:nvPr/>
-        </p:nvSpPr>
-        <p:spPr>
-          <a:xfrm>
-            <a:off x="548640" y="6327648"/>
-            <a:ext cx="9601200" cy="365760"/>
-          </a:xfrm>
-          <a:prstGeom prst="rect">
-            <a:avLst/>
-          </a:prstGeom>
-          <a:noFill/>
-        </p:spPr>
-        <p:txBody>
-          <a:bodyPr wrap="square">
-            <a:spAutoFit/>
-          </a:bodyPr>
-          <a:lstStyle/>
-          <a:p>
-            <a:r>
-              <a:rPr sz="1000" b="0">
-                <a:solidFill>
-                  <a:srgbClr val="6B6B6B"/>
-                </a:solidFill>
-                <a:latin typeface="DejaVu Sans"/>
-              </a:rPr>
-              <a:t>Holdout vs a robot held out entirely</a:t>
-            </a:r>
-          </a:p>
-        </p:txBody>
-      </p:sp>
-      <p:sp>
-        <p:nvSpPr>
-          <p:cNvPr id="6" name="TextBox 5"/>
-          <p:cNvSpPr txBox="1"/>
-          <p:nvPr/>
-        </p:nvSpPr>
-        <p:spPr>
-          <a:xfrm>
-            <a:off x="11247120" y="6327648"/>
-            <a:ext cx="548640" cy="365760"/>
-          </a:xfrm>
-          <a:prstGeom prst="rect">
-            <a:avLst/>
-          </a:prstGeom>
-          <a:noFill/>
-        </p:spPr>
-        <p:txBody>
-          <a:bodyPr wrap="square">
-            <a:spAutoFit/>
-          </a:bodyPr>
-          <a:lstStyle/>
-          <a:p>
-            <a:pPr algn="r"/>
-            <a:r>
-              <a:rPr sz="1000" b="0">
-                <a:solidFill>
-                  <a:srgbClr val="6B6B6B"/>
-                </a:solidFill>
-                <a:latin typeface="DejaVu Sans"/>
-              </a:rPr>
-              <a:t>8</a:t>
-            </a:r>
-          </a:p>
-        </p:txBody>
-      </p:sp>
-    </p:spTree>
-  </p:cSld>
-  <p:clrMapOvr>
-    <a:masterClrMapping/>
-  </p:clrMapOvr>
-</p:sld>
-</file>
-
-<file path=ppt/slides/slide9.xml><?xml version="1.0" encoding="utf-8"?>
-<p:sld xmlns:a="http://schemas.openxmlformats.org/drawingml/2006/main" xmlns:p="http://schemas.openxmlformats.org/presentationml/2006/main" xmlns:r="http://schemas.openxmlformats.org/officeDocument/2006/relationships">
-  <p:cSld>
-    <p:spTree>
-      <p:nvGrpSpPr>
-        <p:cNvPr id="1" name=""/>
-        <p:cNvGrpSpPr/>
-        <p:nvPr/>
-      </p:nvGrpSpPr>
-      <p:grpSpPr/>
-      <p:sp>
-        <p:nvSpPr>
-          <p:cNvPr id="2" name="TextBox 1"/>
-          <p:cNvSpPr txBox="1"/>
-          <p:nvPr/>
-        </p:nvSpPr>
-        <p:spPr>
-          <a:xfrm>
-            <a:off x="548640" y="292608"/>
-            <a:ext cx="11064240" cy="822960"/>
-          </a:xfrm>
-          <a:prstGeom prst="rect">
-            <a:avLst/>
-          </a:prstGeom>
-          <a:noFill/>
-        </p:spPr>
-        <p:txBody>
-          <a:bodyPr wrap="square">
-            <a:spAutoFit/>
-          </a:bodyPr>
-          <a:lstStyle/>
-          <a:p>
-            <a:pPr algn="l"/>
-            <a:r>
-              <a:rPr sz="3000" b="1">
-                <a:solidFill>
-                  <a:srgbClr val="1A1A1A"/>
-                </a:solidFill>
-                <a:latin typeface="DejaVu Sans"/>
-              </a:rPr>
-              <a:t>Human labels, kept private</a:t>
-            </a:r>
-          </a:p>
-        </p:txBody>
-      </p:sp>
-      <p:sp>
-        <p:nvSpPr>
-          <p:cNvPr id="3" name="TextBox 2"/>
-          <p:cNvSpPr txBox="1"/>
-          <p:nvPr/>
-        </p:nvSpPr>
-        <p:spPr>
-          <a:xfrm>
-            <a:off x="640080" y="1234440"/>
-            <a:ext cx="10972800" cy="4754880"/>
-          </a:xfrm>
-          <a:prstGeom prst="rect">
-            <a:avLst/>
-          </a:prstGeom>
-          <a:noFill/>
-        </p:spPr>
-        <p:txBody>
-          <a:bodyPr wrap="square">
-            <a:spAutoFit/>
-          </a:bodyPr>
-          <a:lstStyle/>
-          <a:p>
-            <a:pPr>
-              <a:lnSpc>
-                <a:spcPct val="100000"/>
-              </a:lnSpc>
-              <a:spcAft>
-                <a:spcPts val="1000"/>
-              </a:spcAft>
-            </a:pPr>
-            <a:r>
-              <a:rPr sz="1500" b="0">
-                <a:solidFill>
-                  <a:srgbClr val="1A1A1A"/>
-                </a:solidFill>
-                <a:latin typeface="DejaVu Sans"/>
-              </a:rPr>
-              <a:t>Local Label Studio 1.23.2, one app per annotator; no run data, image or label leaves the machine or enters the public repository</a:t>
-            </a:r>
-          </a:p>
-          <a:p>
-            <a:pPr>
-              <a:lnSpc>
-                <a:spcPct val="100000"/>
-              </a:lnSpc>
-              <a:spcAft>
-                <a:spcPts val="1000"/>
-              </a:spcAft>
-            </a:pPr>
-            <a:r>
-              <a:rPr sz="1500" b="0">
-                <a:solidFill>
-                  <a:srgbClr val="1A1A1A"/>
-                </a:solidFill>
-                <a:latin typeface="DejaVu Sans"/>
-              </a:rPr>
-              <a:t>Whole runs are split into set 1 (owner) and set 2 (collaborator), so no frame is labelled twice</a:t>
-            </a:r>
-          </a:p>
-          <a:p>
-            <a:pPr>
-              <a:lnSpc>
-                <a:spcPct val="100000"/>
-              </a:lnSpc>
-              <a:spcAft>
-                <a:spcPts val="1000"/>
-              </a:spcAft>
-            </a:pPr>
-            <a:r>
-              <a:rPr sz="1500" b="0">
-                <a:solidFill>
-                  <a:srgbClr val="1A1A1A"/>
-                </a:solidFill>
-                <a:latin typeface="DejaVu Sans"/>
-              </a:rPr>
-              <a:t>Two projects per set: visual phase labels (six states) and material/hole masks</a:t>
-            </a:r>
-          </a:p>
-          <a:p>
-            <a:pPr>
-              <a:lnSpc>
-                <a:spcPct val="100000"/>
-              </a:lnSpc>
-              <a:spcAft>
-                <a:spcPts val="1000"/>
-              </a:spcAft>
-            </a:pPr>
-            <a:r>
-              <a:rPr sz="1500" b="0">
-                <a:solidFill>
-                  <a:srgbClr val="1A1A1A"/>
-                </a:solidFill>
-                <a:latin typeface="DejaVu Sans"/>
-              </a:rPr>
-              <a:t>Set 2 today: 186 phase labels submitted, 113 mask submissions; set 1 is prepared but was never opened</a:t>
-            </a:r>
-          </a:p>
-          <a:p>
-            <a:pPr>
-              <a:lnSpc>
-                <a:spcPct val="100000"/>
-              </a:lnSpc>
-              <a:spcAft>
-                <a:spcPts val="1000"/>
-              </a:spcAft>
-            </a:pPr>
-            <a:r>
-              <a:rPr sz="1500" b="0">
-                <a:solidFill>
-                  <a:srgbClr val="1A1A1A"/>
-                </a:solidFill>
-                <a:latin typeface="DejaVu Sans"/>
-              </a:rPr>
-              <a:t>Pixel-mask prefill adds 301 editable suggestions on set 2, applied only to untouched tasks</a:t>
-            </a:r>
-          </a:p>
-        </p:txBody>
-      </p:sp>
-      <p:sp>
-        <p:nvSpPr>
-          <p:cNvPr id="4" name="TextBox 3"/>
-          <p:cNvSpPr txBox="1"/>
-          <p:nvPr/>
-        </p:nvSpPr>
-        <p:spPr>
-          <a:xfrm>
-            <a:off x="548640" y="6327648"/>
-            <a:ext cx="9601200" cy="365760"/>
-          </a:xfrm>
-          <a:prstGeom prst="rect">
-            <a:avLst/>
-          </a:prstGeom>
-          <a:noFill/>
-        </p:spPr>
-        <p:txBody>
-          <a:bodyPr wrap="square">
-            <a:spAutoFit/>
-          </a:bodyPr>
-          <a:lstStyle/>
-          <a:p>
-            <a:r>
-              <a:rPr sz="1000" b="0">
-                <a:solidFill>
-                  <a:srgbClr val="6B6B6B"/>
-                </a:solidFill>
-                <a:latin typeface="DejaVu Sans"/>
-              </a:rPr>
-              <a:t>Source: status.md (branch), labeling docs</a:t>
-            </a:r>
-          </a:p>
-        </p:txBody>
-      </p:sp>
-      <p:sp>
-        <p:nvSpPr>
-          <p:cNvPr id="5" name="TextBox 4"/>
-          <p:cNvSpPr txBox="1"/>
-          <p:nvPr/>
-        </p:nvSpPr>
-        <p:spPr>
-          <a:xfrm>
-            <a:off x="11247120" y="6327648"/>
-            <a:ext cx="548640" cy="365760"/>
-          </a:xfrm>
-          <a:prstGeom prst="rect">
-            <a:avLst/>
-          </a:prstGeom>
-          <a:noFill/>
-        </p:spPr>
-        <p:txBody>
-          <a:bodyPr wrap="square">
-            <a:spAutoFit/>
-          </a:bodyPr>
-          <a:lstStyle/>
-          <a:p>
-            <a:pPr algn="r"/>
-            <a:r>
-              <a:rPr sz="1000" b="0">
-                <a:solidFill>
-                  <a:srgbClr val="6B6B6B"/>
-                </a:solidFill>
-                <a:latin typeface="DejaVu Sans"/>
-              </a:rPr>
-              <a:t>9</a:t>
             </a:r>
           </a:p>
         </p:txBody>

--- a/assets/pitch/pitch-deck.pptx
+++ b/assets/pitch/pitch-deck.pptx
@@ -504,7 +504,7 @@
           <a:lstStyle/>
           <a:p>
             <a:r>
-              <a:t>Open in one line: Maus robots make crepes on their own, every run is logged, and we turned those logs into measurements, models and next experiments. Everything in this deck comes from the repository's own documentation, its model cards, or a private data export. The repository is public; the Maus run data is not.</a:t>
+              <a:t>Introduce the project as a practical data-to-insight toolkit: run records, camera checks and recipe settings become a structured view for analysis. Source: repository documentation and private Maus export. The project code is public; the run data remains private.</a:t>
             </a:r>
           </a:p>
         </p:txBody>
@@ -574,7 +574,7 @@
           <a:lstStyle/>
           <a:p>
             <a:r>
-              <a:t>Four headline numbers, then the honest read said plainly. 828 runs logged, 138 vision-scored. Four check-verdict heads plus a fold-class model. The caveats are the point: three of four check heads do not generalize, fold-class is 0.99 on weak labels and collapses on a held-out robot, and 690 of 828 runs have no camera measurement because checks only exist from 13 October.</a:t>
+              <a:t>The export contains 828 run records; the flat table has 177 columns; 138 runs have extracted vision measurements; and the workflow exposes four camera-check stages: spread, fold1, fold2 and push-off. Sources: private data/runs.parquet and data/vision.parquet, with the public schemas and commands in documentation/data/pipeline.md and documentation/status.md. The remaining callouts describe implemented data, measurement and review tools.</a:t>
             </a:r>
           </a:p>
         </p:txBody>
@@ -644,7 +644,7 @@
           <a:lstStyle/>
           <a:p>
             <a:r>
-              <a:t>The repository is public at github.com/leonardoAB1/maus-crepe-insights, and there is a live site - the placeholder link in the deck still needs the real URL dropped in. The ask is one line: more check records and interleaved runs per robot, which is what turns every 'we cannot tell yet' into an answer. We never send anything to a robot; the next batch is a run sheet a person runs by hand.</a:t>
+              <a:t>Invite the audience to explore the public project and its pipeline, data schemas, vision measurements, model artifacts and review tools. Teams can use their own authorized run records to compare batches and shape follow-up experiments. The source code is public; private Maus run data is not included.</a:t>
             </a:r>
           </a:p>
         </p:txBody>
@@ -3723,7 +3723,7 @@
                 </a:solidFill>
                 <a:latin typeface="DejaVu Sans"/>
               </a:rPr>
-              <a:t>We turned 828 robot crepe runs into measurements, models and next experiments.</a:t>
+              <a:t>Turn robot run records and camera checks into measurable crêpe-quality signals.</a:t>
             </a:r>
           </a:p>
         </p:txBody>
@@ -3758,7 +3758,7 @@
                 </a:solidFill>
                 <a:latin typeface="DejaVu Sans"/>
               </a:rPr>
-              <a:t>BaselHack 2026 - Maus Robotics challenge</a:t>
+              <a:t>A data-to-insight toolkit for the Maus Robotics challenge</a:t>
             </a:r>
           </a:p>
         </p:txBody>
@@ -3819,7 +3819,7 @@
                 </a:solidFill>
                 <a:latin typeface="DejaVu Sans"/>
               </a:rPr>
-              <a:t>What we built</a:t>
+              <a:t>One run. A richer view.</a:t>
             </a:r>
           </a:p>
         </p:txBody>
@@ -3892,7 +3892,7 @@
                 </a:solidFill>
                 <a:latin typeface="DejaVu Sans"/>
               </a:rPr>
-              <a:t>runs logged</a:t>
+              <a:t>run records</a:t>
             </a:r>
           </a:p>
           <a:p>
@@ -3908,7 +3908,7 @@
                 </a:solidFill>
                 <a:latin typeface="DejaVu Sans"/>
               </a:rPr>
-              <a:t>2 Sep to 30 Oct 2026</a:t>
+              <a:t>JSON export + ROS 2 MCAP</a:t>
             </a:r>
           </a:p>
         </p:txBody>
@@ -3965,7 +3965,7 @@
                 </a:solidFill>
                 <a:latin typeface="DejaVu Sans"/>
               </a:rPr>
-              <a:t>138</a:t>
+              <a:t>177</a:t>
             </a:r>
           </a:p>
           <a:p>
@@ -3981,7 +3981,7 @@
                 </a:solidFill>
                 <a:latin typeface="DejaVu Sans"/>
               </a:rPr>
-              <a:t>vision-scored runs</a:t>
+              <a:t>fields per run</a:t>
             </a:r>
           </a:p>
           <a:p>
@@ -3997,7 +3997,7 @@
                 </a:solidFill>
                 <a:latin typeface="DejaVu Sans"/>
               </a:rPr>
-              <a:t>all in October</a:t>
+              <a:t>one analysis table</a:t>
             </a:r>
           </a:p>
         </p:txBody>
@@ -4054,7 +4054,7 @@
                 </a:solidFill>
                 <a:latin typeface="DejaVu Sans"/>
               </a:rPr>
-              <a:t>4</a:t>
+              <a:t>138</a:t>
             </a:r>
           </a:p>
           <a:p>
@@ -4070,7 +4070,7 @@
                 </a:solidFill>
                 <a:latin typeface="DejaVu Sans"/>
               </a:rPr>
-              <a:t>check-verdict heads</a:t>
+              <a:t>runs with vision metrics</a:t>
             </a:r>
           </a:p>
           <a:p>
@@ -4086,7 +4086,7 @@
                 </a:solidFill>
                 <a:latin typeface="DejaVu Sans"/>
               </a:rPr>
-              <a:t>one per check, ONNX</a:t>
+              <a:t>check-overlay measurements</a:t>
             </a:r>
           </a:p>
         </p:txBody>
@@ -4143,7 +4143,7 @@
                 </a:solidFill>
                 <a:latin typeface="DejaVu Sans"/>
               </a:rPr>
-              <a:t>1</a:t>
+              <a:t>4</a:t>
             </a:r>
           </a:p>
           <a:p>
@@ -4159,7 +4159,7 @@
                 </a:solidFill>
                 <a:latin typeface="DejaVu Sans"/>
               </a:rPr>
-              <a:t>fold-class model</a:t>
+              <a:t>camera checks</a:t>
             </a:r>
           </a:p>
           <a:p>
@@ -4175,7 +4175,7 @@
                 </a:solidFill>
                 <a:latin typeface="DejaVu Sans"/>
               </a:rPr>
-              <a:t>empty / flat / half / quarter</a:t>
+              <a:t>spread / fold1 / fold2 / push-off</a:t>
             </a:r>
           </a:p>
         </p:txBody>
@@ -4217,7 +4217,7 @@
                 </a:solidFill>
                 <a:latin typeface="DejaVu Sans"/>
               </a:rPr>
-              <a:t>- Honest read: three of four check heads do not generalize (balanced accuracy 0.67 to 0.92 on 31 to 61 frame holdouts).</a:t>
+              <a:t>- Join robot runs, recipe settings and check images in one analysis workflow.</a:t>
             </a:r>
           </a:p>
           <a:p>
@@ -4236,7 +4236,7 @@
                 </a:solidFill>
                 <a:latin typeface="DejaVu Sans"/>
               </a:rPr>
-              <a:t>- fold-class scores 0.99 on 110 frames, but on weak labels; quarter recall drops to 0.02 of 82 frames when maus-quin is held out.</a:t>
+              <a:t>- Measure diameter, centre offset, holes and fold overlap from the robot's check overlays.</a:t>
             </a:r>
           </a:p>
           <a:p>
@@ -4255,7 +4255,7 @@
                 </a:solidFill>
                 <a:latin typeface="DejaVu Sans"/>
               </a:rPr>
-              <a:t>- 690 of the 828 runs have no camera measurement at all - checks only exist from 13 October, so they are unmeasured, not evidence.</a:t>
+              <a:t>- Review video alongside frame records, then explore model artifacts and follow-up experiments.</a:t>
             </a:r>
           </a:p>
         </p:txBody>
@@ -4289,7 +4289,7 @@
                 </a:solidFill>
                 <a:latin typeface="DejaVu Sans"/>
               </a:rPr>
-              <a:t>Source: runs.parquet, vision.parquet, model cards</a:t>
+              <a:t>Sources: run table + vision metrics</a:t>
             </a:r>
           </a:p>
         </p:txBody>
@@ -4385,7 +4385,7 @@
                 </a:solidFill>
                 <a:latin typeface="DejaVu Sans"/>
               </a:rPr>
-              <a:t>See it live</a:t>
+              <a:t>Make the next run more informative</a:t>
             </a:r>
           </a:p>
         </p:txBody>
@@ -4417,17 +4417,18 @@
                 <a:spcPct val="100000"/>
               </a:lnSpc>
               <a:spcAft>
-                <a:spcPts val="2600"/>
+                <a:spcPts val="2400"/>
               </a:spcAft>
             </a:pPr>
             <a:r>
-              <a:rPr sz="2000" b="1">
+              <a:rPr sz="1800" b="1">
                 <a:solidFill>
                   <a:srgbClr val="F28B9B"/>
                 </a:solidFill>
                 <a:latin typeface="DejaVu Sans"/>
+                <a:hlinkClick r:id="rId3"/>
               </a:rPr>
-              <a:t>Website: https://YOUR-WEBSITE-HERE.example</a:t>
+              <a:t>Explore the project: github.com/leonardoAB1/maus-crepe-insights</a:t>
             </a:r>
           </a:p>
           <a:p>
@@ -4436,17 +4437,17 @@
                 <a:spcPct val="100000"/>
               </a:lnSpc>
               <a:spcAft>
-                <a:spcPts val="2600"/>
+                <a:spcPts val="2200"/>
               </a:spcAft>
             </a:pPr>
             <a:r>
-              <a:rPr sz="2000" b="1">
+              <a:rPr sz="1800" b="1">
                 <a:solidFill>
                   <a:srgbClr val="E8A87C"/>
                 </a:solidFill>
                 <a:latin typeface="DejaVu Sans"/>
               </a:rPr>
-              <a:t>Repo: https://github.com/leonardoAB1/maus-crepe-insights</a:t>
+              <a:t>Compare batches using the run table, camera-derived metrics and recipe settings.</a:t>
             </a:r>
           </a:p>
           <a:p>
@@ -4465,7 +4466,7 @@
                 </a:solidFill>
                 <a:latin typeface="DejaVu Sans"/>
               </a:rPr>
-              <a:t>Ask: more check records, because 117 of the 148 failed runs have none, and about 140 to 150 interleaved runs per robot, to turn the open questions into answers.</a:t>
+              <a:t>Bring more run records and check images into the analysis, then use the evidence to shape the next experiment.</a:t>
             </a:r>
           </a:p>
         </p:txBody>
@@ -4499,7 +4500,7 @@
                 </a:solidFill>
                 <a:latin typeface="DejaVu Sans"/>
               </a:rPr>
-              <a:t>Public repo; the Maus run data stays out of Git</a:t>
+              <a:t>Public code; run data stays private</a:t>
             </a:r>
           </a:p>
         </p:txBody>

--- a/assets/pitch/pitch-deck.pptx
+++ b/assets/pitch/pitch-deck.pptx
@@ -8,17 +8,6 @@
     <p:sldId id="256" r:id="rId7"/>
     <p:sldId id="257" r:id="rId9"/>
     <p:sldId id="258" r:id="rId10"/>
-    <p:sldId id="259" r:id="rId11"/>
-    <p:sldId id="260" r:id="rId12"/>
-    <p:sldId id="261" r:id="rId13"/>
-    <p:sldId id="262" r:id="rId14"/>
-    <p:sldId id="263" r:id="rId15"/>
-    <p:sldId id="264" r:id="rId16"/>
-    <p:sldId id="265" r:id="rId17"/>
-    <p:sldId id="266" r:id="rId18"/>
-    <p:sldId id="267" r:id="rId19"/>
-    <p:sldId id="268" r:id="rId20"/>
-    <p:sldId id="269" r:id="rId21"/>
   </p:sldIdLst>
   <p:sldSz cx="12191695" cy="6858000" type="screen4x3"/>
   <p:notesSz cx="6858000" cy="9144000"/>
@@ -515,357 +504,7 @@
           <a:lstStyle/>
           <a:p>
             <a:r>
-              <a:t>Open in one line: Maus robots make crepes on their own, every run is logged, and we turned those logs into measurements, models and next experiments. Everything in this deck comes from the repository's own documentation, its model cards, or its private data export. The repository is public; the Maus run data is not.</a:t>
-            </a:r>
-          </a:p>
-        </p:txBody>
-      </p:sp>
-      <p:sp>
-        <p:nvSpPr>
-          <p:cNvPr id="4" name="Slide Number Placeholder 3"/>
-          <p:cNvSpPr>
-            <a:spLocks noGrp="1"/>
-          </p:cNvSpPr>
-          <p:nvPr>
-            <p:ph type="sldNum" idx="5" sz="quarter"/>
-          </p:nvPr>
-        </p:nvSpPr>
-        <p:spPr/>
-      </p:sp>
-    </p:spTree>
-  </p:cSld>
-  <p:clrMapOvr>
-    <a:masterClrMapping/>
-  </p:clrMapOvr>
-</p:notes>
-</file>
-
-<file path=ppt/notesSlides/notesSlide10.xml><?xml version="1.0" encoding="utf-8"?>
-<p:notes xmlns:a="http://schemas.openxmlformats.org/drawingml/2006/main" xmlns:p="http://schemas.openxmlformats.org/presentationml/2006/main" xmlns:r="http://schemas.openxmlformats.org/officeDocument/2006/relationships">
-  <p:cSld>
-    <p:spTree>
-      <p:nvGrpSpPr>
-        <p:cNvPr id="1" name=""/>
-        <p:cNvGrpSpPr/>
-        <p:nvPr/>
-      </p:nvGrpSpPr>
-      <p:grpSpPr>
-        <a:xfrm>
-          <a:off x="0" y="0"/>
-          <a:ext cx="0" cy="0"/>
-          <a:chOff x="0" y="0"/>
-          <a:chExt cx="0" cy="0"/>
-        </a:xfrm>
-      </p:grpSpPr>
-      <p:sp>
-        <p:nvSpPr>
-          <p:cNvPr id="2" name="Slide Image Placeholder 1"/>
-          <p:cNvSpPr>
-            <a:spLocks noGrp="1"/>
-          </p:cNvSpPr>
-          <p:nvPr>
-            <p:ph type="sldImg" idx="2"/>
-          </p:nvPr>
-        </p:nvSpPr>
-        <p:spPr/>
-      </p:sp>
-      <p:sp>
-        <p:nvSpPr>
-          <p:cNvPr id="3" name="Notes Placeholder 2"/>
-          <p:cNvSpPr>
-            <a:spLocks noGrp="1"/>
-          </p:cNvSpPr>
-          <p:nvPr>
-            <p:ph type="body" idx="3" sz="quarter"/>
-          </p:nvPr>
-        </p:nvSpPr>
-        <p:spPr/>
-        <p:txBody>
-          <a:bodyPr/>
-          <a:lstStyle/>
-          <a:p>
-            <a:r>
-              <a:t>This is the map a jury looks for: the brief on the left, the verdict on the right. Be willing to say not delivered. Task 2 is the clearest miss; Level 2 is the second. Stating it plainly is stronger than a soft claim, because the repository's own status page says exactly this.</a:t>
-            </a:r>
-          </a:p>
-        </p:txBody>
-      </p:sp>
-      <p:sp>
-        <p:nvSpPr>
-          <p:cNvPr id="4" name="Slide Number Placeholder 3"/>
-          <p:cNvSpPr>
-            <a:spLocks noGrp="1"/>
-          </p:cNvSpPr>
-          <p:nvPr>
-            <p:ph type="sldNum" idx="5" sz="quarter"/>
-          </p:nvPr>
-        </p:nvSpPr>
-        <p:spPr/>
-      </p:sp>
-    </p:spTree>
-  </p:cSld>
-  <p:clrMapOvr>
-    <a:masterClrMapping/>
-  </p:clrMapOvr>
-</p:notes>
-</file>
-
-<file path=ppt/notesSlides/notesSlide11.xml><?xml version="1.0" encoding="utf-8"?>
-<p:notes xmlns:a="http://schemas.openxmlformats.org/drawingml/2006/main" xmlns:p="http://schemas.openxmlformats.org/presentationml/2006/main" xmlns:r="http://schemas.openxmlformats.org/officeDocument/2006/relationships">
-  <p:cSld>
-    <p:spTree>
-      <p:nvGrpSpPr>
-        <p:cNvPr id="1" name=""/>
-        <p:cNvGrpSpPr/>
-        <p:nvPr/>
-      </p:nvGrpSpPr>
-      <p:grpSpPr>
-        <a:xfrm>
-          <a:off x="0" y="0"/>
-          <a:ext cx="0" cy="0"/>
-          <a:chOff x="0" y="0"/>
-          <a:chExt cx="0" cy="0"/>
-        </a:xfrm>
-      </p:grpSpPr>
-      <p:sp>
-        <p:nvSpPr>
-          <p:cNvPr id="2" name="Slide Image Placeholder 1"/>
-          <p:cNvSpPr>
-            <a:spLocks noGrp="1"/>
-          </p:cNvSpPr>
-          <p:nvPr>
-            <p:ph type="sldImg" idx="2"/>
-          </p:nvPr>
-        </p:nvSpPr>
-        <p:spPr/>
-      </p:sp>
-      <p:sp>
-        <p:nvSpPr>
-          <p:cNvPr id="3" name="Notes Placeholder 2"/>
-          <p:cNvSpPr>
-            <a:spLocks noGrp="1"/>
-          </p:cNvSpPr>
-          <p:nvPr>
-            <p:ph type="body" idx="3" sz="quarter"/>
-          </p:nvPr>
-        </p:nvSpPr>
-        <p:spPr/>
-        <p:txBody>
-          <a:bodyPr/>
-          <a:lstStyle/>
-          <a:p>
-            <a:r>
-              <a:t>This slide exists on purpose. One unsupported claim in a judged repository discredits everything around it, so the weak numbers go up front with the file or command that produced them. The biggest single item left is landing the draft stack; the second is the missing inference entry point.</a:t>
-            </a:r>
-          </a:p>
-        </p:txBody>
-      </p:sp>
-      <p:sp>
-        <p:nvSpPr>
-          <p:cNvPr id="4" name="Slide Number Placeholder 3"/>
-          <p:cNvSpPr>
-            <a:spLocks noGrp="1"/>
-          </p:cNvSpPr>
-          <p:nvPr>
-            <p:ph type="sldNum" idx="5" sz="quarter"/>
-          </p:nvPr>
-        </p:nvSpPr>
-        <p:spPr/>
-      </p:sp>
-    </p:spTree>
-  </p:cSld>
-  <p:clrMapOvr>
-    <a:masterClrMapping/>
-  </p:clrMapOvr>
-</p:notes>
-</file>
-
-<file path=ppt/notesSlides/notesSlide12.xml><?xml version="1.0" encoding="utf-8"?>
-<p:notes xmlns:a="http://schemas.openxmlformats.org/drawingml/2006/main" xmlns:p="http://schemas.openxmlformats.org/presentationml/2006/main" xmlns:r="http://schemas.openxmlformats.org/officeDocument/2006/relationships">
-  <p:cSld>
-    <p:spTree>
-      <p:nvGrpSpPr>
-        <p:cNvPr id="1" name=""/>
-        <p:cNvGrpSpPr/>
-        <p:nvPr/>
-      </p:nvGrpSpPr>
-      <p:grpSpPr>
-        <a:xfrm>
-          <a:off x="0" y="0"/>
-          <a:ext cx="0" cy="0"/>
-          <a:chOff x="0" y="0"/>
-          <a:chExt cx="0" cy="0"/>
-        </a:xfrm>
-      </p:grpSpPr>
-      <p:sp>
-        <p:nvSpPr>
-          <p:cNvPr id="2" name="Slide Image Placeholder 1"/>
-          <p:cNvSpPr>
-            <a:spLocks noGrp="1"/>
-          </p:cNvSpPr>
-          <p:nvPr>
-            <p:ph type="sldImg" idx="2"/>
-          </p:nvPr>
-        </p:nvSpPr>
-        <p:spPr/>
-      </p:sp>
-      <p:sp>
-        <p:nvSpPr>
-          <p:cNvPr id="3" name="Notes Placeholder 2"/>
-          <p:cNvSpPr>
-            <a:spLocks noGrp="1"/>
-          </p:cNvSpPr>
-          <p:nvPr>
-            <p:ph type="body" idx="3" sz="quarter"/>
-          </p:nvPr>
-        </p:nvSpPr>
-        <p:spPr/>
-        <p:txBody>
-          <a:bodyPr/>
-          <a:lstStyle/>
-          <a:p>
-            <a:r>
-              <a:t>The DoE is a Definitive Screening Design: three levels per setting, main effects independent of each other and of curvature, plus three centre runs for noise. We never send anything to a robot; the sheet is a file someone runs by hand. The honest message is that the next answer comes from new data, not from more modelling on 138 runs.</a:t>
-            </a:r>
-          </a:p>
-        </p:txBody>
-      </p:sp>
-      <p:sp>
-        <p:nvSpPr>
-          <p:cNvPr id="4" name="Slide Number Placeholder 3"/>
-          <p:cNvSpPr>
-            <a:spLocks noGrp="1"/>
-          </p:cNvSpPr>
-          <p:nvPr>
-            <p:ph type="sldNum" idx="5" sz="quarter"/>
-          </p:nvPr>
-        </p:nvSpPr>
-        <p:spPr/>
-      </p:sp>
-    </p:spTree>
-  </p:cSld>
-  <p:clrMapOvr>
-    <a:masterClrMapping/>
-  </p:clrMapOvr>
-</p:notes>
-</file>
-
-<file path=ppt/notesSlides/notesSlide13.xml><?xml version="1.0" encoding="utf-8"?>
-<p:notes xmlns:a="http://schemas.openxmlformats.org/drawingml/2006/main" xmlns:p="http://schemas.openxmlformats.org/presentationml/2006/main" xmlns:r="http://schemas.openxmlformats.org/officeDocument/2006/relationships">
-  <p:cSld>
-    <p:spTree>
-      <p:nvGrpSpPr>
-        <p:cNvPr id="1" name=""/>
-        <p:cNvGrpSpPr/>
-        <p:nvPr/>
-      </p:nvGrpSpPr>
-      <p:grpSpPr>
-        <a:xfrm>
-          <a:off x="0" y="0"/>
-          <a:ext cx="0" cy="0"/>
-          <a:chOff x="0" y="0"/>
-          <a:chExt cx="0" cy="0"/>
-        </a:xfrm>
-      </p:grpSpPr>
-      <p:sp>
-        <p:nvSpPr>
-          <p:cNvPr id="2" name="Slide Image Placeholder 1"/>
-          <p:cNvSpPr>
-            <a:spLocks noGrp="1"/>
-          </p:cNvSpPr>
-          <p:nvPr>
-            <p:ph type="sldImg" idx="2"/>
-          </p:nvPr>
-        </p:nvSpPr>
-        <p:spPr/>
-      </p:sp>
-      <p:sp>
-        <p:nvSpPr>
-          <p:cNvPr id="3" name="Notes Placeholder 2"/>
-          <p:cNvSpPr>
-            <a:spLocks noGrp="1"/>
-          </p:cNvSpPr>
-          <p:nvPr>
-            <p:ph type="body" idx="3" sz="quarter"/>
-          </p:nvPr>
-        </p:nvSpPr>
-        <p:spPr/>
-        <p:txBody>
-          <a:bodyPr/>
-          <a:lstStyle/>
-          <a:p>
-            <a:r>
-              <a:t>Close on the one-minute check. Everything else in this deck should be verifiable from the repository; anything not verifiable is labelled as unverified in the docs. Be honest that the tests take about four minutes, not one, but they run offline exactly as claimed.</a:t>
-            </a:r>
-          </a:p>
-        </p:txBody>
-      </p:sp>
-      <p:sp>
-        <p:nvSpPr>
-          <p:cNvPr id="4" name="Slide Number Placeholder 3"/>
-          <p:cNvSpPr>
-            <a:spLocks noGrp="1"/>
-          </p:cNvSpPr>
-          <p:nvPr>
-            <p:ph type="sldNum" idx="5" sz="quarter"/>
-          </p:nvPr>
-        </p:nvSpPr>
-        <p:spPr/>
-      </p:sp>
-    </p:spTree>
-  </p:cSld>
-  <p:clrMapOvr>
-    <a:masterClrMapping/>
-  </p:clrMapOvr>
-</p:notes>
-</file>
-
-<file path=ppt/notesSlides/notesSlide14.xml><?xml version="1.0" encoding="utf-8"?>
-<p:notes xmlns:a="http://schemas.openxmlformats.org/drawingml/2006/main" xmlns:p="http://schemas.openxmlformats.org/presentationml/2006/main" xmlns:r="http://schemas.openxmlformats.org/officeDocument/2006/relationships">
-  <p:cSld>
-    <p:spTree>
-      <p:nvGrpSpPr>
-        <p:cNvPr id="1" name=""/>
-        <p:cNvGrpSpPr/>
-        <p:nvPr/>
-      </p:nvGrpSpPr>
-      <p:grpSpPr>
-        <a:xfrm>
-          <a:off x="0" y="0"/>
-          <a:ext cx="0" cy="0"/>
-          <a:chOff x="0" y="0"/>
-          <a:chExt cx="0" cy="0"/>
-        </a:xfrm>
-      </p:grpSpPr>
-      <p:sp>
-        <p:nvSpPr>
-          <p:cNvPr id="2" name="Slide Image Placeholder 1"/>
-          <p:cNvSpPr>
-            <a:spLocks noGrp="1"/>
-          </p:cNvSpPr>
-          <p:nvPr>
-            <p:ph type="sldImg" idx="2"/>
-          </p:nvPr>
-        </p:nvSpPr>
-        <p:spPr/>
-      </p:sp>
-      <p:sp>
-        <p:nvSpPr>
-          <p:cNvPr id="3" name="Notes Placeholder 2"/>
-          <p:cNvSpPr>
-            <a:spLocks noGrp="1"/>
-          </p:cNvSpPr>
-          <p:nvPr>
-            <p:ph type="body" idx="3" sz="quarter"/>
-          </p:nvPr>
-        </p:nvSpPr>
-        <p:spPr/>
-        <p:txBody>
-          <a:bodyPr/>
-          <a:lstStyle/>
-          <a:p>
-            <a:r>
-              <a:t>End on the repository and the status page, not on a model number. The value we bring Maus is a measured, documented pipeline and a clear list of what the next runs would settle.</a:t>
+              <a:t>Introduce the project as a practical data-to-insight toolkit: run records, camera checks and recipe settings become a structured view for analysis. Source: repository documentation and private Maus export. The project code is public; the run data remains private.</a:t>
             </a:r>
           </a:p>
         </p:txBody>
@@ -935,7 +574,7 @@
           <a:lstStyle/>
           <a:p>
             <a:r>
-              <a:t>The robot already sees a lot; the problem is that the outcome is a verdict, not a measurement. That gap is what the whole project works on. State the brief plainly here, because the next slides score it honestly.</a:t>
+              <a:t>The export contains 828 run records; the flat table has 177 columns; 138 runs have extracted vision measurements; and the workflow exposes four camera-check stages: spread, fold1, fold2 and push-off. Sources: private data/runs.parquet and data/vision.parquet, with the public schemas and commands in documentation/data/pipeline.md and documentation/status.md. The remaining callouts describe implemented data, measurement and review tools.</a:t>
             </a:r>
           </a:p>
         </p:txBody>
@@ -1005,427 +644,7 @@
           <a:lstStyle/>
           <a:p>
             <a:r>
-              <a:t>The account window and the camera-check cutoff explain nearly every limitation later. The 690 runs without measurements are not evidence of anything; they are simply unmeasured.</a:t>
-            </a:r>
-          </a:p>
-        </p:txBody>
-      </p:sp>
-      <p:sp>
-        <p:nvSpPr>
-          <p:cNvPr id="4" name="Slide Number Placeholder 3"/>
-          <p:cNvSpPr>
-            <a:spLocks noGrp="1"/>
-          </p:cNvSpPr>
-          <p:nvPr>
-            <p:ph type="sldNum" idx="5" sz="quarter"/>
-          </p:nvPr>
-        </p:nvSpPr>
-        <p:spPr/>
-      </p:sp>
-    </p:spTree>
-  </p:cSld>
-  <p:clrMapOvr>
-    <a:masterClrMapping/>
-  </p:clrMapOvr>
-</p:notes>
-</file>
-
-<file path=ppt/notesSlides/notesSlide4.xml><?xml version="1.0" encoding="utf-8"?>
-<p:notes xmlns:a="http://schemas.openxmlformats.org/drawingml/2006/main" xmlns:p="http://schemas.openxmlformats.org/presentationml/2006/main" xmlns:r="http://schemas.openxmlformats.org/officeDocument/2006/relationships">
-  <p:cSld>
-    <p:spTree>
-      <p:nvGrpSpPr>
-        <p:cNvPr id="1" name=""/>
-        <p:cNvGrpSpPr/>
-        <p:nvPr/>
-      </p:nvGrpSpPr>
-      <p:grpSpPr>
-        <a:xfrm>
-          <a:off x="0" y="0"/>
-          <a:ext cx="0" cy="0"/>
-          <a:chOff x="0" y="0"/>
-          <a:chExt cx="0" cy="0"/>
-        </a:xfrm>
-      </p:grpSpPr>
-      <p:sp>
-        <p:nvSpPr>
-          <p:cNvPr id="2" name="Slide Image Placeholder 1"/>
-          <p:cNvSpPr>
-            <a:spLocks noGrp="1"/>
-          </p:cNvSpPr>
-          <p:nvPr>
-            <p:ph type="sldImg" idx="2"/>
-          </p:nvPr>
-        </p:nvSpPr>
-        <p:spPr/>
-      </p:sp>
-      <p:sp>
-        <p:nvSpPr>
-          <p:cNvPr id="3" name="Notes Placeholder 2"/>
-          <p:cNvSpPr>
-            <a:spLocks noGrp="1"/>
-          </p:cNvSpPr>
-          <p:nvPr>
-            <p:ph type="body" idx="3" sz="quarter"/>
-          </p:nvPr>
-        </p:nvSpPr>
-        <p:spPr/>
-        <p:txBody>
-          <a:bodyPr/>
-          <a:lstStyle/>
-          <a:p>
-            <a:r>
-              <a:t>Order matters: raw data, then a standard container, then tables, then measurements, then models, then a viewer to inspect all of it. The models are experiments with cards, not shipped products; the next slides say why.</a:t>
-            </a:r>
-          </a:p>
-        </p:txBody>
-      </p:sp>
-      <p:sp>
-        <p:nvSpPr>
-          <p:cNvPr id="4" name="Slide Number Placeholder 3"/>
-          <p:cNvSpPr>
-            <a:spLocks noGrp="1"/>
-          </p:cNvSpPr>
-          <p:nvPr>
-            <p:ph type="sldNum" idx="5" sz="quarter"/>
-          </p:nvPr>
-        </p:nvSpPr>
-        <p:spPr/>
-      </p:sp>
-    </p:spTree>
-  </p:cSld>
-  <p:clrMapOvr>
-    <a:masterClrMapping/>
-  </p:clrMapOvr>
-</p:notes>
-</file>
-
-<file path=ppt/notesSlides/notesSlide5.xml><?xml version="1.0" encoding="utf-8"?>
-<p:notes xmlns:a="http://schemas.openxmlformats.org/drawingml/2006/main" xmlns:p="http://schemas.openxmlformats.org/presentationml/2006/main" xmlns:r="http://schemas.openxmlformats.org/officeDocument/2006/relationships">
-  <p:cSld>
-    <p:spTree>
-      <p:nvGrpSpPr>
-        <p:cNvPr id="1" name=""/>
-        <p:cNvGrpSpPr/>
-        <p:nvPr/>
-      </p:nvGrpSpPr>
-      <p:grpSpPr>
-        <a:xfrm>
-          <a:off x="0" y="0"/>
-          <a:ext cx="0" cy="0"/>
-          <a:chOff x="0" y="0"/>
-          <a:chExt cx="0" cy="0"/>
-        </a:xfrm>
-      </p:grpSpPr>
-      <p:sp>
-        <p:nvSpPr>
-          <p:cNvPr id="2" name="Slide Image Placeholder 1"/>
-          <p:cNvSpPr>
-            <a:spLocks noGrp="1"/>
-          </p:cNvSpPr>
-          <p:nvPr>
-            <p:ph type="sldImg" idx="2"/>
-          </p:nvPr>
-        </p:nvSpPr>
-        <p:spPr/>
-      </p:sp>
-      <p:sp>
-        <p:nvSpPr>
-          <p:cNvPr id="3" name="Notes Placeholder 2"/>
-          <p:cNvSpPr>
-            <a:spLocks noGrp="1"/>
-          </p:cNvSpPr>
-          <p:nvPr>
-            <p:ph type="body" idx="3" sz="quarter"/>
-          </p:nvPr>
-        </p:nvSpPr>
-        <p:spPr/>
-        <p:txBody>
-          <a:bodyPr/>
-          <a:lstStyle/>
-          <a:p>
-            <a:r>
-              <a:t>Two consequences. A failed check does not stop the run, so failure analysis cannot use where a run stopped. And spread and folds are the weak points worth measuring properly. These counts are the robot's own verdicts over runs with check data.</a:t>
-            </a:r>
-          </a:p>
-        </p:txBody>
-      </p:sp>
-      <p:sp>
-        <p:nvSpPr>
-          <p:cNvPr id="4" name="Slide Number Placeholder 3"/>
-          <p:cNvSpPr>
-            <a:spLocks noGrp="1"/>
-          </p:cNvSpPr>
-          <p:nvPr>
-            <p:ph type="sldNum" idx="5" sz="quarter"/>
-          </p:nvPr>
-        </p:nvSpPr>
-        <p:spPr/>
-      </p:sp>
-    </p:spTree>
-  </p:cSld>
-  <p:clrMapOvr>
-    <a:masterClrMapping/>
-  </p:clrMapOvr>
-</p:notes>
-</file>
-
-<file path=ppt/notesSlides/notesSlide6.xml><?xml version="1.0" encoding="utf-8"?>
-<p:notes xmlns:a="http://schemas.openxmlformats.org/drawingml/2006/main" xmlns:p="http://schemas.openxmlformats.org/presentationml/2006/main" xmlns:r="http://schemas.openxmlformats.org/officeDocument/2006/relationships">
-  <p:cSld>
-    <p:spTree>
-      <p:nvGrpSpPr>
-        <p:cNvPr id="1" name=""/>
-        <p:cNvGrpSpPr/>
-        <p:nvPr/>
-      </p:nvGrpSpPr>
-      <p:grpSpPr>
-        <a:xfrm>
-          <a:off x="0" y="0"/>
-          <a:ext cx="0" cy="0"/>
-          <a:chOff x="0" y="0"/>
-          <a:chExt cx="0" cy="0"/>
-        </a:xfrm>
-      </p:grpSpPr>
-      <p:sp>
-        <p:nvSpPr>
-          <p:cNvPr id="2" name="Slide Image Placeholder 1"/>
-          <p:cNvSpPr>
-            <a:spLocks noGrp="1"/>
-          </p:cNvSpPr>
-          <p:nvPr>
-            <p:ph type="sldImg" idx="2"/>
-          </p:nvPr>
-        </p:nvSpPr>
-        <p:spPr/>
-      </p:sp>
-      <p:sp>
-        <p:nvSpPr>
-          <p:cNvPr id="3" name="Notes Placeholder 2"/>
-          <p:cNvSpPr>
-            <a:spLocks noGrp="1"/>
-          </p:cNvSpPr>
-          <p:nvPr>
-            <p:ph type="body" idx="3" sz="quarter"/>
-          </p:nvPr>
-        </p:nvSpPr>
-        <p:spPr/>
-        <p:txBody>
-          <a:bodyPr/>
-          <a:lstStyle/>
-          <a:p>
-            <a:r>
-              <a:t>The figure shows two annotated examples we may publish: left, a spread check flagged for a large off-centre hole; right, a fold 2 check flagged as not a quarter fold. These are the robot's own annotations read back as numbers, not a new model. This is the one place we turn a verdict into a measurement.</a:t>
-            </a:r>
-          </a:p>
-        </p:txBody>
-      </p:sp>
-      <p:sp>
-        <p:nvSpPr>
-          <p:cNvPr id="4" name="Slide Number Placeholder 3"/>
-          <p:cNvSpPr>
-            <a:spLocks noGrp="1"/>
-          </p:cNvSpPr>
-          <p:nvPr>
-            <p:ph type="sldNum" idx="5" sz="quarter"/>
-          </p:nvPr>
-        </p:nvSpPr>
-        <p:spPr/>
-      </p:sp>
-    </p:spTree>
-  </p:cSld>
-  <p:clrMapOvr>
-    <a:masterClrMapping/>
-  </p:clrMapOvr>
-</p:notes>
-</file>
-
-<file path=ppt/notesSlides/notesSlide7.xml><?xml version="1.0" encoding="utf-8"?>
-<p:notes xmlns:a="http://schemas.openxmlformats.org/drawingml/2006/main" xmlns:p="http://schemas.openxmlformats.org/presentationml/2006/main" xmlns:r="http://schemas.openxmlformats.org/officeDocument/2006/relationships">
-  <p:cSld>
-    <p:spTree>
-      <p:nvGrpSpPr>
-        <p:cNvPr id="1" name=""/>
-        <p:cNvGrpSpPr/>
-        <p:nvPr/>
-      </p:nvGrpSpPr>
-      <p:grpSpPr>
-        <a:xfrm>
-          <a:off x="0" y="0"/>
-          <a:ext cx="0" cy="0"/>
-          <a:chOff x="0" y="0"/>
-          <a:chExt cx="0" cy="0"/>
-        </a:xfrm>
-      </p:grpSpPr>
-      <p:sp>
-        <p:nvSpPr>
-          <p:cNvPr id="2" name="Slide Image Placeholder 1"/>
-          <p:cNvSpPr>
-            <a:spLocks noGrp="1"/>
-          </p:cNvSpPr>
-          <p:nvPr>
-            <p:ph type="sldImg" idx="2"/>
-          </p:nvPr>
-        </p:nvSpPr>
-        <p:spPr/>
-      </p:sp>
-      <p:sp>
-        <p:nvSpPr>
-          <p:cNvPr id="3" name="Notes Placeholder 2"/>
-          <p:cNvSpPr>
-            <a:spLocks noGrp="1"/>
-          </p:cNvSpPr>
-          <p:nvPr>
-            <p:ph type="body" idx="3" sz="quarter"/>
-          </p:nvPr>
-        </p:nvSpPr>
-        <p:spPr/>
-        <p:txBody>
-          <a:bodyPr/>
-          <a:lstStyle/>
-          <a:p>
-            <a:r>
-              <a:t>This is the honest read the repository's own weak-number pages support but its status table does not repeat. The point is not that the models are bad; it is that we know exactly how weak they are, and we say so. The next slide shows the cross-robot picture.</a:t>
-            </a:r>
-          </a:p>
-        </p:txBody>
-      </p:sp>
-      <p:sp>
-        <p:nvSpPr>
-          <p:cNvPr id="4" name="Slide Number Placeholder 3"/>
-          <p:cNvSpPr>
-            <a:spLocks noGrp="1"/>
-          </p:cNvSpPr>
-          <p:nvPr>
-            <p:ph type="sldNum" idx="5" sz="quarter"/>
-          </p:nvPr>
-        </p:nvSpPr>
-        <p:spPr/>
-      </p:sp>
-    </p:spTree>
-  </p:cSld>
-  <p:clrMapOvr>
-    <a:masterClrMapping/>
-  </p:clrMapOvr>
-</p:notes>
-</file>
-
-<file path=ppt/notesSlides/notesSlide8.xml><?xml version="1.0" encoding="utf-8"?>
-<p:notes xmlns:a="http://schemas.openxmlformats.org/drawingml/2006/main" xmlns:p="http://schemas.openxmlformats.org/presentationml/2006/main" xmlns:r="http://schemas.openxmlformats.org/officeDocument/2006/relationships">
-  <p:cSld>
-    <p:spTree>
-      <p:nvGrpSpPr>
-        <p:cNvPr id="1" name=""/>
-        <p:cNvGrpSpPr/>
-        <p:nvPr/>
-      </p:nvGrpSpPr>
-      <p:grpSpPr>
-        <a:xfrm>
-          <a:off x="0" y="0"/>
-          <a:ext cx="0" cy="0"/>
-          <a:chOff x="0" y="0"/>
-          <a:chExt cx="0" cy="0"/>
-        </a:xfrm>
-      </p:grpSpPr>
-      <p:sp>
-        <p:nvSpPr>
-          <p:cNvPr id="2" name="Slide Image Placeholder 1"/>
-          <p:cNvSpPr>
-            <a:spLocks noGrp="1"/>
-          </p:cNvSpPr>
-          <p:nvPr>
-            <p:ph type="sldImg" idx="2"/>
-          </p:nvPr>
-        </p:nvSpPr>
-        <p:spPr/>
-      </p:sp>
-      <p:sp>
-        <p:nvSpPr>
-          <p:cNvPr id="3" name="Notes Placeholder 2"/>
-          <p:cNvSpPr>
-            <a:spLocks noGrp="1"/>
-          </p:cNvSpPr>
-          <p:nvPr>
-            <p:ph type="body" idx="3" sz="quarter"/>
-          </p:nvPr>
-        </p:nvSpPr>
-        <p:spPr/>
-        <p:txBody>
-          <a:bodyPr/>
-          <a:lstStyle/>
-          <a:p>
-            <a:r>
-              <a:t>Left: balanced accuracy per check, a robot's own holdout versus that robot held out entirely. push_off transfers well; spread and fold2 do not, which is the counterweight to any single headline number. Right: a deliberate failure case of the colour-and-connectivity pixel-mask suggester, which calls a dark stain a hole. That is why every suggestion is an editable draft a human confirms, never an accepted label.</a:t>
-            </a:r>
-          </a:p>
-        </p:txBody>
-      </p:sp>
-      <p:sp>
-        <p:nvSpPr>
-          <p:cNvPr id="4" name="Slide Number Placeholder 3"/>
-          <p:cNvSpPr>
-            <a:spLocks noGrp="1"/>
-          </p:cNvSpPr>
-          <p:nvPr>
-            <p:ph type="sldNum" idx="5" sz="quarter"/>
-          </p:nvPr>
-        </p:nvSpPr>
-        <p:spPr/>
-      </p:sp>
-    </p:spTree>
-  </p:cSld>
-  <p:clrMapOvr>
-    <a:masterClrMapping/>
-  </p:clrMapOvr>
-</p:notes>
-</file>
-
-<file path=ppt/notesSlides/notesSlide9.xml><?xml version="1.0" encoding="utf-8"?>
-<p:notes xmlns:a="http://schemas.openxmlformats.org/drawingml/2006/main" xmlns:p="http://schemas.openxmlformats.org/presentationml/2006/main" xmlns:r="http://schemas.openxmlformats.org/officeDocument/2006/relationships">
-  <p:cSld>
-    <p:spTree>
-      <p:nvGrpSpPr>
-        <p:cNvPr id="1" name=""/>
-        <p:cNvGrpSpPr/>
-        <p:nvPr/>
-      </p:nvGrpSpPr>
-      <p:grpSpPr>
-        <a:xfrm>
-          <a:off x="0" y="0"/>
-          <a:ext cx="0" cy="0"/>
-          <a:chOff x="0" y="0"/>
-          <a:chExt cx="0" cy="0"/>
-        </a:xfrm>
-      </p:grpSpPr>
-      <p:sp>
-        <p:nvSpPr>
-          <p:cNvPr id="2" name="Slide Image Placeholder 1"/>
-          <p:cNvSpPr>
-            <a:spLocks noGrp="1"/>
-          </p:cNvSpPr>
-          <p:nvPr>
-            <p:ph type="sldImg" idx="2"/>
-          </p:nvPr>
-        </p:nvSpPr>
-        <p:spPr/>
-      </p:sp>
-      <p:sp>
-        <p:nvSpPr>
-          <p:cNvPr id="3" name="Notes Placeholder 2"/>
-          <p:cNvSpPr>
-            <a:spLocks noGrp="1"/>
-          </p:cNvSpPr>
-          <p:nvPr>
-            <p:ph type="body" idx="3" sz="quarter"/>
-          </p:nvPr>
-        </p:nvSpPr>
-        <p:spPr/>
-        <p:txBody>
-          <a:bodyPr/>
-          <a:lstStyle/>
-          <a:p>
-            <a:r>
-              <a:t>The mask contract is strict on purpose: material and hole masks must not overlap, holes are enclosed gaps only, and an empty result is never recorded as no crepe. The prefill is plain colour and connectivity work, deliberately not a learned model. No model has been trained on these labels yet, which is the single biggest gap in the modelling story.</a:t>
+              <a:t>Invite the audience to explore the public project and its pipeline, data schemas, vision measurements, model artifacts and review tools. Teams can use their own authorized run records to compare batches and shape follow-up experiments. The source code is public; private Maus run data is not included.</a:t>
             </a:r>
           </a:p>
         </p:txBody>
@@ -4424,6 +3643,14 @@
 <file path=ppt/slides/slide1.xml><?xml version="1.0" encoding="utf-8"?>
 <p:sld xmlns:a="http://schemas.openxmlformats.org/drawingml/2006/main" xmlns:p="http://schemas.openxmlformats.org/presentationml/2006/main" xmlns:r="http://schemas.openxmlformats.org/officeDocument/2006/relationships">
   <p:cSld>
+    <p:bg>
+      <p:bgPr>
+        <a:solidFill>
+          <a:srgbClr val="FFF6EC"/>
+        </a:solidFill>
+        <a:effectLst/>
+      </p:bgPr>
+    </p:bg>
     <p:spTree>
       <p:nvGrpSpPr>
         <p:cNvPr id="1" name=""/>
@@ -4439,8 +3666,8 @@
         </p:nvSpPr>
         <p:spPr>
           <a:xfrm>
-            <a:off x="1097280" y="1920240"/>
-            <a:ext cx="9966960" cy="1280160"/>
+            <a:off x="822960" y="1417320"/>
+            <a:ext cx="10515600" cy="1188720"/>
           </a:xfrm>
           <a:prstGeom prst="rect">
             <a:avLst/>
@@ -4455,9 +3682,9 @@
           <a:p>
             <a:pPr algn="ctr"/>
             <a:r>
-              <a:rPr sz="4400" b="1">
+              <a:rPr sz="4800" b="1">
                 <a:solidFill>
-                  <a:srgbClr val="1A1A1A"/>
+                  <a:srgbClr val="4A3226"/>
                 </a:solidFill>
                 <a:latin typeface="DejaVu Sans"/>
               </a:rPr>
@@ -4474,8 +3701,8 @@
         </p:nvSpPr>
         <p:spPr>
           <a:xfrm>
-            <a:off x="1463040" y="3383280"/>
-            <a:ext cx="9235440" cy="2011680"/>
+            <a:off x="1188720" y="2880360"/>
+            <a:ext cx="9784080" cy="1097280"/>
           </a:xfrm>
           <a:prstGeom prst="rect">
             <a:avLst/>
@@ -4488,83 +3715,29 @@
           </a:bodyPr>
           <a:lstStyle/>
           <a:p>
-            <a:pPr algn="ctr">
-              <a:spcAft>
-                <a:spcPts val="600"/>
-              </a:spcAft>
-            </a:pPr>
-            <a:r>
-              <a:rPr sz="1800" b="0">
+            <a:pPr algn="ctr"/>
+            <a:r>
+              <a:rPr sz="2200" b="0">
                 <a:solidFill>
-                  <a:srgbClr val="1A1A1A"/>
+                  <a:srgbClr val="F28B9B"/>
                 </a:solidFill>
                 <a:latin typeface="DejaVu Sans"/>
               </a:rPr>
-              <a:t>Why crepe runs fail, and what to change</a:t>
-            </a:r>
-          </a:p>
-          <a:p>
-            <a:pPr algn="ctr">
-              <a:spcAft>
-                <a:spcPts val="600"/>
-              </a:spcAft>
-            </a:pPr>
-            <a:r>
-              <a:rPr sz="1400" b="0">
-                <a:solidFill>
-                  <a:srgbClr val="6B6B6B"/>
-                </a:solidFill>
-                <a:latin typeface="DejaVu Sans"/>
-              </a:rPr>
-              <a:t>BaselHack 2026, Maus Robotics challenge</a:t>
-            </a:r>
-          </a:p>
-          <a:p>
-            <a:pPr algn="ctr">
-              <a:spcAft>
-                <a:spcPts val="600"/>
-              </a:spcAft>
-            </a:pPr>
-            <a:r>
-              <a:rPr sz="1400" b="0">
-                <a:solidFill>
-                  <a:srgbClr val="6B6B6B"/>
-                </a:solidFill>
-                <a:latin typeface="DejaVu Sans"/>
-              </a:rPr>
-              <a:t>Repo: github.com/leonardoAB1/maus-crepe-insights</a:t>
-            </a:r>
-          </a:p>
-        </p:txBody>
-      </p:sp>
-    </p:spTree>
-  </p:cSld>
-  <p:clrMapOvr>
-    <a:masterClrMapping/>
-  </p:clrMapOvr>
-</p:sld>
-</file>
-
-<file path=ppt/slides/slide10.xml><?xml version="1.0" encoding="utf-8"?>
-<p:sld xmlns:a="http://schemas.openxmlformats.org/drawingml/2006/main" xmlns:p="http://schemas.openxmlformats.org/presentationml/2006/main" xmlns:r="http://schemas.openxmlformats.org/officeDocument/2006/relationships">
-  <p:cSld>
-    <p:spTree>
-      <p:nvGrpSpPr>
-        <p:cNvPr id="1" name=""/>
-        <p:cNvGrpSpPr/>
-        <p:nvPr/>
-      </p:nvGrpSpPr>
-      <p:grpSpPr/>
-      <p:sp>
-        <p:nvSpPr>
-          <p:cNvPr id="2" name="TextBox 1"/>
+              <a:t>Turn robot run records and camera checks into measurable crêpe-quality signals.</a:t>
+            </a:r>
+          </a:p>
+        </p:txBody>
+      </p:sp>
+      <p:sp>
+        <p:nvSpPr>
+          <p:cNvPr id="4" name="TextBox 3"/>
           <p:cNvSpPr txBox="1"/>
           <p:nvPr/>
         </p:nvSpPr>
         <p:spPr>
           <a:xfrm>
-            <a:off x="548640" y="292608"/>
-            <a:ext cx="11064240" cy="822960"/>
+            <a:off x="1188720" y="4160520"/>
+            <a:ext cx="9784080" cy="548640"/>
           </a:xfrm>
           <a:prstGeom prst="rect">
             <a:avLst/>
@@ -4577,1536 +3750,15 @@
           </a:bodyPr>
           <a:lstStyle/>
           <a:p>
-            <a:pPr algn="l"/>
-            <a:r>
-              <a:rPr sz="3000" b="1">
+            <a:pPr algn="ctr"/>
+            <a:r>
+              <a:rPr sz="1400" b="0">
                 <a:solidFill>
-                  <a:srgbClr val="1A1A1A"/>
+                  <a:srgbClr val="9C7A63"/>
                 </a:solidFill>
                 <a:latin typeface="DejaVu Sans"/>
               </a:rPr>
-              <a:t>Brief coverage: three tasks, two levels</a:t>
-            </a:r>
-          </a:p>
-        </p:txBody>
-      </p:sp>
-      <p:graphicFrame>
-        <p:nvGraphicFramePr>
-          <p:cNvPr id="3" name="Table 2"/>
-          <p:cNvGraphicFramePr>
-            <a:graphicFrameLocks noGrp="1"/>
-          </p:cNvGraphicFramePr>
-          <p:nvPr/>
-        </p:nvGraphicFramePr>
-        <p:xfrm>
-          <a:off x="411480" y="1234440"/>
-          <a:ext cx="11384280" cy="4297680"/>
-        </p:xfrm>
-        <a:graphic>
-          <a:graphicData uri="http://schemas.openxmlformats.org/drawingml/2006/table">
-            <a:tbl>
-              <a:tblPr firstRow="1" bandRow="1">
-                <a:tableStyleId>{5C22544A-7EE6-4342-B048-85BDC9FD1C3A}</a:tableStyleId>
-              </a:tblPr>
-              <a:tblGrid>
-                <a:gridCol w="2651760"/>
-                <a:gridCol w="3200400"/>
-                <a:gridCol w="5532120"/>
-              </a:tblGrid>
-              <a:tr h="716280">
-                <a:tc>
-                  <a:txBody>
-                    <a:bodyPr wrap="square"/>
-                    <a:lstStyle/>
-                    <a:p>
-                      <a:r>
-                        <a:rPr sz="1100" b="1">
-                          <a:solidFill>
-                            <a:srgbClr val="FFFFFF"/>
-                          </a:solidFill>
-                          <a:latin typeface="DejaVu Sans"/>
-                        </a:rPr>
-                        <a:t>Brief item</a:t>
-                      </a:r>
-                    </a:p>
-                  </a:txBody>
-                  <a:tcPr marL="54864" marR="54864" marT="27432" marB="27432" anchor="t">
-                    <a:solidFill>
-                      <a:srgbClr val="1F4E79"/>
-                    </a:solidFill>
-                  </a:tcPr>
-                </a:tc>
-                <a:tc>
-                  <a:txBody>
-                    <a:bodyPr wrap="square"/>
-                    <a:lstStyle/>
-                    <a:p>
-                      <a:r>
-                        <a:rPr sz="1100" b="1">
-                          <a:solidFill>
-                            <a:srgbClr val="FFFFFF"/>
-                          </a:solidFill>
-                          <a:latin typeface="DejaVu Sans"/>
-                        </a:rPr>
-                        <a:t>Asked</a:t>
-                      </a:r>
-                    </a:p>
-                  </a:txBody>
-                  <a:tcPr marL="54864" marR="54864" marT="27432" marB="27432" anchor="t">
-                    <a:solidFill>
-                      <a:srgbClr val="1F4E79"/>
-                    </a:solidFill>
-                  </a:tcPr>
-                </a:tc>
-                <a:tc>
-                  <a:txBody>
-                    <a:bodyPr wrap="square"/>
-                    <a:lstStyle/>
-                    <a:p>
-                      <a:r>
-                        <a:rPr sz="1100" b="1">
-                          <a:solidFill>
-                            <a:srgbClr val="FFFFFF"/>
-                          </a:solidFill>
-                          <a:latin typeface="DejaVu Sans"/>
-                        </a:rPr>
-                        <a:t>Verdict</a:t>
-                      </a:r>
-                    </a:p>
-                  </a:txBody>
-                  <a:tcPr marL="54864" marR="54864" marT="27432" marB="27432" anchor="t">
-                    <a:solidFill>
-                      <a:srgbClr val="1F4E79"/>
-                    </a:solidFill>
-                  </a:tcPr>
-                </a:tc>
-              </a:tr>
-              <a:tr h="716280">
-                <a:tc>
-                  <a:txBody>
-                    <a:bodyPr wrap="square"/>
-                    <a:lstStyle/>
-                    <a:p>
-                      <a:r>
-                        <a:rPr sz="1100" b="0">
-                          <a:solidFill>
-                            <a:srgbClr val="1A1A1A"/>
-                          </a:solidFill>
-                          <a:latin typeface="DejaVu Sans"/>
-                        </a:rPr>
-                        <a:t>Task 1, spread quality</a:t>
-                      </a:r>
-                    </a:p>
-                  </a:txBody>
-                  <a:tcPr marL="54864" marR="54864" marT="27432" marB="27432" anchor="t">
-                    <a:solidFill>
-                      <a:srgbClr val="FFFFFF"/>
-                    </a:solidFill>
-                  </a:tcPr>
-                </a:tc>
-                <a:tc>
-                  <a:txBody>
-                    <a:bodyPr wrap="square"/>
-                    <a:lstStyle/>
-                    <a:p>
-                      <a:r>
-                        <a:rPr sz="1100" b="0">
-                          <a:solidFill>
-                            <a:srgbClr val="1A1A1A"/>
-                          </a:solidFill>
-                          <a:latin typeface="DejaVu Sans"/>
-                        </a:rPr>
-                        <a:t>mask, diameter, quality score</a:t>
-                      </a:r>
-                    </a:p>
-                  </a:txBody>
-                  <a:tcPr marL="54864" marR="54864" marT="27432" marB="27432" anchor="t">
-                    <a:solidFill>
-                      <a:srgbClr val="FFFFFF"/>
-                    </a:solidFill>
-                  </a:tcPr>
-                </a:tc>
-                <a:tc>
-                  <a:txBody>
-                    <a:bodyPr wrap="square"/>
-                    <a:lstStyle/>
-                    <a:p>
-                      <a:r>
-                        <a:rPr sz="1100" b="0">
-                          <a:solidFill>
-                            <a:srgbClr val="1A1A1A"/>
-                          </a:solidFill>
-                          <a:latin typeface="DejaVu Sans"/>
-                        </a:rPr>
-                        <a:t>partial: per-run vision metrics over 138 runs (diameter, centre offset, circularity, holes, uncovered fraction) and a classical pixel-mask suggester; no spread model</a:t>
-                      </a:r>
-                    </a:p>
-                  </a:txBody>
-                  <a:tcPr marL="54864" marR="54864" marT="27432" marB="27432" anchor="t">
-                    <a:solidFill>
-                      <a:srgbClr val="FFFFFF"/>
-                    </a:solidFill>
-                  </a:tcPr>
-                </a:tc>
-              </a:tr>
-              <a:tr h="716280">
-                <a:tc>
-                  <a:txBody>
-                    <a:bodyPr wrap="square"/>
-                    <a:lstStyle/>
-                    <a:p>
-                      <a:r>
-                        <a:rPr sz="1100" b="0">
-                          <a:solidFill>
-                            <a:srgbClr val="1A1A1A"/>
-                          </a:solidFill>
-                          <a:latin typeface="DejaVu Sans"/>
-                        </a:rPr>
-                        <a:t>Task 2, position and orientation</a:t>
-                      </a:r>
-                    </a:p>
-                  </a:txBody>
-                  <a:tcPr marL="54864" marR="54864" marT="27432" marB="27432" anchor="t">
-                    <a:solidFill>
-                      <a:srgbClr val="EEF3F9"/>
-                    </a:solidFill>
-                  </a:tcPr>
-                </a:tc>
-                <a:tc>
-                  <a:txBody>
-                    <a:bodyPr wrap="square"/>
-                    <a:lstStyle/>
-                    <a:p>
-                      <a:r>
-                        <a:rPr sz="1100" b="0">
-                          <a:solidFill>
-                            <a:srgbClr val="1A1A1A"/>
-                          </a:solidFill>
-                          <a:latin typeface="DejaVu Sans"/>
-                        </a:rPr>
-                        <a:t>centre (x, y) and angle for the spatula</a:t>
-                      </a:r>
-                    </a:p>
-                  </a:txBody>
-                  <a:tcPr marL="54864" marR="54864" marT="27432" marB="27432" anchor="t">
-                    <a:solidFill>
-                      <a:srgbClr val="EEF3F9"/>
-                    </a:solidFill>
-                  </a:tcPr>
-                </a:tc>
-                <a:tc>
-                  <a:txBody>
-                    <a:bodyPr wrap="square"/>
-                    <a:lstStyle/>
-                    <a:p>
-                      <a:r>
-                        <a:rPr sz="1100" b="0">
-                          <a:solidFill>
-                            <a:srgbClr val="1A1A1A"/>
-                          </a:solidFill>
-                          <a:latin typeface="DejaVu Sans"/>
-                        </a:rPr>
-                        <a:t>not delivered: centre offset is a recorded metric; the fold geometry computes an edge angle but the straight-edge gate accepted 0 of the 854 measured frames</a:t>
-                      </a:r>
-                    </a:p>
-                  </a:txBody>
-                  <a:tcPr marL="54864" marR="54864" marT="27432" marB="27432" anchor="t">
-                    <a:solidFill>
-                      <a:srgbClr val="EEF3F9"/>
-                    </a:solidFill>
-                  </a:tcPr>
-                </a:tc>
-              </a:tr>
-              <a:tr h="716280">
-                <a:tc>
-                  <a:txBody>
-                    <a:bodyPr wrap="square"/>
-                    <a:lstStyle/>
-                    <a:p>
-                      <a:r>
-                        <a:rPr sz="1100" b="0">
-                          <a:solidFill>
-                            <a:srgbClr val="1A1A1A"/>
-                          </a:solidFill>
-                          <a:latin typeface="DejaVu Sans"/>
-                        </a:rPr>
-                        <a:t>Task 3, fold detection</a:t>
-                      </a:r>
-                    </a:p>
-                  </a:txBody>
-                  <a:tcPr marL="54864" marR="54864" marT="27432" marB="27432" anchor="t">
-                    <a:solidFill>
-                      <a:srgbClr val="FFFFFF"/>
-                    </a:solidFill>
-                  </a:tcPr>
-                </a:tc>
-                <a:tc>
-                  <a:txBody>
-                    <a:bodyPr wrap="square"/>
-                    <a:lstStyle/>
-                    <a:p>
-                      <a:r>
-                        <a:rPr sz="1100" b="0">
-                          <a:solidFill>
-                            <a:srgbClr val="1A1A1A"/>
-                          </a:solidFill>
-                          <a:latin typeface="DejaVu Sans"/>
-                        </a:rPr>
-                        <a:t>flat / half / quarter / triangle plus edge angle</a:t>
-                      </a:r>
-                    </a:p>
-                  </a:txBody>
-                  <a:tcPr marL="54864" marR="54864" marT="27432" marB="27432" anchor="t">
-                    <a:solidFill>
-                      <a:srgbClr val="FFFFFF"/>
-                    </a:solidFill>
-                  </a:tcPr>
-                </a:tc>
-                <a:tc>
-                  <a:txBody>
-                    <a:bodyPr wrap="square"/>
-                    <a:lstStyle/>
-                    <a:p>
-                      <a:r>
-                        <a:rPr sz="1100" b="0">
-                          <a:solidFill>
-                            <a:srgbClr val="1A1A1A"/>
-                          </a:solidFill>
-                          <a:latin typeface="DejaVu Sans"/>
-                        </a:rPr>
-                        <a:t>partial: fold-class ONNX, four classes, on weak labels; the triangle fold is unsupported by design</a:t>
-                      </a:r>
-                    </a:p>
-                  </a:txBody>
-                  <a:tcPr marL="54864" marR="54864" marT="27432" marB="27432" anchor="t">
-                    <a:solidFill>
-                      <a:srgbClr val="FFFFFF"/>
-                    </a:solidFill>
-                  </a:tcPr>
-                </a:tc>
-              </a:tr>
-              <a:tr h="716280">
-                <a:tc>
-                  <a:txBody>
-                    <a:bodyPr wrap="square"/>
-                    <a:lstStyle/>
-                    <a:p>
-                      <a:r>
-                        <a:rPr sz="1100" b="0">
-                          <a:solidFill>
-                            <a:srgbClr val="1A1A1A"/>
-                          </a:solidFill>
-                          <a:latin typeface="DejaVu Sans"/>
-                        </a:rPr>
-                        <a:t>Level 1, works on Maus data</a:t>
-                      </a:r>
-                    </a:p>
-                  </a:txBody>
-                  <a:tcPr marL="54864" marR="54864" marT="27432" marB="27432" anchor="t">
-                    <a:solidFill>
-                      <a:srgbClr val="EEF3F9"/>
-                    </a:solidFill>
-                  </a:tcPr>
-                </a:tc>
-                <a:tc>
-                  <a:txBody>
-                    <a:bodyPr wrap="square"/>
-                    <a:lstStyle/>
-                    <a:p>
-                      <a:r>
-                        <a:rPr sz="1100" b="0">
-                          <a:solidFill>
-                            <a:srgbClr val="1A1A1A"/>
-                          </a:solidFill>
-                          <a:latin typeface="DejaVu Sans"/>
-                        </a:rPr>
-                        <a:t>model scored against the robot verdicts</a:t>
-                      </a:r>
-                    </a:p>
-                  </a:txBody>
-                  <a:tcPr marL="54864" marR="54864" marT="27432" marB="27432" anchor="t">
-                    <a:solidFill>
-                      <a:srgbClr val="EEF3F9"/>
-                    </a:solidFill>
-                  </a:tcPr>
-                </a:tc>
-                <a:tc>
-                  <a:txBody>
-                    <a:bodyPr wrap="square"/>
-                    <a:lstStyle/>
-                    <a:p>
-                      <a:r>
-                        <a:rPr sz="1100" b="0">
-                          <a:solidFill>
-                            <a:srgbClr val="1A1A1A"/>
-                          </a:solidFill>
-                          <a:latin typeface="DejaVu Sans"/>
-                        </a:rPr>
-                        <a:t>partial: check-verdict heads with agreement metrics on holdouts of 31 to 61 frames; three of four cards do not generalize</a:t>
-                      </a:r>
-                    </a:p>
-                  </a:txBody>
-                  <a:tcPr marL="54864" marR="54864" marT="27432" marB="27432" anchor="t">
-                    <a:solidFill>
-                      <a:srgbClr val="EEF3F9"/>
-                    </a:solidFill>
-                  </a:tcPr>
-                </a:tc>
-              </a:tr>
-              <a:tr h="716280">
-                <a:tc>
-                  <a:txBody>
-                    <a:bodyPr wrap="square"/>
-                    <a:lstStyle/>
-                    <a:p>
-                      <a:r>
-                        <a:rPr sz="1100" b="0">
-                          <a:solidFill>
-                            <a:srgbClr val="1A1A1A"/>
-                          </a:solidFill>
-                          <a:latin typeface="DejaVu Sans"/>
-                        </a:rPr>
-                        <a:t>Level 2, real time on a Pi 5</a:t>
-                      </a:r>
-                    </a:p>
-                  </a:txBody>
-                  <a:tcPr marL="54864" marR="54864" marT="27432" marB="27432" anchor="t">
-                    <a:solidFill>
-                      <a:srgbClr val="FFFFFF"/>
-                    </a:solidFill>
-                  </a:tcPr>
-                </a:tc>
-                <a:tc>
-                  <a:txBody>
-                    <a:bodyPr wrap="square"/>
-                    <a:lstStyle/>
-                    <a:p>
-                      <a:r>
-                        <a:rPr sz="1100" b="0">
-                          <a:solidFill>
-                            <a:srgbClr val="1A1A1A"/>
-                          </a:solidFill>
-                          <a:latin typeface="DejaVu Sans"/>
-                        </a:rPr>
-                        <a:t>under about 300 ms per frame</a:t>
-                      </a:r>
-                    </a:p>
-                  </a:txBody>
-                  <a:tcPr marL="54864" marR="54864" marT="27432" marB="27432" anchor="t">
-                    <a:solidFill>
-                      <a:srgbClr val="FFFFFF"/>
-                    </a:solidFill>
-                  </a:tcPr>
-                </a:tc>
-                <a:tc>
-                  <a:txBody>
-                    <a:bodyPr wrap="square"/>
-                    <a:lstStyle/>
-                    <a:p>
-                      <a:r>
-                        <a:rPr sz="1100" b="0">
-                          <a:solidFill>
-                            <a:srgbClr val="1A1A1A"/>
-                          </a:solidFill>
-                          <a:latin typeface="DejaVu Sans"/>
-                        </a:rPr>
-                        <a:t>not demonstrated: 4 ms per frame on a desktop CPU; the Pi figure is an unmeasured estimate and the arm64 environment lives in draft PR #162</a:t>
-                      </a:r>
-                    </a:p>
-                  </a:txBody>
-                  <a:tcPr marL="54864" marR="54864" marT="27432" marB="27432" anchor="t">
-                    <a:solidFill>
-                      <a:srgbClr val="FFFFFF"/>
-                    </a:solidFill>
-                  </a:tcPr>
-                </a:tc>
-              </a:tr>
-            </a:tbl>
-          </a:graphicData>
-        </a:graphic>
-      </p:graphicFrame>
-      <p:sp>
-        <p:nvSpPr>
-          <p:cNvPr id="4" name="TextBox 3"/>
-          <p:cNvSpPr txBox="1"/>
-          <p:nvPr/>
-        </p:nvSpPr>
-        <p:spPr>
-          <a:xfrm>
-            <a:off x="548640" y="6327648"/>
-            <a:ext cx="9601200" cy="365760"/>
-          </a:xfrm>
-          <a:prstGeom prst="rect">
-            <a:avLst/>
-          </a:prstGeom>
-          <a:noFill/>
-        </p:spPr>
-        <p:txBody>
-          <a:bodyPr wrap="square">
-            <a:spAutoFit/>
-          </a:bodyPr>
-          <a:lstStyle/>
-          <a:p>
-            <a:r>
-              <a:rPr sz="1000" b="0">
-                <a:solidFill>
-                  <a:srgbClr val="6B6B6B"/>
-                </a:solidFill>
-                <a:latin typeface="DejaVu Sans"/>
-              </a:rPr>
-              <a:t>Source: status.md (branch), audit report</a:t>
-            </a:r>
-          </a:p>
-        </p:txBody>
-      </p:sp>
-      <p:sp>
-        <p:nvSpPr>
-          <p:cNvPr id="5" name="TextBox 4"/>
-          <p:cNvSpPr txBox="1"/>
-          <p:nvPr/>
-        </p:nvSpPr>
-        <p:spPr>
-          <a:xfrm>
-            <a:off x="11247120" y="6327648"/>
-            <a:ext cx="548640" cy="365760"/>
-          </a:xfrm>
-          <a:prstGeom prst="rect">
-            <a:avLst/>
-          </a:prstGeom>
-          <a:noFill/>
-        </p:spPr>
-        <p:txBody>
-          <a:bodyPr wrap="square">
-            <a:spAutoFit/>
-          </a:bodyPr>
-          <a:lstStyle/>
-          <a:p>
-            <a:pPr algn="r"/>
-            <a:r>
-              <a:rPr sz="1000" b="0">
-                <a:solidFill>
-                  <a:srgbClr val="6B6B6B"/>
-                </a:solidFill>
-                <a:latin typeface="DejaVu Sans"/>
-              </a:rPr>
-              <a:t>10</a:t>
-            </a:r>
-          </a:p>
-        </p:txBody>
-      </p:sp>
-    </p:spTree>
-  </p:cSld>
-  <p:clrMapOvr>
-    <a:masterClrMapping/>
-  </p:clrMapOvr>
-</p:sld>
-</file>
-
-<file path=ppt/slides/slide11.xml><?xml version="1.0" encoding="utf-8"?>
-<p:sld xmlns:a="http://schemas.openxmlformats.org/drawingml/2006/main" xmlns:p="http://schemas.openxmlformats.org/presentationml/2006/main" xmlns:r="http://schemas.openxmlformats.org/officeDocument/2006/relationships">
-  <p:cSld>
-    <p:spTree>
-      <p:nvGrpSpPr>
-        <p:cNvPr id="1" name=""/>
-        <p:cNvGrpSpPr/>
-        <p:nvPr/>
-      </p:nvGrpSpPr>
-      <p:grpSpPr/>
-      <p:sp>
-        <p:nvSpPr>
-          <p:cNvPr id="2" name="TextBox 1"/>
-          <p:cNvSpPr txBox="1"/>
-          <p:nvPr/>
-        </p:nvSpPr>
-        <p:spPr>
-          <a:xfrm>
-            <a:off x="548640" y="292608"/>
-            <a:ext cx="11064240" cy="822960"/>
-          </a:xfrm>
-          <a:prstGeom prst="rect">
-            <a:avLst/>
-          </a:prstGeom>
-          <a:noFill/>
-        </p:spPr>
-        <p:txBody>
-          <a:bodyPr wrap="square">
-            <a:spAutoFit/>
-          </a:bodyPr>
-          <a:lstStyle/>
-          <a:p>
-            <a:pPr algn="l"/>
-            <a:r>
-              <a:rPr sz="3000" b="1">
-                <a:solidFill>
-                  <a:srgbClr val="1A1A1A"/>
-                </a:solidFill>
-                <a:latin typeface="DejaVu Sans"/>
-              </a:rPr>
-              <a:t>What does not work yet</a:t>
-            </a:r>
-          </a:p>
-        </p:txBody>
-      </p:sp>
-      <p:sp>
-        <p:nvSpPr>
-          <p:cNvPr id="3" name="TextBox 2"/>
-          <p:cNvSpPr txBox="1"/>
-          <p:nvPr/>
-        </p:nvSpPr>
-        <p:spPr>
-          <a:xfrm>
-            <a:off x="640080" y="1234440"/>
-            <a:ext cx="10972800" cy="4754880"/>
-          </a:xfrm>
-          <a:prstGeom prst="rect">
-            <a:avLst/>
-          </a:prstGeom>
-          <a:noFill/>
-        </p:spPr>
-        <p:txBody>
-          <a:bodyPr wrap="square">
-            <a:spAutoFit/>
-          </a:bodyPr>
-          <a:lstStyle/>
-          <a:p>
-            <a:pPr>
-              <a:lnSpc>
-                <a:spcPct val="100000"/>
-              </a:lnSpc>
-              <a:spcAft>
-                <a:spcPts val="1000"/>
-              </a:spcAft>
-            </a:pPr>
-            <a:r>
-              <a:rPr sz="1500" b="0">
-                <a:solidFill>
-                  <a:srgbClr val="1A1A1A"/>
-                </a:solidFill>
-                <a:latin typeface="DejaVu Sans"/>
-              </a:rPr>
-              <a:t>The end-to-end deliverable is missing: no single entry point turns one frame into all the decisions (issue #95 is still open)</a:t>
-            </a:r>
-          </a:p>
-          <a:p>
-            <a:pPr>
-              <a:lnSpc>
-                <a:spcPct val="100000"/>
-              </a:lnSpc>
-              <a:spcAft>
-                <a:spcPts val="1000"/>
-              </a:spcAft>
-            </a:pPr>
-            <a:r>
-              <a:rPr sz="1500" b="0">
-                <a:solidFill>
-                  <a:srgbClr val="1A1A1A"/>
-                </a:solidFill>
-                <a:latin typeface="DejaVu Sans"/>
-              </a:rPr>
-              <a:t>The newest work is not on main: five draft pull requests (#137, #156, #158, #160, #162), 45 commits and 63 files ahead; the fold-segmentation PR has been open since Saturday and calls itself not fit for use</a:t>
-            </a:r>
-          </a:p>
-          <a:p>
-            <a:pPr>
-              <a:lnSpc>
-                <a:spcPct val="100000"/>
-              </a:lnSpc>
-              <a:spcAft>
-                <a:spcPts val="1000"/>
-              </a:spcAft>
-            </a:pPr>
-            <a:r>
-              <a:rPr sz="1500" b="0">
-                <a:solidFill>
-                  <a:srgbClr val="1A1A1A"/>
-                </a:solidFill>
-                <a:latin typeface="DejaVu Sans"/>
-              </a:rPr>
-              <a:t>The models are weak: three of four check heads do not generalize, fold-risk is worse than chance, and no model has been trained on human labels</a:t>
-            </a:r>
-          </a:p>
-          <a:p>
-            <a:pPr>
-              <a:lnSpc>
-                <a:spcPct val="100000"/>
-              </a:lnSpc>
-              <a:spcAft>
-                <a:spcPts val="1000"/>
-              </a:spcAft>
-            </a:pPr>
-            <a:r>
-              <a:rPr sz="1500" b="0">
-                <a:solidFill>
-                  <a:srgbClr val="1A1A1A"/>
-                </a:solidFill>
-                <a:latin typeface="DejaVu Sans"/>
-              </a:rPr>
-              <a:t>Coverage: vision measurements cover 138 of 828 runs, all in October, and 117 of the 148 failed runs have no check data at all</a:t>
-            </a:r>
-          </a:p>
-          <a:p>
-            <a:pPr>
-              <a:lnSpc>
-                <a:spcPct val="100000"/>
-              </a:lnSpc>
-              <a:spcAft>
-                <a:spcPts val="1000"/>
-              </a:spcAft>
-            </a:pPr>
-            <a:r>
-              <a:rPr sz="1500" b="0">
-                <a:solidFill>
-                  <a:srgbClr val="1A1A1A"/>
-                </a:solidFill>
-                <a:latin typeface="DejaVu Sans"/>
-              </a:rPr>
-              <a:t>The material-mask model does not exist; the deviation pipeline has only ever run on stand-in masks</a:t>
-            </a:r>
-          </a:p>
-          <a:p>
-            <a:pPr>
-              <a:lnSpc>
-                <a:spcPct val="100000"/>
-              </a:lnSpc>
-              <a:spcAft>
-                <a:spcPts val="1000"/>
-              </a:spcAft>
-            </a:pPr>
-            <a:r>
-              <a:rPr sz="1500" b="0">
-                <a:solidFill>
-                  <a:srgbClr val="1A1A1A"/>
-                </a:solidFill>
-                <a:latin typeface="DejaVu Sans"/>
-              </a:rPr>
-              <a:t>A fresh clone reproduces the code and the offline tests, not the numbers: the machine data is private</a:t>
-            </a:r>
-          </a:p>
-        </p:txBody>
-      </p:sp>
-      <p:sp>
-        <p:nvSpPr>
-          <p:cNvPr id="4" name="TextBox 3"/>
-          <p:cNvSpPr txBox="1"/>
-          <p:nvPr/>
-        </p:nvSpPr>
-        <p:spPr>
-          <a:xfrm>
-            <a:off x="548640" y="6327648"/>
-            <a:ext cx="9601200" cy="365760"/>
-          </a:xfrm>
-          <a:prstGeom prst="rect">
-            <a:avLst/>
-          </a:prstGeom>
-          <a:noFill/>
-        </p:spPr>
-        <p:txBody>
-          <a:bodyPr wrap="square">
-            <a:spAutoFit/>
-          </a:bodyPr>
-          <a:lstStyle/>
-          <a:p>
-            <a:r>
-              <a:rPr sz="1000" b="0">
-                <a:solidFill>
-                  <a:srgbClr val="6B6B6B"/>
-                </a:solidFill>
-                <a:latin typeface="DejaVu Sans"/>
-              </a:rPr>
-              <a:t>Source: audit report, status.md</a:t>
-            </a:r>
-          </a:p>
-        </p:txBody>
-      </p:sp>
-      <p:sp>
-        <p:nvSpPr>
-          <p:cNvPr id="5" name="TextBox 4"/>
-          <p:cNvSpPr txBox="1"/>
-          <p:nvPr/>
-        </p:nvSpPr>
-        <p:spPr>
-          <a:xfrm>
-            <a:off x="11247120" y="6327648"/>
-            <a:ext cx="548640" cy="365760"/>
-          </a:xfrm>
-          <a:prstGeom prst="rect">
-            <a:avLst/>
-          </a:prstGeom>
-          <a:noFill/>
-        </p:spPr>
-        <p:txBody>
-          <a:bodyPr wrap="square">
-            <a:spAutoFit/>
-          </a:bodyPr>
-          <a:lstStyle/>
-          <a:p>
-            <a:pPr algn="r"/>
-            <a:r>
-              <a:rPr sz="1000" b="0">
-                <a:solidFill>
-                  <a:srgbClr val="6B6B6B"/>
-                </a:solidFill>
-                <a:latin typeface="DejaVu Sans"/>
-              </a:rPr>
-              <a:t>11</a:t>
-            </a:r>
-          </a:p>
-        </p:txBody>
-      </p:sp>
-    </p:spTree>
-  </p:cSld>
-  <p:clrMapOvr>
-    <a:masterClrMapping/>
-  </p:clrMapOvr>
-</p:sld>
-</file>
-
-<file path=ppt/slides/slide12.xml><?xml version="1.0" encoding="utf-8"?>
-<p:sld xmlns:a="http://schemas.openxmlformats.org/drawingml/2006/main" xmlns:p="http://schemas.openxmlformats.org/presentationml/2006/main" xmlns:r="http://schemas.openxmlformats.org/officeDocument/2006/relationships">
-  <p:cSld>
-    <p:spTree>
-      <p:nvGrpSpPr>
-        <p:cNvPr id="1" name=""/>
-        <p:cNvGrpSpPr/>
-        <p:nvPr/>
-      </p:nvGrpSpPr>
-      <p:grpSpPr/>
-      <p:sp>
-        <p:nvSpPr>
-          <p:cNvPr id="2" name="TextBox 1"/>
-          <p:cNvSpPr txBox="1"/>
-          <p:nvPr/>
-        </p:nvSpPr>
-        <p:spPr>
-          <a:xfrm>
-            <a:off x="548640" y="292608"/>
-            <a:ext cx="11064240" cy="822960"/>
-          </a:xfrm>
-          <a:prstGeom prst="rect">
-            <a:avLst/>
-          </a:prstGeom>
-          <a:noFill/>
-        </p:spPr>
-        <p:txBody>
-          <a:bodyPr wrap="square">
-            <a:spAutoFit/>
-          </a:bodyPr>
-          <a:lstStyle/>
-          <a:p>
-            <a:pPr algn="l"/>
-            <a:r>
-              <a:rPr sz="3000" b="1">
-                <a:solidFill>
-                  <a:srgbClr val="1A1A1A"/>
-                </a:solidFill>
-                <a:latin typeface="DejaVu Sans"/>
-              </a:rPr>
-              <a:t>What would change the answer</a:t>
-            </a:r>
-          </a:p>
-        </p:txBody>
-      </p:sp>
-      <p:sp>
-        <p:nvSpPr>
-          <p:cNvPr id="3" name="TextBox 2"/>
-          <p:cNvSpPr txBox="1"/>
-          <p:nvPr/>
-        </p:nvSpPr>
-        <p:spPr>
-          <a:xfrm>
-            <a:off x="640080" y="1234440"/>
-            <a:ext cx="10972800" cy="4754880"/>
-          </a:xfrm>
-          <a:prstGeom prst="rect">
-            <a:avLst/>
-          </a:prstGeom>
-          <a:noFill/>
-        </p:spPr>
-        <p:txBody>
-          <a:bodyPr wrap="square">
-            <a:spAutoFit/>
-          </a:bodyPr>
-          <a:lstStyle/>
-          <a:p>
-            <a:pPr>
-              <a:lnSpc>
-                <a:spcPct val="100000"/>
-              </a:lnSpc>
-              <a:spcAft>
-                <a:spcPts val="1000"/>
-              </a:spcAft>
-            </a:pPr>
-            <a:r>
-              <a:rPr sz="1500" b="0">
-                <a:solidFill>
-                  <a:srgbClr val="1A1A1A"/>
-                </a:solidFill>
-                <a:latin typeface="DejaVu Sans"/>
-              </a:rPr>
-              <a:t>More check records: 117 of the 148 failed runs have none, so why runs fail is unanswerable from this export for about 79 percent of them</a:t>
-            </a:r>
-          </a:p>
-          <a:p>
-            <a:pPr>
-              <a:lnSpc>
-                <a:spcPct val="100000"/>
-              </a:lnSpc>
-              <a:spcAft>
-                <a:spcPts val="1000"/>
-              </a:spcAft>
-            </a:pPr>
-            <a:r>
-              <a:rPr sz="1500" b="0">
-                <a:solidFill>
-                  <a:srgbClr val="1A1A1A"/>
-                </a:solidFill>
-                <a:latin typeface="DejaVu Sans"/>
-              </a:rPr>
-              <a:t>More runs per robot, interleaved in time: about 140 to 150 would separate robot from era, which today coincide</a:t>
-            </a:r>
-          </a:p>
-          <a:p>
-            <a:pPr>
-              <a:lnSpc>
-                <a:spcPct val="100000"/>
-              </a:lnSpc>
-              <a:spcAft>
-                <a:spcPts val="1000"/>
-              </a:spcAft>
-            </a:pPr>
-            <a:r>
-              <a:rPr sz="1500" b="0">
-                <a:solidFill>
-                  <a:srgbClr val="1A1A1A"/>
-                </a:solidFill>
-                <a:latin typeface="DejaVu Sans"/>
-              </a:rPr>
-              <a:t>A held-out evaluation on human labels: every current metric is agreement with the robot, not with reality</a:t>
-            </a:r>
-          </a:p>
-          <a:p>
-            <a:pPr>
-              <a:lnSpc>
-                <a:spcPct val="100000"/>
-              </a:lnSpc>
-              <a:spcAft>
-                <a:spcPts val="1000"/>
-              </a:spcAft>
-            </a:pPr>
-            <a:r>
-              <a:rPr sz="1500" b="0">
-                <a:solidFill>
-                  <a:srgbClr val="1A1A1A"/>
-                </a:solidFill>
-                <a:latin typeface="DejaVu Sans"/>
-              </a:rPr>
-              <a:t>A reviewed mask export plus a material-mask model, so the deviation pipeline sees a real prediction against a real mask</a:t>
-            </a:r>
-          </a:p>
-          <a:p>
-            <a:pPr>
-              <a:lnSpc>
-                <a:spcPct val="100000"/>
-              </a:lnSpc>
-              <a:spcAft>
-                <a:spcPts val="1000"/>
-              </a:spcAft>
-            </a:pPr>
-            <a:r>
-              <a:rPr sz="1500" b="0">
-                <a:solidFill>
-                  <a:srgbClr val="1A1A1A"/>
-                </a:solidFill>
-                <a:latin typeface="DejaVu Sans"/>
-              </a:rPr>
-              <a:t>Real Raspberry Pi 5 timing: 4 ms is a desktop number, and the Level 2 claim needs a measured board</a:t>
-            </a:r>
-          </a:p>
-          <a:p>
-            <a:pPr>
-              <a:lnSpc>
-                <a:spcPct val="100000"/>
-              </a:lnSpc>
-              <a:spcAft>
-                <a:spcPts val="1000"/>
-              </a:spcAft>
-            </a:pPr>
-            <a:r>
-              <a:rPr sz="1500" b="0">
-                <a:solidFill>
-                  <a:srgbClr val="1A1A1A"/>
-                </a:solidFill>
-                <a:latin typeface="DejaVu Sans"/>
-              </a:rPr>
-              <a:t>A designed batch, not more history: 19 runs varying six settings independently, run sheet ready for Maus</a:t>
-            </a:r>
-          </a:p>
-        </p:txBody>
-      </p:sp>
-      <p:sp>
-        <p:nvSpPr>
-          <p:cNvPr id="4" name="TextBox 3"/>
-          <p:cNvSpPr txBox="1"/>
-          <p:nvPr/>
-        </p:nvSpPr>
-        <p:spPr>
-          <a:xfrm>
-            <a:off x="548640" y="6327648"/>
-            <a:ext cx="9601200" cy="365760"/>
-          </a:xfrm>
-          <a:prstGeom prst="rect">
-            <a:avLst/>
-          </a:prstGeom>
-          <a:noFill/>
-        </p:spPr>
-        <p:txBody>
-          <a:bodyPr wrap="square">
-            <a:spAutoFit/>
-          </a:bodyPr>
-          <a:lstStyle/>
-          <a:p>
-            <a:r>
-              <a:rPr sz="1000" b="0">
-                <a:solidFill>
-                  <a:srgbClr val="6B6B6B"/>
-                </a:solidFill>
-                <a:latin typeface="DejaVu Sans"/>
-              </a:rPr>
-              <a:t>Source: fold-risk.md, doe.md, audit report</a:t>
-            </a:r>
-          </a:p>
-        </p:txBody>
-      </p:sp>
-      <p:sp>
-        <p:nvSpPr>
-          <p:cNvPr id="5" name="TextBox 4"/>
-          <p:cNvSpPr txBox="1"/>
-          <p:nvPr/>
-        </p:nvSpPr>
-        <p:spPr>
-          <a:xfrm>
-            <a:off x="11247120" y="6327648"/>
-            <a:ext cx="548640" cy="365760"/>
-          </a:xfrm>
-          <a:prstGeom prst="rect">
-            <a:avLst/>
-          </a:prstGeom>
-          <a:noFill/>
-        </p:spPr>
-        <p:txBody>
-          <a:bodyPr wrap="square">
-            <a:spAutoFit/>
-          </a:bodyPr>
-          <a:lstStyle/>
-          <a:p>
-            <a:pPr algn="r"/>
-            <a:r>
-              <a:rPr sz="1000" b="0">
-                <a:solidFill>
-                  <a:srgbClr val="6B6B6B"/>
-                </a:solidFill>
-                <a:latin typeface="DejaVu Sans"/>
-              </a:rPr>
-              <a:t>12</a:t>
-            </a:r>
-          </a:p>
-        </p:txBody>
-      </p:sp>
-    </p:spTree>
-  </p:cSld>
-  <p:clrMapOvr>
-    <a:masterClrMapping/>
-  </p:clrMapOvr>
-</p:sld>
-</file>
-
-<file path=ppt/slides/slide13.xml><?xml version="1.0" encoding="utf-8"?>
-<p:sld xmlns:a="http://schemas.openxmlformats.org/drawingml/2006/main" xmlns:p="http://schemas.openxmlformats.org/presentationml/2006/main" xmlns:r="http://schemas.openxmlformats.org/officeDocument/2006/relationships">
-  <p:cSld>
-    <p:spTree>
-      <p:nvGrpSpPr>
-        <p:cNvPr id="1" name=""/>
-        <p:cNvGrpSpPr/>
-        <p:nvPr/>
-      </p:nvGrpSpPr>
-      <p:grpSpPr/>
-      <p:sp>
-        <p:nvSpPr>
-          <p:cNvPr id="2" name="TextBox 1"/>
-          <p:cNvSpPr txBox="1"/>
-          <p:nvPr/>
-        </p:nvSpPr>
-        <p:spPr>
-          <a:xfrm>
-            <a:off x="548640" y="292608"/>
-            <a:ext cx="11064240" cy="822960"/>
-          </a:xfrm>
-          <a:prstGeom prst="rect">
-            <a:avLst/>
-          </a:prstGeom>
-          <a:noFill/>
-        </p:spPr>
-        <p:txBody>
-          <a:bodyPr wrap="square">
-            <a:spAutoFit/>
-          </a:bodyPr>
-          <a:lstStyle/>
-          <a:p>
-            <a:pPr algn="l"/>
-            <a:r>
-              <a:rPr sz="3000" b="1">
-                <a:solidFill>
-                  <a:srgbClr val="1A1A1A"/>
-                </a:solidFill>
-                <a:latin typeface="DejaVu Sans"/>
-              </a:rPr>
-              <a:t>Check it yourself in a minute</a:t>
-            </a:r>
-          </a:p>
-        </p:txBody>
-      </p:sp>
-      <p:sp>
-        <p:nvSpPr>
-          <p:cNvPr id="3" name="TextBox 2"/>
-          <p:cNvSpPr txBox="1"/>
-          <p:nvPr/>
-        </p:nvSpPr>
-        <p:spPr>
-          <a:xfrm>
-            <a:off x="640080" y="1234440"/>
-            <a:ext cx="10972800" cy="4754880"/>
-          </a:xfrm>
-          <a:prstGeom prst="rect">
-            <a:avLst/>
-          </a:prstGeom>
-          <a:noFill/>
-        </p:spPr>
-        <p:txBody>
-          <a:bodyPr wrap="square">
-            <a:spAutoFit/>
-          </a:bodyPr>
-          <a:lstStyle/>
-          <a:p>
-            <a:pPr>
-              <a:lnSpc>
-                <a:spcPct val="100000"/>
-              </a:lnSpc>
-              <a:spcAft>
-                <a:spcPts val="1000"/>
-              </a:spcAft>
-            </a:pPr>
-            <a:r>
-              <a:rPr sz="1500" b="0">
-                <a:solidFill>
-                  <a:srgbClr val="1A1A1A"/>
-                </a:solidFill>
-                <a:latin typeface="DejaVu Sans"/>
-              </a:rPr>
-              <a:t>Repo: github.com/leonardoAB1/maus-crepe-insights (public; the Maus run data is private and stays out of Git)</a:t>
-            </a:r>
-          </a:p>
-          <a:p>
-            <a:pPr>
-              <a:lnSpc>
-                <a:spcPct val="100000"/>
-              </a:lnSpc>
-              <a:spcAft>
-                <a:spcPts val="1000"/>
-              </a:spcAft>
-            </a:pPr>
-            <a:r>
-              <a:rPr sz="1500" b="0">
-                <a:solidFill>
-                  <a:srgbClr val="1A1A1A"/>
-                </a:solidFill>
-                <a:latin typeface="DejaVu Sans"/>
-              </a:rPr>
-              <a:t>Offline check, no data needed: cd code &amp;&amp; pixi install &amp;&amp; pixi run test &amp;&amp; pixi run lint</a:t>
-            </a:r>
-          </a:p>
-          <a:p>
-            <a:pPr>
-              <a:lnSpc>
-                <a:spcPct val="100000"/>
-              </a:lnSpc>
-              <a:spcAft>
-                <a:spcPts val="1000"/>
-              </a:spcAft>
-            </a:pPr>
-            <a:r>
-              <a:rPr sz="1500" b="0">
-                <a:solidFill>
-                  <a:srgbClr val="1A1A1A"/>
-                </a:solidFill>
-                <a:latin typeface="DejaVu Sans"/>
-              </a:rPr>
-              <a:t>The suite runs in about four minutes: 625 passed, 66 skipped, exit 0</a:t>
-            </a:r>
-          </a:p>
-          <a:p>
-            <a:pPr>
-              <a:lnSpc>
-                <a:spcPct val="100000"/>
-              </a:lnSpc>
-              <a:spcAft>
-                <a:spcPts val="1000"/>
-              </a:spcAft>
-            </a:pPr>
-            <a:r>
-              <a:rPr sz="1500" b="0">
-                <a:solidFill>
-                  <a:srgbClr val="1A1A1A"/>
-                </a:solidFill>
-                <a:latin typeface="DejaVu Sans"/>
-              </a:rPr>
-              <a:t>Model cards with holdouts, per-robot and leave-one-robot-out checks, and explicit generalization verdicts: code/models/</a:t>
-            </a:r>
-          </a:p>
-          <a:p>
-            <a:pPr>
-              <a:lnSpc>
-                <a:spcPct val="100000"/>
-              </a:lnSpc>
-              <a:spcAft>
-                <a:spcPts val="1000"/>
-              </a:spcAft>
-            </a:pPr>
-            <a:r>
-              <a:rPr sz="1500" b="0">
-                <a:solidFill>
-                  <a:srgbClr val="1A1A1A"/>
-                </a:solidFill>
-                <a:latin typeface="DejaVu Sans"/>
-              </a:rPr>
-              <a:t>Status page, every number with its source: documentation/status.md</a:t>
-            </a:r>
-          </a:p>
-          <a:p>
-            <a:pPr>
-              <a:lnSpc>
-                <a:spcPct val="100000"/>
-              </a:lnSpc>
-              <a:spcAft>
-                <a:spcPts val="1000"/>
-              </a:spcAft>
-            </a:pPr>
-            <a:r>
-              <a:rPr sz="1500" b="0">
-                <a:solidFill>
-                  <a:srgbClr val="1A1A1A"/>
-                </a:solidFill>
-                <a:latin typeface="DejaVu Sans"/>
-              </a:rPr>
-              <a:t>Licence: PolyForm Noncommercial 1.0.0</a:t>
-            </a:r>
-          </a:p>
-        </p:txBody>
-      </p:sp>
-      <p:sp>
-        <p:nvSpPr>
-          <p:cNvPr id="4" name="TextBox 3"/>
-          <p:cNvSpPr txBox="1"/>
-          <p:nvPr/>
-        </p:nvSpPr>
-        <p:spPr>
-          <a:xfrm>
-            <a:off x="548640" y="6327648"/>
-            <a:ext cx="9601200" cy="365760"/>
-          </a:xfrm>
-          <a:prstGeom prst="rect">
-            <a:avLst/>
-          </a:prstGeom>
-          <a:noFill/>
-        </p:spPr>
-        <p:txBody>
-          <a:bodyPr wrap="square">
-            <a:spAutoFit/>
-          </a:bodyPr>
-          <a:lstStyle/>
-          <a:p>
-            <a:r>
-              <a:rPr sz="1000" b="0">
-                <a:solidFill>
-                  <a:srgbClr val="6B6B6B"/>
-                </a:solidFill>
-                <a:latin typeface="DejaVu Sans"/>
-              </a:rPr>
-              <a:t>Sourced in the repository</a:t>
-            </a:r>
-          </a:p>
-        </p:txBody>
-      </p:sp>
-      <p:sp>
-        <p:nvSpPr>
-          <p:cNvPr id="5" name="TextBox 4"/>
-          <p:cNvSpPr txBox="1"/>
-          <p:nvPr/>
-        </p:nvSpPr>
-        <p:spPr>
-          <a:xfrm>
-            <a:off x="11247120" y="6327648"/>
-            <a:ext cx="548640" cy="365760"/>
-          </a:xfrm>
-          <a:prstGeom prst="rect">
-            <a:avLst/>
-          </a:prstGeom>
-          <a:noFill/>
-        </p:spPr>
-        <p:txBody>
-          <a:bodyPr wrap="square">
-            <a:spAutoFit/>
-          </a:bodyPr>
-          <a:lstStyle/>
-          <a:p>
-            <a:pPr algn="r"/>
-            <a:r>
-              <a:rPr sz="1000" b="0">
-                <a:solidFill>
-                  <a:srgbClr val="6B6B6B"/>
-                </a:solidFill>
-                <a:latin typeface="DejaVu Sans"/>
-              </a:rPr>
-              <a:t>13</a:t>
-            </a:r>
-          </a:p>
-        </p:txBody>
-      </p:sp>
-    </p:spTree>
-  </p:cSld>
-  <p:clrMapOvr>
-    <a:masterClrMapping/>
-  </p:clrMapOvr>
-</p:sld>
-</file>
-
-<file path=ppt/slides/slide14.xml><?xml version="1.0" encoding="utf-8"?>
-<p:sld xmlns:a="http://schemas.openxmlformats.org/drawingml/2006/main" xmlns:p="http://schemas.openxmlformats.org/presentationml/2006/main" xmlns:r="http://schemas.openxmlformats.org/officeDocument/2006/relationships">
-  <p:cSld>
-    <p:spTree>
-      <p:nvGrpSpPr>
-        <p:cNvPr id="1" name=""/>
-        <p:cNvGrpSpPr/>
-        <p:nvPr/>
-      </p:nvGrpSpPr>
-      <p:grpSpPr/>
-      <p:sp>
-        <p:nvSpPr>
-          <p:cNvPr id="2" name="TextBox 1"/>
-          <p:cNvSpPr txBox="1"/>
-          <p:nvPr/>
-        </p:nvSpPr>
-        <p:spPr>
-          <a:xfrm>
-            <a:off x="548640" y="292608"/>
-            <a:ext cx="11064240" cy="822960"/>
-          </a:xfrm>
-          <a:prstGeom prst="rect">
-            <a:avLst/>
-          </a:prstGeom>
-          <a:noFill/>
-        </p:spPr>
-        <p:txBody>
-          <a:bodyPr wrap="square">
-            <a:spAutoFit/>
-          </a:bodyPr>
-          <a:lstStyle/>
-          <a:p>
-            <a:pPr algn="l"/>
-            <a:r>
-              <a:rPr sz="3000" b="1">
-                <a:solidFill>
-                  <a:srgbClr val="1A1A1A"/>
-                </a:solidFill>
-                <a:latin typeface="DejaVu Sans"/>
-              </a:rPr>
-              <a:t>Where to look</a:t>
-            </a:r>
-          </a:p>
-        </p:txBody>
-      </p:sp>
-      <p:sp>
-        <p:nvSpPr>
-          <p:cNvPr id="3" name="TextBox 2"/>
-          <p:cNvSpPr txBox="1"/>
-          <p:nvPr/>
-        </p:nvSpPr>
-        <p:spPr>
-          <a:xfrm>
-            <a:off x="640080" y="1234440"/>
-            <a:ext cx="10972800" cy="4754880"/>
-          </a:xfrm>
-          <a:prstGeom prst="rect">
-            <a:avLst/>
-          </a:prstGeom>
-          <a:noFill/>
-        </p:spPr>
-        <p:txBody>
-          <a:bodyPr wrap="square">
-            <a:spAutoFit/>
-          </a:bodyPr>
-          <a:lstStyle/>
-          <a:p>
-            <a:pPr>
-              <a:lnSpc>
-                <a:spcPct val="100000"/>
-              </a:lnSpc>
-              <a:spcAft>
-                <a:spcPts val="1000"/>
-              </a:spcAft>
-            </a:pPr>
-            <a:r>
-              <a:rPr sz="1500" b="0">
-                <a:solidFill>
-                  <a:srgbClr val="1A1A1A"/>
-                </a:solidFill>
-                <a:latin typeface="DejaVu Sans"/>
-              </a:rPr>
-              <a:t>documentation/status.md: what works and what does not, every number with its source</a:t>
-            </a:r>
-          </a:p>
-          <a:p>
-            <a:pPr>
-              <a:lnSpc>
-                <a:spcPct val="100000"/>
-              </a:lnSpc>
-              <a:spcAft>
-                <a:spcPts val="1000"/>
-              </a:spcAft>
-            </a:pPr>
-            <a:r>
-              <a:rPr sz="1500" b="0">
-                <a:solidFill>
-                  <a:srgbClr val="1A1A1A"/>
-                </a:solidFill>
-                <a:latin typeface="DejaVu Sans"/>
-              </a:rPr>
-              <a:t>code/models/: model cards with holdout metrics and explicit generalization verdicts</a:t>
-            </a:r>
-          </a:p>
-          <a:p>
-            <a:pPr>
-              <a:lnSpc>
-                <a:spcPct val="100000"/>
-              </a:lnSpc>
-              <a:spcAft>
-                <a:spcPts val="1000"/>
-              </a:spcAft>
-            </a:pPr>
-            <a:r>
-              <a:rPr sz="1500" b="0">
-                <a:solidFill>
-                  <a:srgbClr val="1A1A1A"/>
-                </a:solidFill>
-                <a:latin typeface="DejaVu Sans"/>
-              </a:rPr>
-              <a:t>documentation/system/crepe-stages.md: the robot's stages, and where runs fail</a:t>
-            </a:r>
-          </a:p>
-          <a:p>
-            <a:pPr>
-              <a:lnSpc>
-                <a:spcPct val="100000"/>
-              </a:lnSpc>
-              <a:spcAft>
-                <a:spcPts val="1000"/>
-              </a:spcAft>
-            </a:pPr>
-            <a:r>
-              <a:rPr sz="1500" b="0">
-                <a:solidFill>
-                  <a:srgbClr val="1A1A1A"/>
-                </a:solidFill>
-                <a:latin typeface="DejaVu Sans"/>
-              </a:rPr>
-              <a:t>documentation/data/pipeline.md: dashboard to MCAP to tables, and the vision score columns</a:t>
-            </a:r>
-          </a:p>
-          <a:p>
-            <a:pPr>
-              <a:lnSpc>
-                <a:spcPct val="100000"/>
-              </a:lnSpc>
-              <a:spcAft>
-                <a:spcPts val="1000"/>
-              </a:spcAft>
-            </a:pPr>
-            <a:r>
-              <a:rPr sz="1500" b="0">
-                <a:solidFill>
-                  <a:srgbClr val="1A1A1A"/>
-                </a:solidFill>
-                <a:latin typeface="DejaVu Sans"/>
-              </a:rPr>
-              <a:t>Take away: an honest, documented pipeline with real measurements; the models are experiments, and the next runs are the fix</a:t>
-            </a:r>
-          </a:p>
-        </p:txBody>
-      </p:sp>
-      <p:sp>
-        <p:nvSpPr>
-          <p:cNvPr id="4" name="TextBox 3"/>
-          <p:cNvSpPr txBox="1"/>
-          <p:nvPr/>
-        </p:nvSpPr>
-        <p:spPr>
-          <a:xfrm>
-            <a:off x="548640" y="6327648"/>
-            <a:ext cx="9601200" cy="365760"/>
-          </a:xfrm>
-          <a:prstGeom prst="rect">
-            <a:avLst/>
-          </a:prstGeom>
-          <a:noFill/>
-        </p:spPr>
-        <p:txBody>
-          <a:bodyPr wrap="square">
-            <a:spAutoFit/>
-          </a:bodyPr>
-          <a:lstStyle/>
-          <a:p>
-            <a:r>
-              <a:rPr sz="1000" b="0">
-                <a:solidFill>
-                  <a:srgbClr val="6B6B6B"/>
-                </a:solidFill>
-                <a:latin typeface="DejaVu Sans"/>
-              </a:rPr>
-              <a:t>CrepeFlow, BaselHack 2026</a:t>
-            </a:r>
-          </a:p>
-        </p:txBody>
-      </p:sp>
-      <p:sp>
-        <p:nvSpPr>
-          <p:cNvPr id="5" name="TextBox 4"/>
-          <p:cNvSpPr txBox="1"/>
-          <p:nvPr/>
-        </p:nvSpPr>
-        <p:spPr>
-          <a:xfrm>
-            <a:off x="11247120" y="6327648"/>
-            <a:ext cx="548640" cy="365760"/>
-          </a:xfrm>
-          <a:prstGeom prst="rect">
-            <a:avLst/>
-          </a:prstGeom>
-          <a:noFill/>
-        </p:spPr>
-        <p:txBody>
-          <a:bodyPr wrap="square">
-            <a:spAutoFit/>
-          </a:bodyPr>
-          <a:lstStyle/>
-          <a:p>
-            <a:pPr algn="r"/>
-            <a:r>
-              <a:rPr sz="1000" b="0">
-                <a:solidFill>
-                  <a:srgbClr val="6B6B6B"/>
-                </a:solidFill>
-                <a:latin typeface="DejaVu Sans"/>
-              </a:rPr>
-              <a:t>14</a:t>
+              <a:t>A data-to-insight toolkit for the Maus Robotics challenge</a:t>
             </a:r>
           </a:p>
         </p:txBody>
@@ -6122,6 +3774,14 @@
 <file path=ppt/slides/slide2.xml><?xml version="1.0" encoding="utf-8"?>
 <p:sld xmlns:a="http://schemas.openxmlformats.org/drawingml/2006/main" xmlns:p="http://schemas.openxmlformats.org/presentationml/2006/main" xmlns:r="http://schemas.openxmlformats.org/officeDocument/2006/relationships">
   <p:cSld>
+    <p:bg>
+      <p:bgPr>
+        <a:solidFill>
+          <a:srgbClr val="FFF6EC"/>
+        </a:solidFill>
+        <a:effectLst/>
+      </p:bgPr>
+    </p:bg>
     <p:spTree>
       <p:nvGrpSpPr>
         <p:cNvPr id="1" name=""/>
@@ -6155,25 +3815,381 @@
             <a:r>
               <a:rPr sz="3000" b="1">
                 <a:solidFill>
-                  <a:srgbClr val="1A1A1A"/>
+                  <a:srgbClr val="4A3226"/>
                 </a:solidFill>
                 <a:latin typeface="DejaVu Sans"/>
               </a:rPr>
-              <a:t>The problem, and what Maus asked for</a:t>
-            </a:r>
-          </a:p>
-        </p:txBody>
-      </p:sp>
-      <p:sp>
-        <p:nvSpPr>
-          <p:cNvPr id="3" name="TextBox 2"/>
+              <a:t>One run. A richer view.</a:t>
+            </a:r>
+          </a:p>
+        </p:txBody>
+      </p:sp>
+      <p:sp>
+        <p:nvSpPr>
+          <p:cNvPr id="3" name="Rounded Rectangle 2"/>
+          <p:cNvSpPr/>
+          <p:nvPr/>
+        </p:nvSpPr>
+        <p:spPr>
+          <a:xfrm>
+            <a:off x="365760" y="1325880"/>
+            <a:ext cx="2658618" cy="2286000"/>
+          </a:xfrm>
+          <a:prstGeom prst="roundRect">
+            <a:avLst>
+              <a:gd name="adj" fmla="val 12000"/>
+            </a:avLst>
+          </a:prstGeom>
+          <a:solidFill>
+            <a:srgbClr val="E8A87C"/>
+          </a:solidFill>
+          <a:ln w="15875">
+            <a:solidFill>
+              <a:srgbClr val="E8A87C"/>
+            </a:solidFill>
+          </a:ln>
+          <a:effectLst/>
+        </p:spPr>
+        <p:style>
+          <a:lnRef idx="1">
+            <a:schemeClr val="accent1"/>
+          </a:lnRef>
+          <a:fillRef idx="3">
+            <a:schemeClr val="accent1"/>
+          </a:fillRef>
+          <a:effectRef idx="2">
+            <a:schemeClr val="accent1"/>
+          </a:effectRef>
+          <a:fontRef idx="minor">
+            <a:schemeClr val="lt1"/>
+          </a:fontRef>
+        </p:style>
+        <p:txBody>
+          <a:bodyPr rtlCol="0" anchor="ctr" wrap="square" lIns="164592" rIns="164592" tIns="219456" bIns="146304"/>
+          <a:lstStyle/>
+          <a:p>
+            <a:pPr algn="l"/>
+            <a:r>
+              <a:rPr sz="4000" b="1">
+                <a:solidFill>
+                  <a:srgbClr val="4A3226"/>
+                </a:solidFill>
+                <a:latin typeface="DejaVu Sans"/>
+              </a:rPr>
+              <a:t>828</a:t>
+            </a:r>
+          </a:p>
+          <a:p>
+            <a:pPr algn="l">
+              <a:spcBef>
+                <a:spcPts val="400"/>
+              </a:spcBef>
+            </a:pPr>
+            <a:r>
+              <a:rPr sz="1500" b="1">
+                <a:solidFill>
+                  <a:srgbClr val="4A3226"/>
+                </a:solidFill>
+                <a:latin typeface="DejaVu Sans"/>
+              </a:rPr>
+              <a:t>run records</a:t>
+            </a:r>
+          </a:p>
+          <a:p>
+            <a:pPr algn="l">
+              <a:spcBef>
+                <a:spcPts val="600"/>
+              </a:spcBef>
+            </a:pPr>
+            <a:r>
+              <a:rPr sz="1100" b="0">
+                <a:solidFill>
+                  <a:srgbClr val="4A3226"/>
+                </a:solidFill>
+                <a:latin typeface="DejaVu Sans"/>
+              </a:rPr>
+              <a:t>JSON export + ROS 2 MCAP</a:t>
+            </a:r>
+          </a:p>
+        </p:txBody>
+      </p:sp>
+      <p:sp>
+        <p:nvSpPr>
+          <p:cNvPr id="4" name="Rounded Rectangle 3"/>
+          <p:cNvSpPr/>
+          <p:nvPr/>
+        </p:nvSpPr>
+        <p:spPr>
+          <a:xfrm>
+            <a:off x="3298698" y="1325880"/>
+            <a:ext cx="2658618" cy="2286000"/>
+          </a:xfrm>
+          <a:prstGeom prst="roundRect">
+            <a:avLst>
+              <a:gd name="adj" fmla="val 12000"/>
+            </a:avLst>
+          </a:prstGeom>
+          <a:solidFill>
+            <a:srgbClr val="F28B9B"/>
+          </a:solidFill>
+          <a:ln w="15875">
+            <a:solidFill>
+              <a:srgbClr val="E8A87C"/>
+            </a:solidFill>
+          </a:ln>
+          <a:effectLst/>
+        </p:spPr>
+        <p:style>
+          <a:lnRef idx="1">
+            <a:schemeClr val="accent1"/>
+          </a:lnRef>
+          <a:fillRef idx="3">
+            <a:schemeClr val="accent1"/>
+          </a:fillRef>
+          <a:effectRef idx="2">
+            <a:schemeClr val="accent1"/>
+          </a:effectRef>
+          <a:fontRef idx="minor">
+            <a:schemeClr val="lt1"/>
+          </a:fontRef>
+        </p:style>
+        <p:txBody>
+          <a:bodyPr rtlCol="0" anchor="ctr" wrap="square" lIns="164592" rIns="164592" tIns="219456" bIns="146304"/>
+          <a:lstStyle/>
+          <a:p>
+            <a:pPr algn="l"/>
+            <a:r>
+              <a:rPr sz="4000" b="1">
+                <a:solidFill>
+                  <a:srgbClr val="4A3226"/>
+                </a:solidFill>
+                <a:latin typeface="DejaVu Sans"/>
+              </a:rPr>
+              <a:t>177</a:t>
+            </a:r>
+          </a:p>
+          <a:p>
+            <a:pPr algn="l">
+              <a:spcBef>
+                <a:spcPts val="400"/>
+              </a:spcBef>
+            </a:pPr>
+            <a:r>
+              <a:rPr sz="1500" b="1">
+                <a:solidFill>
+                  <a:srgbClr val="4A3226"/>
+                </a:solidFill>
+                <a:latin typeface="DejaVu Sans"/>
+              </a:rPr>
+              <a:t>fields per run</a:t>
+            </a:r>
+          </a:p>
+          <a:p>
+            <a:pPr algn="l">
+              <a:spcBef>
+                <a:spcPts val="600"/>
+              </a:spcBef>
+            </a:pPr>
+            <a:r>
+              <a:rPr sz="1100" b="0">
+                <a:solidFill>
+                  <a:srgbClr val="4A3226"/>
+                </a:solidFill>
+                <a:latin typeface="DejaVu Sans"/>
+              </a:rPr>
+              <a:t>one analysis table</a:t>
+            </a:r>
+          </a:p>
+        </p:txBody>
+      </p:sp>
+      <p:sp>
+        <p:nvSpPr>
+          <p:cNvPr id="5" name="Rounded Rectangle 4"/>
+          <p:cNvSpPr/>
+          <p:nvPr/>
+        </p:nvSpPr>
+        <p:spPr>
+          <a:xfrm>
+            <a:off x="6231636" y="1325880"/>
+            <a:ext cx="2658618" cy="2286000"/>
+          </a:xfrm>
+          <a:prstGeom prst="roundRect">
+            <a:avLst>
+              <a:gd name="adj" fmla="val 12000"/>
+            </a:avLst>
+          </a:prstGeom>
+          <a:solidFill>
+            <a:srgbClr val="E8A87C"/>
+          </a:solidFill>
+          <a:ln w="15875">
+            <a:solidFill>
+              <a:srgbClr val="E8A87C"/>
+            </a:solidFill>
+          </a:ln>
+          <a:effectLst/>
+        </p:spPr>
+        <p:style>
+          <a:lnRef idx="1">
+            <a:schemeClr val="accent1"/>
+          </a:lnRef>
+          <a:fillRef idx="3">
+            <a:schemeClr val="accent1"/>
+          </a:fillRef>
+          <a:effectRef idx="2">
+            <a:schemeClr val="accent1"/>
+          </a:effectRef>
+          <a:fontRef idx="minor">
+            <a:schemeClr val="lt1"/>
+          </a:fontRef>
+        </p:style>
+        <p:txBody>
+          <a:bodyPr rtlCol="0" anchor="ctr" wrap="square" lIns="164592" rIns="164592" tIns="219456" bIns="146304"/>
+          <a:lstStyle/>
+          <a:p>
+            <a:pPr algn="l"/>
+            <a:r>
+              <a:rPr sz="4000" b="1">
+                <a:solidFill>
+                  <a:srgbClr val="4A3226"/>
+                </a:solidFill>
+                <a:latin typeface="DejaVu Sans"/>
+              </a:rPr>
+              <a:t>138</a:t>
+            </a:r>
+          </a:p>
+          <a:p>
+            <a:pPr algn="l">
+              <a:spcBef>
+                <a:spcPts val="400"/>
+              </a:spcBef>
+            </a:pPr>
+            <a:r>
+              <a:rPr sz="1500" b="1">
+                <a:solidFill>
+                  <a:srgbClr val="4A3226"/>
+                </a:solidFill>
+                <a:latin typeface="DejaVu Sans"/>
+              </a:rPr>
+              <a:t>runs with vision metrics</a:t>
+            </a:r>
+          </a:p>
+          <a:p>
+            <a:pPr algn="l">
+              <a:spcBef>
+                <a:spcPts val="600"/>
+              </a:spcBef>
+            </a:pPr>
+            <a:r>
+              <a:rPr sz="1100" b="0">
+                <a:solidFill>
+                  <a:srgbClr val="4A3226"/>
+                </a:solidFill>
+                <a:latin typeface="DejaVu Sans"/>
+              </a:rPr>
+              <a:t>check-overlay measurements</a:t>
+            </a:r>
+          </a:p>
+        </p:txBody>
+      </p:sp>
+      <p:sp>
+        <p:nvSpPr>
+          <p:cNvPr id="6" name="Rounded Rectangle 5"/>
+          <p:cNvSpPr/>
+          <p:nvPr/>
+        </p:nvSpPr>
+        <p:spPr>
+          <a:xfrm>
+            <a:off x="9164574" y="1325880"/>
+            <a:ext cx="2658618" cy="2286000"/>
+          </a:xfrm>
+          <a:prstGeom prst="roundRect">
+            <a:avLst>
+              <a:gd name="adj" fmla="val 12000"/>
+            </a:avLst>
+          </a:prstGeom>
+          <a:solidFill>
+            <a:srgbClr val="F28B9B"/>
+          </a:solidFill>
+          <a:ln w="15875">
+            <a:solidFill>
+              <a:srgbClr val="E8A87C"/>
+            </a:solidFill>
+          </a:ln>
+          <a:effectLst/>
+        </p:spPr>
+        <p:style>
+          <a:lnRef idx="1">
+            <a:schemeClr val="accent1"/>
+          </a:lnRef>
+          <a:fillRef idx="3">
+            <a:schemeClr val="accent1"/>
+          </a:fillRef>
+          <a:effectRef idx="2">
+            <a:schemeClr val="accent1"/>
+          </a:effectRef>
+          <a:fontRef idx="minor">
+            <a:schemeClr val="lt1"/>
+          </a:fontRef>
+        </p:style>
+        <p:txBody>
+          <a:bodyPr rtlCol="0" anchor="ctr" wrap="square" lIns="164592" rIns="164592" tIns="219456" bIns="146304"/>
+          <a:lstStyle/>
+          <a:p>
+            <a:pPr algn="l"/>
+            <a:r>
+              <a:rPr sz="4000" b="1">
+                <a:solidFill>
+                  <a:srgbClr val="4A3226"/>
+                </a:solidFill>
+                <a:latin typeface="DejaVu Sans"/>
+              </a:rPr>
+              <a:t>4</a:t>
+            </a:r>
+          </a:p>
+          <a:p>
+            <a:pPr algn="l">
+              <a:spcBef>
+                <a:spcPts val="400"/>
+              </a:spcBef>
+            </a:pPr>
+            <a:r>
+              <a:rPr sz="1500" b="1">
+                <a:solidFill>
+                  <a:srgbClr val="4A3226"/>
+                </a:solidFill>
+                <a:latin typeface="DejaVu Sans"/>
+              </a:rPr>
+              <a:t>camera checks</a:t>
+            </a:r>
+          </a:p>
+          <a:p>
+            <a:pPr algn="l">
+              <a:spcBef>
+                <a:spcPts val="600"/>
+              </a:spcBef>
+            </a:pPr>
+            <a:r>
+              <a:rPr sz="1100" b="0">
+                <a:solidFill>
+                  <a:srgbClr val="4A3226"/>
+                </a:solidFill>
+                <a:latin typeface="DejaVu Sans"/>
+              </a:rPr>
+              <a:t>spread / fold1 / fold2 / push-off</a:t>
+            </a:r>
+          </a:p>
+        </p:txBody>
+      </p:sp>
+      <p:sp>
+        <p:nvSpPr>
+          <p:cNvPr id="7" name="TextBox 6"/>
           <p:cNvSpPr txBox="1"/>
           <p:nvPr/>
         </p:nvSpPr>
         <p:spPr>
           <a:xfrm>
-            <a:off x="640080" y="1234440"/>
-            <a:ext cx="10972800" cy="4754880"/>
+            <a:off x="640080" y="3977640"/>
+            <a:ext cx="10972800" cy="2103120"/>
           </a:xfrm>
           <a:prstGeom prst="rect">
             <a:avLst/>
@@ -6191,17 +4207,17 @@
                 <a:spcPct val="100000"/>
               </a:lnSpc>
               <a:spcAft>
-                <a:spcPts val="1000"/>
+                <a:spcPts val="900"/>
               </a:spcAft>
             </a:pPr>
             <a:r>
-              <a:rPr sz="1500" b="0">
+              <a:rPr sz="1300" b="0">
                 <a:solidFill>
-                  <a:srgbClr val="1A1A1A"/>
+                  <a:srgbClr val="4A3226"/>
                 </a:solidFill>
                 <a:latin typeface="DejaVu Sans"/>
               </a:rPr>
-              <a:t>The robot decides everything on board: a Raspberry Pi 5, ROS 2, two Duet motion boards, a camera over the hotplate</a:t>
+              <a:t>- Join robot runs, recipe settings and check images in one analysis workflow.</a:t>
             </a:r>
           </a:p>
           <a:p>
@@ -6210,17 +4226,17 @@
                 <a:spcPct val="100000"/>
               </a:lnSpc>
               <a:spcAft>
-                <a:spcPts val="1000"/>
+                <a:spcPts val="900"/>
               </a:spcAft>
             </a:pPr>
             <a:r>
-              <a:rPr sz="1500" b="0">
+              <a:rPr sz="1300" b="0">
                 <a:solidFill>
-                  <a:srgbClr val="1A1A1A"/>
+                  <a:srgbClr val="4A3226"/>
                 </a:solidFill>
                 <a:latin typeface="DejaVu Sans"/>
               </a:rPr>
-              <a:t>Every run is logged: phases, ROS logs, about 110 recipe settings, camera checks with images, video</a:t>
+              <a:t>- Measure diameter, centre offset, holes and fold overlap from the robot's check overlays.</a:t>
             </a:r>
           </a:p>
           <a:p>
@@ -6229,62 +4245,24 @@
                 <a:spcPct val="100000"/>
               </a:lnSpc>
               <a:spcAft>
-                <a:spcPts val="1000"/>
+                <a:spcPts val="900"/>
               </a:spcAft>
             </a:pPr>
             <a:r>
-              <a:rPr sz="1500" b="0">
+              <a:rPr sz="1300" b="0">
                 <a:solidFill>
-                  <a:srgbClr val="1A1A1A"/>
+                  <a:srgbClr val="4A3226"/>
                 </a:solidFill>
                 <a:latin typeface="DejaVu Sans"/>
               </a:rPr>
-              <a:t>A failure is recorded as pass or fail plus one short message: no measurement, no reason, no direction to change</a:t>
-            </a:r>
-          </a:p>
-          <a:p>
-            <a:pPr>
-              <a:lnSpc>
-                <a:spcPct val="100000"/>
-              </a:lnSpc>
-              <a:spcAft>
-                <a:spcPts val="1000"/>
-              </a:spcAft>
-            </a:pPr>
-            <a:r>
-              <a:rPr sz="1500" b="0">
-                <a:solidFill>
-                  <a:srgbClr val="1A1A1A"/>
-                </a:solidFill>
-                <a:latin typeface="DejaVu Sans"/>
-              </a:rPr>
-              <a:t>Maus asked for three things: spread quality (mask, diameter, quality score); position and orientation (centre and angle for the spatula); fold detection (flat / half / quarter / triangle plus edge angle)</a:t>
-            </a:r>
-          </a:p>
-          <a:p>
-            <a:pPr>
-              <a:lnSpc>
-                <a:spcPct val="100000"/>
-              </a:lnSpc>
-              <a:spcAft>
-                <a:spcPts val="1000"/>
-              </a:spcAft>
-            </a:pPr>
-            <a:r>
-              <a:rPr sz="1500" b="0">
-                <a:solidFill>
-                  <a:srgbClr val="1A1A1A"/>
-                </a:solidFill>
-                <a:latin typeface="DejaVu Sans"/>
-              </a:rPr>
-              <a:t>Scored at two levels. Level 1: works on Maus data, scored against the robot's own checks. Level 2: real time, under about 300 ms per frame on a Raspberry Pi 5 CPU</a:t>
-            </a:r>
-          </a:p>
-        </p:txBody>
-      </p:sp>
-      <p:sp>
-        <p:nvSpPr>
-          <p:cNvPr id="4" name="TextBox 3"/>
+              <a:t>- Review video alongside frame records, then explore model artifacts and follow-up experiments.</a:t>
+            </a:r>
+          </a:p>
+        </p:txBody>
+      </p:sp>
+      <p:sp>
+        <p:nvSpPr>
+          <p:cNvPr id="8" name="TextBox 7"/>
           <p:cNvSpPr txBox="1"/>
           <p:nvPr/>
         </p:nvSpPr>
@@ -6307,18 +4285,18 @@
             <a:r>
               <a:rPr sz="1000" b="0">
                 <a:solidFill>
-                  <a:srgbClr val="6B6B6B"/>
+                  <a:srgbClr val="9C7A63"/>
                 </a:solidFill>
                 <a:latin typeface="DejaVu Sans"/>
               </a:rPr>
-              <a:t>Source: repo challenge table (PR #86), system.md</a:t>
-            </a:r>
-          </a:p>
-        </p:txBody>
-      </p:sp>
-      <p:sp>
-        <p:nvSpPr>
-          <p:cNvPr id="5" name="TextBox 4"/>
+              <a:t>Sources: run table + vision metrics</a:t>
+            </a:r>
+          </a:p>
+        </p:txBody>
+      </p:sp>
+      <p:sp>
+        <p:nvSpPr>
+          <p:cNvPr id="9" name="TextBox 8"/>
           <p:cNvSpPr txBox="1"/>
           <p:nvPr/>
         </p:nvSpPr>
@@ -6342,7 +4320,7 @@
             <a:r>
               <a:rPr sz="1000" b="0">
                 <a:solidFill>
-                  <a:srgbClr val="6B6B6B"/>
+                  <a:srgbClr val="9C7A63"/>
                 </a:solidFill>
                 <a:latin typeface="DejaVu Sans"/>
               </a:rPr>
@@ -6362,6 +4340,14 @@
 <file path=ppt/slides/slide3.xml><?xml version="1.0" encoding="utf-8"?>
 <p:sld xmlns:a="http://schemas.openxmlformats.org/drawingml/2006/main" xmlns:p="http://schemas.openxmlformats.org/presentationml/2006/main" xmlns:r="http://schemas.openxmlformats.org/officeDocument/2006/relationships">
   <p:cSld>
+    <p:bg>
+      <p:bgPr>
+        <a:solidFill>
+          <a:srgbClr val="FFF6EC"/>
+        </a:solidFill>
+        <a:effectLst/>
+      </p:bgPr>
+    </p:bg>
     <p:spTree>
       <p:nvGrpSpPr>
         <p:cNvPr id="1" name=""/>
@@ -6395,11 +4381,11 @@
             <a:r>
               <a:rPr sz="3000" b="1">
                 <a:solidFill>
-                  <a:srgbClr val="1A1A1A"/>
+                  <a:srgbClr val="4A3226"/>
                 </a:solidFill>
                 <a:latin typeface="DejaVu Sans"/>
               </a:rPr>
-              <a:t>What we had to work with</a:t>
+              <a:t>Make the next run more informative</a:t>
             </a:r>
           </a:p>
         </p:txBody>
@@ -6412,8 +4398,8 @@
         </p:nvSpPr>
         <p:spPr>
           <a:xfrm>
-            <a:off x="640080" y="1234440"/>
-            <a:ext cx="10972800" cy="4754880"/>
+            <a:off x="640080" y="1463040"/>
+            <a:ext cx="10972800" cy="4572000"/>
           </a:xfrm>
           <a:prstGeom prst="rect">
             <a:avLst/>
@@ -6431,17 +4417,18 @@
                 <a:spcPct val="100000"/>
               </a:lnSpc>
               <a:spcAft>
-                <a:spcPts val="1000"/>
+                <a:spcPts val="2400"/>
               </a:spcAft>
             </a:pPr>
             <a:r>
-              <a:rPr sz="1500" b="0">
+              <a:rPr sz="1800" b="1">
                 <a:solidFill>
-                  <a:srgbClr val="1A1A1A"/>
+                  <a:srgbClr val="F28B9B"/>
                 </a:solidFill>
                 <a:latin typeface="DejaVu Sans"/>
+                <a:hlinkClick r:id="rId3"/>
               </a:rPr>
-              <a:t>828 runs, 2 September to 30 October 2026 (UTC), visible to one hackathon dashboard account</a:t>
+              <a:t>Explore the project: github.com/leonardoAB1/maus-crepe-insights</a:t>
             </a:r>
           </a:p>
           <a:p>
@@ -6450,17 +4437,17 @@
                 <a:spcPct val="100000"/>
               </a:lnSpc>
               <a:spcAft>
-                <a:spcPts val="1000"/>
+                <a:spcPts val="2200"/>
               </a:spcAft>
             </a:pPr>
             <a:r>
-              <a:rPr sz="1500" b="0">
+              <a:rPr sz="1800" b="1">
                 <a:solidFill>
-                  <a:srgbClr val="1A1A1A"/>
+                  <a:srgbClr val="E8A87C"/>
                 </a:solidFill>
                 <a:latin typeface="DejaVu Sans"/>
               </a:rPr>
-              <a:t>Three robots: maus-pixi 410 runs, maus-quin 384, maus-otto 34</a:t>
+              <a:t>Compare batches using the run table, camera-derived metrics and recipe settings.</a:t>
             </a:r>
           </a:p>
           <a:p>
@@ -6469,74 +4456,17 @@
                 <a:spcPct val="100000"/>
               </a:lnSpc>
               <a:spcAft>
-                <a:spcPts val="1000"/>
+                <a:spcPts val="1200"/>
               </a:spcAft>
             </a:pPr>
             <a:r>
-              <a:rPr sz="1500" b="0">
+              <a:rPr sz="1700" b="0">
                 <a:solidFill>
-                  <a:srgbClr val="1A1A1A"/>
+                  <a:srgbClr val="4A3226"/>
                 </a:solidFill>
                 <a:latin typeface="DejaVu Sans"/>
               </a:rPr>
-              <a:t>633 test runs, 195 customer runs</a:t>
-            </a:r>
-          </a:p>
-          <a:p>
-            <a:pPr>
-              <a:lnSpc>
-                <a:spcPct val="100000"/>
-              </a:lnSpc>
-              <a:spcAft>
-                <a:spcPts val="1000"/>
-              </a:spcAft>
-            </a:pPr>
-            <a:r>
-              <a:rPr sz="1500" b="0">
-                <a:solidFill>
-                  <a:srgbClr val="1A1A1A"/>
-                </a:solidFill>
-                <a:latin typeface="DejaVu Sans"/>
-              </a:rPr>
-              <a:t>Outcomes: 470 succeeded, 148 not_succeeded, 129 aborted, 81 canceled</a:t>
-            </a:r>
-          </a:p>
-          <a:p>
-            <a:pPr>
-              <a:lnSpc>
-                <a:spcPct val="100000"/>
-              </a:lnSpc>
-              <a:spcAft>
-                <a:spcPts val="1000"/>
-              </a:spcAft>
-            </a:pPr>
-            <a:r>
-              <a:rPr sz="1500" b="0">
-                <a:solidFill>
-                  <a:srgbClr val="1A1A1A"/>
-                </a:solidFill>
-                <a:latin typeface="DejaVu Sans"/>
-              </a:rPr>
-              <a:t>Camera checks with images exist only from 13 October: 160 of the 828 runs, so 690 runs have no measurement at all</a:t>
-            </a:r>
-          </a:p>
-          <a:p>
-            <a:pPr>
-              <a:lnSpc>
-                <a:spcPct val="100000"/>
-              </a:lnSpc>
-              <a:spcAft>
-                <a:spcPts val="1000"/>
-              </a:spcAft>
-            </a:pPr>
-            <a:r>
-              <a:rPr sz="1500" b="0">
-                <a:solidFill>
-                  <a:srgbClr val="1A1A1A"/>
-                </a:solidFill>
-                <a:latin typeface="DejaVu Sans"/>
-              </a:rPr>
-              <a:t>Every one of the 148 not_succeeded runs ends at plate_load, and 117 of them have no check data</a:t>
+              <a:t>Bring more run records and check images into the analysis, then use the evidence to shape the next experiment.</a:t>
             </a:r>
           </a:p>
         </p:txBody>
@@ -6566,11 +4496,11 @@
             <a:r>
               <a:rPr sz="1000" b="0">
                 <a:solidFill>
-                  <a:srgbClr val="6B6B6B"/>
+                  <a:srgbClr val="9C7A63"/>
                 </a:solidFill>
                 <a:latin typeface="DejaVu Sans"/>
               </a:rPr>
-              <a:t>Source: runs.parquet (828 rows), audit report</a:t>
+              <a:t>Public code; run data stays private</a:t>
             </a:r>
           </a:p>
         </p:txBody>
@@ -6601,1779 +4531,11 @@
             <a:r>
               <a:rPr sz="1000" b="0">
                 <a:solidFill>
-                  <a:srgbClr val="6B6B6B"/>
+                  <a:srgbClr val="9C7A63"/>
                 </a:solidFill>
                 <a:latin typeface="DejaVu Sans"/>
               </a:rPr>
               <a:t>3</a:t>
-            </a:r>
-          </a:p>
-        </p:txBody>
-      </p:sp>
-    </p:spTree>
-  </p:cSld>
-  <p:clrMapOvr>
-    <a:masterClrMapping/>
-  </p:clrMapOvr>
-</p:sld>
-</file>
-
-<file path=ppt/slides/slide4.xml><?xml version="1.0" encoding="utf-8"?>
-<p:sld xmlns:a="http://schemas.openxmlformats.org/drawingml/2006/main" xmlns:p="http://schemas.openxmlformats.org/presentationml/2006/main" xmlns:r="http://schemas.openxmlformats.org/officeDocument/2006/relationships">
-  <p:cSld>
-    <p:spTree>
-      <p:nvGrpSpPr>
-        <p:cNvPr id="1" name=""/>
-        <p:cNvGrpSpPr/>
-        <p:nvPr/>
-      </p:nvGrpSpPr>
-      <p:grpSpPr/>
-      <p:sp>
-        <p:nvSpPr>
-          <p:cNvPr id="2" name="TextBox 1"/>
-          <p:cNvSpPr txBox="1"/>
-          <p:nvPr/>
-        </p:nvSpPr>
-        <p:spPr>
-          <a:xfrm>
-            <a:off x="548640" y="292608"/>
-            <a:ext cx="11064240" cy="822960"/>
-          </a:xfrm>
-          <a:prstGeom prst="rect">
-            <a:avLst/>
-          </a:prstGeom>
-          <a:noFill/>
-        </p:spPr>
-        <p:txBody>
-          <a:bodyPr wrap="square">
-            <a:spAutoFit/>
-          </a:bodyPr>
-          <a:lstStyle/>
-          <a:p>
-            <a:pPr algn="l"/>
-            <a:r>
-              <a:rPr sz="3000" b="1">
-                <a:solidFill>
-                  <a:srgbClr val="1A1A1A"/>
-                </a:solidFill>
-                <a:latin typeface="DejaVu Sans"/>
-              </a:rPr>
-              <a:t>What we built</a:t>
-            </a:r>
-          </a:p>
-        </p:txBody>
-      </p:sp>
-      <p:sp>
-        <p:nvSpPr>
-          <p:cNvPr id="3" name="TextBox 2"/>
-          <p:cNvSpPr txBox="1"/>
-          <p:nvPr/>
-        </p:nvSpPr>
-        <p:spPr>
-          <a:xfrm>
-            <a:off x="640080" y="1234440"/>
-            <a:ext cx="10972800" cy="4754880"/>
-          </a:xfrm>
-          <a:prstGeom prst="rect">
-            <a:avLst/>
-          </a:prstGeom>
-          <a:noFill/>
-        </p:spPr>
-        <p:txBody>
-          <a:bodyPr wrap="square">
-            <a:spAutoFit/>
-          </a:bodyPr>
-          <a:lstStyle/>
-          <a:p>
-            <a:pPr>
-              <a:lnSpc>
-                <a:spcPct val="100000"/>
-              </a:lnSpc>
-              <a:spcAft>
-                <a:spcPts val="1000"/>
-              </a:spcAft>
-            </a:pPr>
-            <a:r>
-              <a:rPr sz="1500" b="0">
-                <a:solidFill>
-                  <a:srgbClr val="1A1A1A"/>
-                </a:solidFill>
-                <a:latin typeface="DejaVu Sans"/>
-              </a:rPr>
-              <a:t>Export: a read-only dashboard client over MCP and OAuth, into raw run JSON plus check images and video</a:t>
-            </a:r>
-          </a:p>
-          <a:p>
-            <a:pPr>
-              <a:lnSpc>
-                <a:spcPct val="100000"/>
-              </a:lnSpc>
-              <a:spcAft>
-                <a:spcPts val="1000"/>
-              </a:spcAft>
-            </a:pPr>
-            <a:r>
-              <a:rPr sz="1500" b="0">
-                <a:solidFill>
-                  <a:srgbClr val="1A1A1A"/>
-                </a:solidFill>
-                <a:latin typeface="DejaVu Sans"/>
-              </a:rPr>
-              <a:t>MCAP: one ROS 2 profile file per run, 828 of them, ready for Foxglove and ros2 bag tools</a:t>
-            </a:r>
-          </a:p>
-          <a:p>
-            <a:pPr>
-              <a:lnSpc>
-                <a:spcPct val="100000"/>
-              </a:lnSpc>
-              <a:spcAft>
-                <a:spcPts val="1000"/>
-              </a:spcAft>
-            </a:pPr>
-            <a:r>
-              <a:rPr sz="1500" b="0">
-                <a:solidFill>
-                  <a:srgbClr val="1A1A1A"/>
-                </a:solidFill>
-                <a:latin typeface="DejaVu Sans"/>
-              </a:rPr>
-              <a:t>Tables: runs.parquet, 828 rows and 177 columns; vision.parquet, 138 scored runs</a:t>
-            </a:r>
-          </a:p>
-          <a:p>
-            <a:pPr>
-              <a:lnSpc>
-                <a:spcPct val="100000"/>
-              </a:lnSpc>
-              <a:spcAft>
-                <a:spcPts val="1000"/>
-              </a:spcAft>
-            </a:pPr>
-            <a:r>
-              <a:rPr sz="1500" b="0">
-                <a:solidFill>
-                  <a:srgbClr val="1A1A1A"/>
-                </a:solidFill>
-                <a:latin typeface="DejaVu Sans"/>
-              </a:rPr>
-              <a:t>Vision scores: the robot's own check overlays read back as numbers per run</a:t>
-            </a:r>
-          </a:p>
-          <a:p>
-            <a:pPr>
-              <a:lnSpc>
-                <a:spcPct val="100000"/>
-              </a:lnSpc>
-              <a:spcAft>
-                <a:spcPts val="1000"/>
-              </a:spcAft>
-            </a:pPr>
-            <a:r>
-              <a:rPr sz="1500" b="0">
-                <a:solidFill>
-                  <a:srgbClr val="1A1A1A"/>
-                </a:solidFill>
-                <a:latin typeface="DejaVu Sans"/>
-              </a:rPr>
-              <a:t>Models: ONNX heads with a model card each, trained and scored by one shared per-robot harness</a:t>
-            </a:r>
-          </a:p>
-          <a:p>
-            <a:pPr>
-              <a:lnSpc>
-                <a:spcPct val="100000"/>
-              </a:lnSpc>
-              <a:spcAft>
-                <a:spcPts val="1000"/>
-              </a:spcAft>
-            </a:pPr>
-            <a:r>
-              <a:rPr sz="1500" b="0">
-                <a:solidFill>
-                  <a:srgbClr val="1A1A1A"/>
-                </a:solidFill>
-                <a:latin typeface="DejaVu Sans"/>
-              </a:rPr>
-              <a:t>Labeling: a private local Label Studio 1.23.2 app, phase labels and material/hole masks</a:t>
-            </a:r>
-          </a:p>
-          <a:p>
-            <a:pPr>
-              <a:lnSpc>
-                <a:spcPct val="100000"/>
-              </a:lnSpc>
-              <a:spcAft>
-                <a:spcPts val="1000"/>
-              </a:spcAft>
-            </a:pPr>
-            <a:r>
-              <a:rPr sz="1500" b="0">
-                <a:solidFill>
-                  <a:srgbClr val="1A1A1A"/>
-                </a:solidFill>
-                <a:latin typeface="DejaVu Sans"/>
-              </a:rPr>
-              <a:t>Local run viewer: plays a run video and draws what the pipeline knows per frame</a:t>
-            </a:r>
-          </a:p>
-        </p:txBody>
-      </p:sp>
-      <p:sp>
-        <p:nvSpPr>
-          <p:cNvPr id="4" name="TextBox 3"/>
-          <p:cNvSpPr txBox="1"/>
-          <p:nvPr/>
-        </p:nvSpPr>
-        <p:spPr>
-          <a:xfrm>
-            <a:off x="548640" y="6327648"/>
-            <a:ext cx="9601200" cy="365760"/>
-          </a:xfrm>
-          <a:prstGeom prst="rect">
-            <a:avLst/>
-          </a:prstGeom>
-          <a:noFill/>
-        </p:spPr>
-        <p:txBody>
-          <a:bodyPr wrap="square">
-            <a:spAutoFit/>
-          </a:bodyPr>
-          <a:lstStyle/>
-          <a:p>
-            <a:r>
-              <a:rPr sz="1000" b="0">
-                <a:solidFill>
-                  <a:srgbClr val="6B6B6B"/>
-                </a:solidFill>
-                <a:latin typeface="DejaVu Sans"/>
-              </a:rPr>
-              <a:t>Stays in the gitignored data/</a:t>
-            </a:r>
-          </a:p>
-        </p:txBody>
-      </p:sp>
-      <p:sp>
-        <p:nvSpPr>
-          <p:cNvPr id="5" name="TextBox 4"/>
-          <p:cNvSpPr txBox="1"/>
-          <p:nvPr/>
-        </p:nvSpPr>
-        <p:spPr>
-          <a:xfrm>
-            <a:off x="11247120" y="6327648"/>
-            <a:ext cx="548640" cy="365760"/>
-          </a:xfrm>
-          <a:prstGeom prst="rect">
-            <a:avLst/>
-          </a:prstGeom>
-          <a:noFill/>
-        </p:spPr>
-        <p:txBody>
-          <a:bodyPr wrap="square">
-            <a:spAutoFit/>
-          </a:bodyPr>
-          <a:lstStyle/>
-          <a:p>
-            <a:pPr algn="r"/>
-            <a:r>
-              <a:rPr sz="1000" b="0">
-                <a:solidFill>
-                  <a:srgbClr val="6B6B6B"/>
-                </a:solidFill>
-                <a:latin typeface="DejaVu Sans"/>
-              </a:rPr>
-              <a:t>4</a:t>
-            </a:r>
-          </a:p>
-        </p:txBody>
-      </p:sp>
-    </p:spTree>
-  </p:cSld>
-  <p:clrMapOvr>
-    <a:masterClrMapping/>
-  </p:clrMapOvr>
-</p:sld>
-</file>
-
-<file path=ppt/slides/slide5.xml><?xml version="1.0" encoding="utf-8"?>
-<p:sld xmlns:a="http://schemas.openxmlformats.org/drawingml/2006/main" xmlns:p="http://schemas.openxmlformats.org/presentationml/2006/main" xmlns:r="http://schemas.openxmlformats.org/officeDocument/2006/relationships">
-  <p:cSld>
-    <p:spTree>
-      <p:nvGrpSpPr>
-        <p:cNvPr id="1" name=""/>
-        <p:cNvGrpSpPr/>
-        <p:nvPr/>
-      </p:nvGrpSpPr>
-      <p:grpSpPr/>
-      <p:sp>
-        <p:nvSpPr>
-          <p:cNvPr id="2" name="TextBox 1"/>
-          <p:cNvSpPr txBox="1"/>
-          <p:nvPr/>
-        </p:nvSpPr>
-        <p:spPr>
-          <a:xfrm>
-            <a:off x="548640" y="292608"/>
-            <a:ext cx="11064240" cy="822960"/>
-          </a:xfrm>
-          <a:prstGeom prst="rect">
-            <a:avLst/>
-          </a:prstGeom>
-          <a:noFill/>
-        </p:spPr>
-        <p:txBody>
-          <a:bodyPr wrap="square">
-            <a:spAutoFit/>
-          </a:bodyPr>
-          <a:lstStyle/>
-          <a:p>
-            <a:pPr algn="l"/>
-            <a:r>
-              <a:rPr sz="3000" b="1">
-                <a:solidFill>
-                  <a:srgbClr val="1A1A1A"/>
-                </a:solidFill>
-                <a:latin typeface="DejaVu Sans"/>
-              </a:rPr>
-              <a:t>Where runs fail</a:t>
-            </a:r>
-          </a:p>
-        </p:txBody>
-      </p:sp>
-      <p:sp>
-        <p:nvSpPr>
-          <p:cNvPr id="3" name="TextBox 2"/>
-          <p:cNvSpPr txBox="1"/>
-          <p:nvPr/>
-        </p:nvSpPr>
-        <p:spPr>
-          <a:xfrm>
-            <a:off x="640080" y="1234440"/>
-            <a:ext cx="10972800" cy="4754880"/>
-          </a:xfrm>
-          <a:prstGeom prst="rect">
-            <a:avLst/>
-          </a:prstGeom>
-          <a:noFill/>
-        </p:spPr>
-        <p:txBody>
-          <a:bodyPr wrap="square">
-            <a:spAutoFit/>
-          </a:bodyPr>
-          <a:lstStyle/>
-          <a:p>
-            <a:pPr>
-              <a:lnSpc>
-                <a:spcPct val="100000"/>
-              </a:lnSpc>
-              <a:spcAft>
-                <a:spcPts val="1000"/>
-              </a:spcAft>
-            </a:pPr>
-            <a:r>
-              <a:rPr sz="1500" b="0">
-                <a:solidFill>
-                  <a:srgbClr val="1A1A1A"/>
-                </a:solidFill>
-                <a:latin typeface="DejaVu Sans"/>
-              </a:rPr>
-              <a:t>Check fail rates over the runs that recorded a check (the robot's own verdicts):</a:t>
-            </a:r>
-          </a:p>
-          <a:p>
-            <a:pPr>
-              <a:lnSpc>
-                <a:spcPct val="100000"/>
-              </a:lnSpc>
-              <a:spcAft>
-                <a:spcPts val="1000"/>
-              </a:spcAft>
-            </a:pPr>
-            <a:r>
-              <a:rPr sz="1500" b="0">
-                <a:solidFill>
-                  <a:srgbClr val="1A1A1A"/>
-                </a:solidFill>
-                <a:latin typeface="DejaVu Sans"/>
-              </a:rPr>
-              <a:t>plate_present 30/79, spread 38/163, fold1 19/138, fold2 34/135</a:t>
-            </a:r>
-          </a:p>
-          <a:p>
-            <a:pPr>
-              <a:lnSpc>
-                <a:spcPct val="100000"/>
-              </a:lnSpc>
-              <a:spcAft>
-                <a:spcPts val="1000"/>
-              </a:spcAft>
-            </a:pPr>
-            <a:r>
-              <a:rPr sz="1500" b="0">
-                <a:solidFill>
-                  <a:srgbClr val="1A1A1A"/>
-                </a:solidFill>
-                <a:latin typeface="DejaVu Sans"/>
-              </a:rPr>
-              <a:t>plate_clean 20/182, plate_loaded 38/172</a:t>
-            </a:r>
-          </a:p>
-          <a:p>
-            <a:pPr>
-              <a:lnSpc>
-                <a:spcPct val="100000"/>
-              </a:lnSpc>
-              <a:spcAft>
-                <a:spcPts val="1000"/>
-              </a:spcAft>
-            </a:pPr>
-            <a:r>
-              <a:rPr sz="1500" b="0">
-                <a:solidFill>
-                  <a:srgbClr val="1A1A1A"/>
-                </a:solidFill>
-                <a:latin typeface="DejaVu Sans"/>
-              </a:rPr>
-              <a:t>push_off 140/259: it usually fails once by design while the plate is rotated and rechecked</a:t>
-            </a:r>
-          </a:p>
-          <a:p>
-            <a:pPr>
-              <a:lnSpc>
-                <a:spcPct val="100000"/>
-              </a:lnSpc>
-              <a:spcAft>
-                <a:spcPts val="1000"/>
-              </a:spcAft>
-            </a:pPr>
-            <a:r>
-              <a:rPr sz="1500" b="0">
-                <a:solidFill>
-                  <a:srgbClr val="1A1A1A"/>
-                </a:solidFill>
-                <a:latin typeface="DejaVu Sans"/>
-              </a:rPr>
-              <a:t>Among runs with check data, spread and the two folds explain most not_succeeded runs</a:t>
-            </a:r>
-          </a:p>
-          <a:p>
-            <a:pPr>
-              <a:lnSpc>
-                <a:spcPct val="100000"/>
-              </a:lnSpc>
-              <a:spcAft>
-                <a:spcPts val="1000"/>
-              </a:spcAft>
-            </a:pPr>
-            <a:r>
-              <a:rPr sz="1500" b="0">
-                <a:solidFill>
-                  <a:srgbClr val="1A1A1A"/>
-                </a:solidFill>
-                <a:latin typeface="DejaVu Sans"/>
-              </a:rPr>
-              <a:t>Every not_succeeded run ends at plate_load: the robot finishes the cycle, so the reason must come from the checks and logs, not from where the run stopped</a:t>
-            </a:r>
-          </a:p>
-          <a:p>
-            <a:pPr>
-              <a:lnSpc>
-                <a:spcPct val="100000"/>
-              </a:lnSpc>
-              <a:spcAft>
-                <a:spcPts val="1000"/>
-              </a:spcAft>
-            </a:pPr>
-            <a:r>
-              <a:rPr sz="1500" b="0">
-                <a:solidFill>
-                  <a:srgbClr val="1A1A1A"/>
-                </a:solidFill>
-                <a:latin typeface="DejaVu Sans"/>
-              </a:rPr>
-              <a:t>Cancels cluster in cook (34 of 66), the longest stage: likely a customer-facing wait</a:t>
-            </a:r>
-          </a:p>
-        </p:txBody>
-      </p:sp>
-      <p:sp>
-        <p:nvSpPr>
-          <p:cNvPr id="4" name="TextBox 3"/>
-          <p:cNvSpPr txBox="1"/>
-          <p:nvPr/>
-        </p:nvSpPr>
-        <p:spPr>
-          <a:xfrm>
-            <a:off x="548640" y="6327648"/>
-            <a:ext cx="9601200" cy="365760"/>
-          </a:xfrm>
-          <a:prstGeom prst="rect">
-            <a:avLst/>
-          </a:prstGeom>
-          <a:noFill/>
-        </p:spPr>
-        <p:txBody>
-          <a:bodyPr wrap="square">
-            <a:spAutoFit/>
-          </a:bodyPr>
-          <a:lstStyle/>
-          <a:p>
-            <a:r>
-              <a:rPr sz="1000" b="0">
-                <a:solidFill>
-                  <a:srgbClr val="6B6B6B"/>
-                </a:solidFill>
-                <a:latin typeface="DejaVu Sans"/>
-              </a:rPr>
-              <a:t>Source: crepe-stages.md</a:t>
-            </a:r>
-          </a:p>
-        </p:txBody>
-      </p:sp>
-      <p:sp>
-        <p:nvSpPr>
-          <p:cNvPr id="5" name="TextBox 4"/>
-          <p:cNvSpPr txBox="1"/>
-          <p:nvPr/>
-        </p:nvSpPr>
-        <p:spPr>
-          <a:xfrm>
-            <a:off x="11247120" y="6327648"/>
-            <a:ext cx="548640" cy="365760"/>
-          </a:xfrm>
-          <a:prstGeom prst="rect">
-            <a:avLst/>
-          </a:prstGeom>
-          <a:noFill/>
-        </p:spPr>
-        <p:txBody>
-          <a:bodyPr wrap="square">
-            <a:spAutoFit/>
-          </a:bodyPr>
-          <a:lstStyle/>
-          <a:p>
-            <a:pPr algn="r"/>
-            <a:r>
-              <a:rPr sz="1000" b="0">
-                <a:solidFill>
-                  <a:srgbClr val="6B6B6B"/>
-                </a:solidFill>
-                <a:latin typeface="DejaVu Sans"/>
-              </a:rPr>
-              <a:t>5</a:t>
-            </a:r>
-          </a:p>
-        </p:txBody>
-      </p:sp>
-    </p:spTree>
-  </p:cSld>
-  <p:clrMapOvr>
-    <a:masterClrMapping/>
-  </p:clrMapOvr>
-</p:sld>
-</file>
-
-<file path=ppt/slides/slide6.xml><?xml version="1.0" encoding="utf-8"?>
-<p:sld xmlns:a="http://schemas.openxmlformats.org/drawingml/2006/main" xmlns:p="http://schemas.openxmlformats.org/presentationml/2006/main" xmlns:r="http://schemas.openxmlformats.org/officeDocument/2006/relationships">
-  <p:cSld>
-    <p:spTree>
-      <p:nvGrpSpPr>
-        <p:cNvPr id="1" name=""/>
-        <p:cNvGrpSpPr/>
-        <p:nvPr/>
-      </p:nvGrpSpPr>
-      <p:grpSpPr/>
-      <p:sp>
-        <p:nvSpPr>
-          <p:cNvPr id="2" name="TextBox 1"/>
-          <p:cNvSpPr txBox="1"/>
-          <p:nvPr/>
-        </p:nvSpPr>
-        <p:spPr>
-          <a:xfrm>
-            <a:off x="548640" y="292608"/>
-            <a:ext cx="11064240" cy="822960"/>
-          </a:xfrm>
-          <a:prstGeom prst="rect">
-            <a:avLst/>
-          </a:prstGeom>
-          <a:noFill/>
-        </p:spPr>
-        <p:txBody>
-          <a:bodyPr wrap="square">
-            <a:spAutoFit/>
-          </a:bodyPr>
-          <a:lstStyle/>
-          <a:p>
-            <a:pPr algn="l"/>
-            <a:r>
-              <a:rPr sz="3000" b="1">
-                <a:solidFill>
-                  <a:srgbClr val="1A1A1A"/>
-                </a:solidFill>
-                <a:latin typeface="DejaVu Sans"/>
-              </a:rPr>
-              <a:t>Reading the check overlays</a:t>
-            </a:r>
-          </a:p>
-        </p:txBody>
-      </p:sp>
-      <p:sp>
-        <p:nvSpPr>
-          <p:cNvPr id="3" name="TextBox 2"/>
-          <p:cNvSpPr txBox="1"/>
-          <p:nvPr/>
-        </p:nvSpPr>
-        <p:spPr>
-          <a:xfrm>
-            <a:off x="640080" y="1234440"/>
-            <a:ext cx="10972800" cy="2103120"/>
-          </a:xfrm>
-          <a:prstGeom prst="rect">
-            <a:avLst/>
-          </a:prstGeom>
-          <a:noFill/>
-        </p:spPr>
-        <p:txBody>
-          <a:bodyPr wrap="square">
-            <a:spAutoFit/>
-          </a:bodyPr>
-          <a:lstStyle/>
-          <a:p>
-            <a:pPr>
-              <a:lnSpc>
-                <a:spcPct val="100000"/>
-              </a:lnSpc>
-              <a:spcAft>
-                <a:spcPts val="1000"/>
-              </a:spcAft>
-            </a:pPr>
-            <a:r>
-              <a:rPr sz="1500" b="0">
-                <a:solidFill>
-                  <a:srgbClr val="1A1A1A"/>
-                </a:solidFill>
-                <a:latin typeface="DejaVu Sans"/>
-              </a:rPr>
-              <a:t>The robot's check overlay is already a top-down view with its own marks: crepe outline, holes, ideal fold shape, bare plate</a:t>
-            </a:r>
-          </a:p>
-          <a:p>
-            <a:pPr>
-              <a:lnSpc>
-                <a:spcPct val="100000"/>
-              </a:lnSpc>
-              <a:spcAft>
-                <a:spcPts val="1000"/>
-              </a:spcAft>
-            </a:pPr>
-            <a:r>
-              <a:rPr sz="1500" b="0">
-                <a:solidFill>
-                  <a:srgbClr val="1A1A1A"/>
-                </a:solidFill>
-                <a:latin typeface="DejaVu Sans"/>
-              </a:rPr>
-              <a:t>We read those marks back as numbers per run: diameter, area, centre offset, circularity, hole fraction, residue, fold overlap, fold2 / fold1 ratio, browning</a:t>
-            </a:r>
-          </a:p>
-          <a:p>
-            <a:pPr>
-              <a:lnSpc>
-                <a:spcPct val="100000"/>
-              </a:lnSpc>
-              <a:spcAft>
-                <a:spcPts val="1000"/>
-              </a:spcAft>
-            </a:pPr>
-            <a:r>
-              <a:rPr sz="1500" b="0">
-                <a:solidFill>
-                  <a:srgbClr val="1A1A1A"/>
-                </a:solidFill>
-                <a:latin typeface="DejaVu Sans"/>
-              </a:rPr>
-              <a:t>So a failure becomes measurable instead of pass or fail</a:t>
-            </a:r>
-          </a:p>
-          <a:p>
-            <a:pPr>
-              <a:lnSpc>
-                <a:spcPct val="100000"/>
-              </a:lnSpc>
-              <a:spcAft>
-                <a:spcPts val="1000"/>
-              </a:spcAft>
-            </a:pPr>
-            <a:r>
-              <a:rPr sz="1500" b="0">
-                <a:solidFill>
-                  <a:srgbClr val="1A1A1A"/>
-                </a:solidFill>
-                <a:latin typeface="DejaVu Sans"/>
-              </a:rPr>
-              <a:t>Sizes are relative to the robot's analysis zone; no millimetre scale for the plate is published</a:t>
-            </a:r>
-          </a:p>
-        </p:txBody>
-      </p:sp>
-      <p:pic>
-        <p:nvPicPr>
-          <p:cNvPr id="4" name="Picture 3" descr="vision-scores-example.jpg"/>
-          <p:cNvPicPr>
-            <a:picLocks noChangeAspect="1"/>
-          </p:cNvPicPr>
-          <p:nvPr/>
-        </p:nvPicPr>
-        <p:blipFill>
-          <a:blip r:embed="rId2"/>
-          <a:stretch>
-            <a:fillRect/>
-          </a:stretch>
-        </p:blipFill>
-        <p:spPr>
-          <a:xfrm>
-            <a:off x="2377440" y="3611880"/>
-            <a:ext cx="5542005" cy="3154680"/>
-          </a:xfrm>
-          <a:prstGeom prst="rect">
-            <a:avLst/>
-          </a:prstGeom>
-        </p:spPr>
-      </p:pic>
-      <p:sp>
-        <p:nvSpPr>
-          <p:cNvPr id="5" name="TextBox 4"/>
-          <p:cNvSpPr txBox="1"/>
-          <p:nvPr/>
-        </p:nvSpPr>
-        <p:spPr>
-          <a:xfrm>
-            <a:off x="548640" y="6327648"/>
-            <a:ext cx="9601200" cy="365760"/>
-          </a:xfrm>
-          <a:prstGeom prst="rect">
-            <a:avLst/>
-          </a:prstGeom>
-          <a:noFill/>
-        </p:spPr>
-        <p:txBody>
-          <a:bodyPr wrap="square">
-            <a:spAutoFit/>
-          </a:bodyPr>
-          <a:lstStyle/>
-          <a:p>
-            <a:r>
-              <a:rPr sz="1000" b="0">
-                <a:solidFill>
-                  <a:srgbClr val="6B6B6B"/>
-                </a:solidFill>
-                <a:latin typeface="DejaVu Sans"/>
-              </a:rPr>
-              <a:t>Source: data/pipeline.md</a:t>
-            </a:r>
-          </a:p>
-        </p:txBody>
-      </p:sp>
-      <p:sp>
-        <p:nvSpPr>
-          <p:cNvPr id="6" name="TextBox 5"/>
-          <p:cNvSpPr txBox="1"/>
-          <p:nvPr/>
-        </p:nvSpPr>
-        <p:spPr>
-          <a:xfrm>
-            <a:off x="11247120" y="6327648"/>
-            <a:ext cx="548640" cy="365760"/>
-          </a:xfrm>
-          <a:prstGeom prst="rect">
-            <a:avLst/>
-          </a:prstGeom>
-          <a:noFill/>
-        </p:spPr>
-        <p:txBody>
-          <a:bodyPr wrap="square">
-            <a:spAutoFit/>
-          </a:bodyPr>
-          <a:lstStyle/>
-          <a:p>
-            <a:pPr algn="r"/>
-            <a:r>
-              <a:rPr sz="1000" b="0">
-                <a:solidFill>
-                  <a:srgbClr val="6B6B6B"/>
-                </a:solidFill>
-                <a:latin typeface="DejaVu Sans"/>
-              </a:rPr>
-              <a:t>6</a:t>
-            </a:r>
-          </a:p>
-        </p:txBody>
-      </p:sp>
-    </p:spTree>
-  </p:cSld>
-  <p:clrMapOvr>
-    <a:masterClrMapping/>
-  </p:clrMapOvr>
-</p:sld>
-</file>
-
-<file path=ppt/slides/slide7.xml><?xml version="1.0" encoding="utf-8"?>
-<p:sld xmlns:a="http://schemas.openxmlformats.org/drawingml/2006/main" xmlns:p="http://schemas.openxmlformats.org/presentationml/2006/main" xmlns:r="http://schemas.openxmlformats.org/officeDocument/2006/relationships">
-  <p:cSld>
-    <p:spTree>
-      <p:nvGrpSpPr>
-        <p:cNvPr id="1" name=""/>
-        <p:cNvGrpSpPr/>
-        <p:nvPr/>
-      </p:nvGrpSpPr>
-      <p:grpSpPr/>
-      <p:sp>
-        <p:nvSpPr>
-          <p:cNvPr id="2" name="TextBox 1"/>
-          <p:cNvSpPr txBox="1"/>
-          <p:nvPr/>
-        </p:nvSpPr>
-        <p:spPr>
-          <a:xfrm>
-            <a:off x="548640" y="292608"/>
-            <a:ext cx="11064240" cy="822960"/>
-          </a:xfrm>
-          <a:prstGeom prst="rect">
-            <a:avLst/>
-          </a:prstGeom>
-          <a:noFill/>
-        </p:spPr>
-        <p:txBody>
-          <a:bodyPr wrap="square">
-            <a:spAutoFit/>
-          </a:bodyPr>
-          <a:lstStyle/>
-          <a:p>
-            <a:pPr algn="l"/>
-            <a:r>
-              <a:rPr sz="3000" b="1">
-                <a:solidFill>
-                  <a:srgbClr val="1A1A1A"/>
-                </a:solidFill>
-                <a:latin typeface="DejaVu Sans"/>
-              </a:rPr>
-              <a:t>Models: what the numbers actually say</a:t>
-            </a:r>
-          </a:p>
-        </p:txBody>
-      </p:sp>
-      <p:graphicFrame>
-        <p:nvGraphicFramePr>
-          <p:cNvPr id="3" name="Table 2"/>
-          <p:cNvGraphicFramePr>
-            <a:graphicFrameLocks noGrp="1"/>
-          </p:cNvGraphicFramePr>
-          <p:nvPr/>
-        </p:nvGraphicFramePr>
-        <p:xfrm>
-          <a:off x="411480" y="1234440"/>
-          <a:ext cx="11384280" cy="4297680"/>
-        </p:xfrm>
-        <a:graphic>
-          <a:graphicData uri="http://schemas.openxmlformats.org/drawingml/2006/table">
-            <a:tbl>
-              <a:tblPr firstRow="1" bandRow="1">
-                <a:tableStyleId>{5C22544A-7EE6-4342-B048-85BDC9FD1C3A}</a:tableStyleId>
-              </a:tblPr>
-              <a:tblGrid>
-                <a:gridCol w="2743200"/>
-                <a:gridCol w="2926080"/>
-                <a:gridCol w="5715000"/>
-              </a:tblGrid>
-              <a:tr h="716280">
-                <a:tc>
-                  <a:txBody>
-                    <a:bodyPr wrap="square"/>
-                    <a:lstStyle/>
-                    <a:p>
-                      <a:r>
-                        <a:rPr sz="1100" b="1">
-                          <a:solidFill>
-                            <a:srgbClr val="FFFFFF"/>
-                          </a:solidFill>
-                          <a:latin typeface="DejaVu Sans"/>
-                        </a:rPr>
-                        <a:t>Model</a:t>
-                      </a:r>
-                    </a:p>
-                  </a:txBody>
-                  <a:tcPr marL="54864" marR="54864" marT="27432" marB="27432" anchor="t">
-                    <a:solidFill>
-                      <a:srgbClr val="1F4E79"/>
-                    </a:solidFill>
-                  </a:tcPr>
-                </a:tc>
-                <a:tc>
-                  <a:txBody>
-                    <a:bodyPr wrap="square"/>
-                    <a:lstStyle/>
-                    <a:p>
-                      <a:r>
-                        <a:rPr sz="1100" b="1">
-                          <a:solidFill>
-                            <a:srgbClr val="FFFFFF"/>
-                          </a:solidFill>
-                          <a:latin typeface="DejaVu Sans"/>
-                        </a:rPr>
-                        <a:t>Task it answers</a:t>
-                      </a:r>
-                    </a:p>
-                  </a:txBody>
-                  <a:tcPr marL="54864" marR="54864" marT="27432" marB="27432" anchor="t">
-                    <a:solidFill>
-                      <a:srgbClr val="1F4E79"/>
-                    </a:solidFill>
-                  </a:tcPr>
-                </a:tc>
-                <a:tc>
-                  <a:txBody>
-                    <a:bodyPr wrap="square"/>
-                    <a:lstStyle/>
-                    <a:p>
-                      <a:r>
-                        <a:rPr sz="1100" b="1">
-                          <a:solidFill>
-                            <a:srgbClr val="FFFFFF"/>
-                          </a:solidFill>
-                          <a:latin typeface="DejaVu Sans"/>
-                        </a:rPr>
-                        <a:t>Honest holdout read</a:t>
-                      </a:r>
-                    </a:p>
-                  </a:txBody>
-                  <a:tcPr marL="54864" marR="54864" marT="27432" marB="27432" anchor="t">
-                    <a:solidFill>
-                      <a:srgbClr val="1F4E79"/>
-                    </a:solidFill>
-                  </a:tcPr>
-                </a:tc>
-              </a:tr>
-              <a:tr h="716280">
-                <a:tc>
-                  <a:txBody>
-                    <a:bodyPr wrap="square"/>
-                    <a:lstStyle/>
-                    <a:p>
-                      <a:r>
-                        <a:rPr sz="1100" b="0">
-                          <a:solidFill>
-                            <a:srgbClr val="1A1A1A"/>
-                          </a:solidFill>
-                          <a:latin typeface="DejaVu Sans"/>
-                        </a:rPr>
-                        <a:t>check-verdict, 4 heads</a:t>
-                      </a:r>
-                    </a:p>
-                  </a:txBody>
-                  <a:tcPr marL="54864" marR="54864" marT="27432" marB="27432" anchor="t">
-                    <a:solidFill>
-                      <a:srgbClr val="FFFFFF"/>
-                    </a:solidFill>
-                  </a:tcPr>
-                </a:tc>
-                <a:tc>
-                  <a:txBody>
-                    <a:bodyPr wrap="square"/>
-                    <a:lstStyle/>
-                    <a:p>
-                      <a:r>
-                        <a:rPr sz="1100" b="0">
-                          <a:solidFill>
-                            <a:srgbClr val="1A1A1A"/>
-                          </a:solidFill>
-                          <a:latin typeface="DejaVu Sans"/>
-                        </a:rPr>
-                        <a:t>did the check pass</a:t>
-                      </a:r>
-                    </a:p>
-                  </a:txBody>
-                  <a:tcPr marL="54864" marR="54864" marT="27432" marB="27432" anchor="t">
-                    <a:solidFill>
-                      <a:srgbClr val="FFFFFF"/>
-                    </a:solidFill>
-                  </a:tcPr>
-                </a:tc>
-                <a:tc>
-                  <a:txBody>
-                    <a:bodyPr wrap="square"/>
-                    <a:lstStyle/>
-                    <a:p>
-                      <a:r>
-                        <a:rPr sz="1100" b="0">
-                          <a:solidFill>
-                            <a:srgbClr val="1A1A1A"/>
-                          </a:solidFill>
-                          <a:latin typeface="DejaVu Sans"/>
-                        </a:rPr>
-                        <a:t>31 to 61 frames per check, balanced accuracy 0.67 to 0.92. Three of four cards say generalizes: false; a logistic regression on the robot's own overlay beats the fold2 head, 0.88 to 0.67</a:t>
-                      </a:r>
-                    </a:p>
-                  </a:txBody>
-                  <a:tcPr marL="54864" marR="54864" marT="27432" marB="27432" anchor="t">
-                    <a:solidFill>
-                      <a:srgbClr val="FFFFFF"/>
-                    </a:solidFill>
-                  </a:tcPr>
-                </a:tc>
-              </a:tr>
-              <a:tr h="716280">
-                <a:tc>
-                  <a:txBody>
-                    <a:bodyPr wrap="square"/>
-                    <a:lstStyle/>
-                    <a:p>
-                      <a:r>
-                        <a:rPr sz="1100" b="0">
-                          <a:solidFill>
-                            <a:srgbClr val="1A1A1A"/>
-                          </a:solidFill>
-                          <a:latin typeface="DejaVu Sans"/>
-                        </a:rPr>
-                        <a:t>fold-class</a:t>
-                      </a:r>
-                    </a:p>
-                  </a:txBody>
-                  <a:tcPr marL="54864" marR="54864" marT="27432" marB="27432" anchor="t">
-                    <a:solidFill>
-                      <a:srgbClr val="EEF3F9"/>
-                    </a:solidFill>
-                  </a:tcPr>
-                </a:tc>
-                <a:tc>
-                  <a:txBody>
-                    <a:bodyPr wrap="square"/>
-                    <a:lstStyle/>
-                    <a:p>
-                      <a:r>
-                        <a:rPr sz="1100" b="0">
-                          <a:solidFill>
-                            <a:srgbClr val="1A1A1A"/>
-                          </a:solidFill>
-                          <a:latin typeface="DejaVu Sans"/>
-                        </a:rPr>
-                        <a:t>empty / flat / half / quarter</a:t>
-                      </a:r>
-                    </a:p>
-                  </a:txBody>
-                  <a:tcPr marL="54864" marR="54864" marT="27432" marB="27432" anchor="t">
-                    <a:solidFill>
-                      <a:srgbClr val="EEF3F9"/>
-                    </a:solidFill>
-                  </a:tcPr>
-                </a:tc>
-                <a:tc>
-                  <a:txBody>
-                    <a:bodyPr wrap="square"/>
-                    <a:lstStyle/>
-                    <a:p>
-                      <a:r>
-                        <a:rPr sz="1100" b="0">
-                          <a:solidFill>
-                            <a:srgbClr val="1A1A1A"/>
-                          </a:solidFill>
-                          <a:latin typeface="DejaVu Sans"/>
-                        </a:rPr>
-                        <a:t>110 frames, balanced accuracy 0.99, but on weak labels. The card's own leakage probe fails, and holding out maus-quin drops quarter recall to 0.02 of 82 frames</a:t>
-                      </a:r>
-                    </a:p>
-                  </a:txBody>
-                  <a:tcPr marL="54864" marR="54864" marT="27432" marB="27432" anchor="t">
-                    <a:solidFill>
-                      <a:srgbClr val="EEF3F9"/>
-                    </a:solidFill>
-                  </a:tcPr>
-                </a:tc>
-              </a:tr>
-              <a:tr h="716280">
-                <a:tc>
-                  <a:txBody>
-                    <a:bodyPr wrap="square"/>
-                    <a:lstStyle/>
-                    <a:p>
-                      <a:r>
-                        <a:rPr sz="1100" b="0">
-                          <a:solidFill>
-                            <a:srgbClr val="1A1A1A"/>
-                          </a:solidFill>
-                          <a:latin typeface="DejaVu Sans"/>
-                        </a:rPr>
-                        <a:t>failure-reason</a:t>
-                      </a:r>
-                    </a:p>
-                  </a:txBody>
-                  <a:tcPr marL="54864" marR="54864" marT="27432" marB="27432" anchor="t">
-                    <a:solidFill>
-                      <a:srgbClr val="FFFFFF"/>
-                    </a:solidFill>
-                  </a:tcPr>
-                </a:tc>
-                <a:tc>
-                  <a:txBody>
-                    <a:bodyPr wrap="square"/>
-                    <a:lstStyle/>
-                    <a:p>
-                      <a:r>
-                        <a:rPr sz="1100" b="0">
-                          <a:solidFill>
-                            <a:srgbClr val="1A1A1A"/>
-                          </a:solidFill>
-                          <a:latin typeface="DejaVu Sans"/>
-                        </a:rPr>
-                        <a:t>why the fold failed</a:t>
-                      </a:r>
-                    </a:p>
-                  </a:txBody>
-                  <a:tcPr marL="54864" marR="54864" marT="27432" marB="27432" anchor="t">
-                    <a:solidFill>
-                      <a:srgbClr val="FFFFFF"/>
-                    </a:solidFill>
-                  </a:tcPr>
-                </a:tc>
-                <a:tc>
-                  <a:txBody>
-                    <a:bodyPr wrap="square"/>
-                    <a:lstStyle/>
-                    <a:p>
-                      <a:r>
-                        <a:rPr sz="1100" b="0">
-                          <a:solidFill>
-                            <a:srgbClr val="1A1A1A"/>
-                          </a:solidFill>
-                          <a:latin typeface="DejaVu Sans"/>
-                        </a:rPr>
-                        <a:t>one deployable head: spread too_small, 13 holdout frames. The fold2 heads are research only, where the trivial rule scores set-F1 1.00 against the 0.73 the card quotes</a:t>
-                      </a:r>
-                    </a:p>
-                  </a:txBody>
-                  <a:tcPr marL="54864" marR="54864" marT="27432" marB="27432" anchor="t">
-                    <a:solidFill>
-                      <a:srgbClr val="FFFFFF"/>
-                    </a:solidFill>
-                  </a:tcPr>
-                </a:tc>
-              </a:tr>
-              <a:tr h="716280">
-                <a:tc>
-                  <a:txBody>
-                    <a:bodyPr wrap="square"/>
-                    <a:lstStyle/>
-                    <a:p>
-                      <a:r>
-                        <a:rPr sz="1100" b="0">
-                          <a:solidFill>
-                            <a:srgbClr val="1A1A1A"/>
-                          </a:solidFill>
-                          <a:latin typeface="DejaVu Sans"/>
-                        </a:rPr>
-                        <a:t>frame-embedder</a:t>
-                      </a:r>
-                    </a:p>
-                  </a:txBody>
-                  <a:tcPr marL="54864" marR="54864" marT="27432" marB="27432" anchor="t">
-                    <a:solidFill>
-                      <a:srgbClr val="EEF3F9"/>
-                    </a:solidFill>
-                  </a:tcPr>
-                </a:tc>
-                <a:tc>
-                  <a:txBody>
-                    <a:bodyPr wrap="square"/>
-                    <a:lstStyle/>
-                    <a:p>
-                      <a:r>
-                        <a:rPr sz="1100" b="0">
-                          <a:solidFill>
-                            <a:srgbClr val="1A1A1A"/>
-                          </a:solidFill>
-                          <a:latin typeface="DejaVu Sans"/>
-                        </a:rPr>
-                        <a:t>an embedding per frame</a:t>
-                      </a:r>
-                    </a:p>
-                  </a:txBody>
-                  <a:tcPr marL="54864" marR="54864" marT="27432" marB="27432" anchor="t">
-                    <a:solidFill>
-                      <a:srgbClr val="EEF3F9"/>
-                    </a:solidFill>
-                  </a:tcPr>
-                </a:tc>
-                <a:tc>
-                  <a:txBody>
-                    <a:bodyPr wrap="square"/>
-                    <a:lstStyle/>
-                    <a:p>
-                      <a:r>
-                        <a:rPr sz="1100" b="0">
-                          <a:solidFill>
-                            <a:srgbClr val="1A1A1A"/>
-                          </a:solidFill>
-                          <a:latin typeface="DejaVu Sans"/>
-                        </a:rPr>
-                        <a:t>about 4 ms per frame on a desktop CPU; the Raspberry Pi figure is an unmeasured estimate, not a board reading</a:t>
-                      </a:r>
-                    </a:p>
-                  </a:txBody>
-                  <a:tcPr marL="54864" marR="54864" marT="27432" marB="27432" anchor="t">
-                    <a:solidFill>
-                      <a:srgbClr val="EEF3F9"/>
-                    </a:solidFill>
-                  </a:tcPr>
-                </a:tc>
-              </a:tr>
-              <a:tr h="716280">
-                <a:tc>
-                  <a:txBody>
-                    <a:bodyPr wrap="square"/>
-                    <a:lstStyle/>
-                    <a:p>
-                      <a:r>
-                        <a:rPr sz="1100" b="0">
-                          <a:solidFill>
-                            <a:srgbClr val="1A1A1A"/>
-                          </a:solidFill>
-                          <a:latin typeface="DejaVu Sans"/>
-                        </a:rPr>
-                        <a:t>fold-risk</a:t>
-                      </a:r>
-                    </a:p>
-                  </a:txBody>
-                  <a:tcPr marL="54864" marR="54864" marT="27432" marB="27432" anchor="t">
-                    <a:solidFill>
-                      <a:srgbClr val="FFFFFF"/>
-                    </a:solidFill>
-                  </a:tcPr>
-                </a:tc>
-                <a:tc>
-                  <a:txBody>
-                    <a:bodyPr wrap="square"/>
-                    <a:lstStyle/>
-                    <a:p>
-                      <a:r>
-                        <a:rPr sz="1100" b="0">
-                          <a:solidFill>
-                            <a:srgbClr val="1A1A1A"/>
-                          </a:solidFill>
-                          <a:latin typeface="DejaVu Sans"/>
-                        </a:rPr>
-                        <a:t>spread predicts fold failure</a:t>
-                      </a:r>
-                    </a:p>
-                  </a:txBody>
-                  <a:tcPr marL="54864" marR="54864" marT="27432" marB="27432" anchor="t">
-                    <a:solidFill>
-                      <a:srgbClr val="FFFFFF"/>
-                    </a:solidFill>
-                  </a:tcPr>
-                </a:tc>
-                <a:tc>
-                  <a:txBody>
-                    <a:bodyPr wrap="square"/>
-                    <a:lstStyle/>
-                    <a:p>
-                      <a:r>
-                        <a:rPr sz="1100" b="0">
-                          <a:solidFill>
-                            <a:srgbClr val="1A1A1A"/>
-                          </a:solidFill>
-                          <a:latin typeface="DejaVu Sans"/>
-                        </a:rPr>
-                        <a:t>balanced accuracy 0.29, worse than chance; the permutation test reports beats_null: false. Research only</a:t>
-                      </a:r>
-                    </a:p>
-                  </a:txBody>
-                  <a:tcPr marL="54864" marR="54864" marT="27432" marB="27432" anchor="t">
-                    <a:solidFill>
-                      <a:srgbClr val="FFFFFF"/>
-                    </a:solidFill>
-                  </a:tcPr>
-                </a:tc>
-              </a:tr>
-            </a:tbl>
-          </a:graphicData>
-        </a:graphic>
-      </p:graphicFrame>
-      <p:sp>
-        <p:nvSpPr>
-          <p:cNvPr id="4" name="TextBox 3"/>
-          <p:cNvSpPr txBox="1"/>
-          <p:nvPr/>
-        </p:nvSpPr>
-        <p:spPr>
-          <a:xfrm>
-            <a:off x="548640" y="6327648"/>
-            <a:ext cx="9601200" cy="365760"/>
-          </a:xfrm>
-          <a:prstGeom prst="rect">
-            <a:avLst/>
-          </a:prstGeom>
-          <a:noFill/>
-        </p:spPr>
-        <p:txBody>
-          <a:bodyPr wrap="square">
-            <a:spAutoFit/>
-          </a:bodyPr>
-          <a:lstStyle/>
-          <a:p>
-            <a:r>
-              <a:rPr sz="1000" b="0">
-                <a:solidFill>
-                  <a:srgbClr val="6B6B6B"/>
-                </a:solidFill>
-                <a:latin typeface="DejaVu Sans"/>
-              </a:rPr>
-              <a:t>Labels are robot verdicts, not ground truth</a:t>
-            </a:r>
-          </a:p>
-        </p:txBody>
-      </p:sp>
-      <p:sp>
-        <p:nvSpPr>
-          <p:cNvPr id="5" name="TextBox 4"/>
-          <p:cNvSpPr txBox="1"/>
-          <p:nvPr/>
-        </p:nvSpPr>
-        <p:spPr>
-          <a:xfrm>
-            <a:off x="11247120" y="6327648"/>
-            <a:ext cx="548640" cy="365760"/>
-          </a:xfrm>
-          <a:prstGeom prst="rect">
-            <a:avLst/>
-          </a:prstGeom>
-          <a:noFill/>
-        </p:spPr>
-        <p:txBody>
-          <a:bodyPr wrap="square">
-            <a:spAutoFit/>
-          </a:bodyPr>
-          <a:lstStyle/>
-          <a:p>
-            <a:pPr algn="r"/>
-            <a:r>
-              <a:rPr sz="1000" b="0">
-                <a:solidFill>
-                  <a:srgbClr val="6B6B6B"/>
-                </a:solidFill>
-                <a:latin typeface="DejaVu Sans"/>
-              </a:rPr>
-              <a:t>7</a:t>
-            </a:r>
-          </a:p>
-        </p:txBody>
-      </p:sp>
-    </p:spTree>
-  </p:cSld>
-  <p:clrMapOvr>
-    <a:masterClrMapping/>
-  </p:clrMapOvr>
-</p:sld>
-</file>
-
-<file path=ppt/slides/slide8.xml><?xml version="1.0" encoding="utf-8"?>
-<p:sld xmlns:a="http://schemas.openxmlformats.org/drawingml/2006/main" xmlns:p="http://schemas.openxmlformats.org/presentationml/2006/main" xmlns:r="http://schemas.openxmlformats.org/officeDocument/2006/relationships">
-  <p:cSld>
-    <p:spTree>
-      <p:nvGrpSpPr>
-        <p:cNvPr id="1" name=""/>
-        <p:cNvGrpSpPr/>
-        <p:nvPr/>
-      </p:nvGrpSpPr>
-      <p:grpSpPr/>
-      <p:sp>
-        <p:nvSpPr>
-          <p:cNvPr id="2" name="TextBox 1"/>
-          <p:cNvSpPr txBox="1"/>
-          <p:nvPr/>
-        </p:nvSpPr>
-        <p:spPr>
-          <a:xfrm>
-            <a:off x="548640" y="292608"/>
-            <a:ext cx="11064240" cy="822960"/>
-          </a:xfrm>
-          <a:prstGeom prst="rect">
-            <a:avLst/>
-          </a:prstGeom>
-          <a:noFill/>
-        </p:spPr>
-        <p:txBody>
-          <a:bodyPr wrap="square">
-            <a:spAutoFit/>
-          </a:bodyPr>
-          <a:lstStyle/>
-          <a:p>
-            <a:pPr algn="l"/>
-            <a:r>
-              <a:rPr sz="3000" b="1">
-                <a:solidFill>
-                  <a:srgbClr val="1A1A1A"/>
-                </a:solidFill>
-                <a:latin typeface="DejaVu Sans"/>
-              </a:rPr>
-              <a:t>Cross-robot reality check</a:t>
-            </a:r>
-          </a:p>
-        </p:txBody>
-      </p:sp>
-      <p:pic>
-        <p:nvPicPr>
-          <p:cNvPr id="3" name="Picture 2" descr="check-verdict-robots.png"/>
-          <p:cNvPicPr>
-            <a:picLocks noChangeAspect="1"/>
-          </p:cNvPicPr>
-          <p:nvPr/>
-        </p:nvPicPr>
-        <p:blipFill>
-          <a:blip r:embed="rId2"/>
-          <a:stretch>
-            <a:fillRect/>
-          </a:stretch>
-        </p:blipFill>
-        <p:spPr>
-          <a:xfrm>
-            <a:off x="457200" y="1417320"/>
-            <a:ext cx="7589520" cy="1897380"/>
-          </a:xfrm>
-          <a:prstGeom prst="rect">
-            <a:avLst/>
-          </a:prstGeom>
-        </p:spPr>
-      </p:pic>
-      <p:pic>
-        <p:nvPicPr>
-          <p:cNvPr id="4" name="Picture 3" descr="pixel-mask-example.png"/>
-          <p:cNvPicPr>
-            <a:picLocks noChangeAspect="1"/>
-          </p:cNvPicPr>
-          <p:nvPr/>
-        </p:nvPicPr>
-        <p:blipFill>
-          <a:blip r:embed="rId3"/>
-          <a:stretch>
-            <a:fillRect/>
-          </a:stretch>
-        </p:blipFill>
-        <p:spPr>
-          <a:xfrm>
-            <a:off x="8321040" y="1417320"/>
-            <a:ext cx="3291840" cy="1963881"/>
-          </a:xfrm>
-          <a:prstGeom prst="rect">
-            <a:avLst/>
-          </a:prstGeom>
-        </p:spPr>
-      </p:pic>
-      <p:sp>
-        <p:nvSpPr>
-          <p:cNvPr id="5" name="TextBox 4"/>
-          <p:cNvSpPr txBox="1"/>
-          <p:nvPr/>
-        </p:nvSpPr>
-        <p:spPr>
-          <a:xfrm>
-            <a:off x="548640" y="6327648"/>
-            <a:ext cx="9601200" cy="365760"/>
-          </a:xfrm>
-          <a:prstGeom prst="rect">
-            <a:avLst/>
-          </a:prstGeom>
-          <a:noFill/>
-        </p:spPr>
-        <p:txBody>
-          <a:bodyPr wrap="square">
-            <a:spAutoFit/>
-          </a:bodyPr>
-          <a:lstStyle/>
-          <a:p>
-            <a:r>
-              <a:rPr sz="1000" b="0">
-                <a:solidFill>
-                  <a:srgbClr val="6B6B6B"/>
-                </a:solidFill>
-                <a:latin typeface="DejaVu Sans"/>
-              </a:rPr>
-              <a:t>Holdout vs a robot held out entirely</a:t>
-            </a:r>
-          </a:p>
-        </p:txBody>
-      </p:sp>
-      <p:sp>
-        <p:nvSpPr>
-          <p:cNvPr id="6" name="TextBox 5"/>
-          <p:cNvSpPr txBox="1"/>
-          <p:nvPr/>
-        </p:nvSpPr>
-        <p:spPr>
-          <a:xfrm>
-            <a:off x="11247120" y="6327648"/>
-            <a:ext cx="548640" cy="365760"/>
-          </a:xfrm>
-          <a:prstGeom prst="rect">
-            <a:avLst/>
-          </a:prstGeom>
-          <a:noFill/>
-        </p:spPr>
-        <p:txBody>
-          <a:bodyPr wrap="square">
-            <a:spAutoFit/>
-          </a:bodyPr>
-          <a:lstStyle/>
-          <a:p>
-            <a:pPr algn="r"/>
-            <a:r>
-              <a:rPr sz="1000" b="0">
-                <a:solidFill>
-                  <a:srgbClr val="6B6B6B"/>
-                </a:solidFill>
-                <a:latin typeface="DejaVu Sans"/>
-              </a:rPr>
-              <a:t>8</a:t>
-            </a:r>
-          </a:p>
-        </p:txBody>
-      </p:sp>
-    </p:spTree>
-  </p:cSld>
-  <p:clrMapOvr>
-    <a:masterClrMapping/>
-  </p:clrMapOvr>
-</p:sld>
-</file>
-
-<file path=ppt/slides/slide9.xml><?xml version="1.0" encoding="utf-8"?>
-<p:sld xmlns:a="http://schemas.openxmlformats.org/drawingml/2006/main" xmlns:p="http://schemas.openxmlformats.org/presentationml/2006/main" xmlns:r="http://schemas.openxmlformats.org/officeDocument/2006/relationships">
-  <p:cSld>
-    <p:spTree>
-      <p:nvGrpSpPr>
-        <p:cNvPr id="1" name=""/>
-        <p:cNvGrpSpPr/>
-        <p:nvPr/>
-      </p:nvGrpSpPr>
-      <p:grpSpPr/>
-      <p:sp>
-        <p:nvSpPr>
-          <p:cNvPr id="2" name="TextBox 1"/>
-          <p:cNvSpPr txBox="1"/>
-          <p:nvPr/>
-        </p:nvSpPr>
-        <p:spPr>
-          <a:xfrm>
-            <a:off x="548640" y="292608"/>
-            <a:ext cx="11064240" cy="822960"/>
-          </a:xfrm>
-          <a:prstGeom prst="rect">
-            <a:avLst/>
-          </a:prstGeom>
-          <a:noFill/>
-        </p:spPr>
-        <p:txBody>
-          <a:bodyPr wrap="square">
-            <a:spAutoFit/>
-          </a:bodyPr>
-          <a:lstStyle/>
-          <a:p>
-            <a:pPr algn="l"/>
-            <a:r>
-              <a:rPr sz="3000" b="1">
-                <a:solidFill>
-                  <a:srgbClr val="1A1A1A"/>
-                </a:solidFill>
-                <a:latin typeface="DejaVu Sans"/>
-              </a:rPr>
-              <a:t>Human labels, kept private</a:t>
-            </a:r>
-          </a:p>
-        </p:txBody>
-      </p:sp>
-      <p:sp>
-        <p:nvSpPr>
-          <p:cNvPr id="3" name="TextBox 2"/>
-          <p:cNvSpPr txBox="1"/>
-          <p:nvPr/>
-        </p:nvSpPr>
-        <p:spPr>
-          <a:xfrm>
-            <a:off x="640080" y="1234440"/>
-            <a:ext cx="10972800" cy="4754880"/>
-          </a:xfrm>
-          <a:prstGeom prst="rect">
-            <a:avLst/>
-          </a:prstGeom>
-          <a:noFill/>
-        </p:spPr>
-        <p:txBody>
-          <a:bodyPr wrap="square">
-            <a:spAutoFit/>
-          </a:bodyPr>
-          <a:lstStyle/>
-          <a:p>
-            <a:pPr>
-              <a:lnSpc>
-                <a:spcPct val="100000"/>
-              </a:lnSpc>
-              <a:spcAft>
-                <a:spcPts val="1000"/>
-              </a:spcAft>
-            </a:pPr>
-            <a:r>
-              <a:rPr sz="1500" b="0">
-                <a:solidFill>
-                  <a:srgbClr val="1A1A1A"/>
-                </a:solidFill>
-                <a:latin typeface="DejaVu Sans"/>
-              </a:rPr>
-              <a:t>Local Label Studio 1.23.2, one app per annotator; no run data, image or label leaves the machine or enters the public repository</a:t>
-            </a:r>
-          </a:p>
-          <a:p>
-            <a:pPr>
-              <a:lnSpc>
-                <a:spcPct val="100000"/>
-              </a:lnSpc>
-              <a:spcAft>
-                <a:spcPts val="1000"/>
-              </a:spcAft>
-            </a:pPr>
-            <a:r>
-              <a:rPr sz="1500" b="0">
-                <a:solidFill>
-                  <a:srgbClr val="1A1A1A"/>
-                </a:solidFill>
-                <a:latin typeface="DejaVu Sans"/>
-              </a:rPr>
-              <a:t>Whole runs are split into set 1 (owner) and set 2 (collaborator), so no frame is labelled twice</a:t>
-            </a:r>
-          </a:p>
-          <a:p>
-            <a:pPr>
-              <a:lnSpc>
-                <a:spcPct val="100000"/>
-              </a:lnSpc>
-              <a:spcAft>
-                <a:spcPts val="1000"/>
-              </a:spcAft>
-            </a:pPr>
-            <a:r>
-              <a:rPr sz="1500" b="0">
-                <a:solidFill>
-                  <a:srgbClr val="1A1A1A"/>
-                </a:solidFill>
-                <a:latin typeface="DejaVu Sans"/>
-              </a:rPr>
-              <a:t>Two projects per set: visual phase labels (six states) and material/hole masks</a:t>
-            </a:r>
-          </a:p>
-          <a:p>
-            <a:pPr>
-              <a:lnSpc>
-                <a:spcPct val="100000"/>
-              </a:lnSpc>
-              <a:spcAft>
-                <a:spcPts val="1000"/>
-              </a:spcAft>
-            </a:pPr>
-            <a:r>
-              <a:rPr sz="1500" b="0">
-                <a:solidFill>
-                  <a:srgbClr val="1A1A1A"/>
-                </a:solidFill>
-                <a:latin typeface="DejaVu Sans"/>
-              </a:rPr>
-              <a:t>Set 2 today: 186 phase labels submitted, 113 mask submissions; set 1 is prepared but was never opened</a:t>
-            </a:r>
-          </a:p>
-          <a:p>
-            <a:pPr>
-              <a:lnSpc>
-                <a:spcPct val="100000"/>
-              </a:lnSpc>
-              <a:spcAft>
-                <a:spcPts val="1000"/>
-              </a:spcAft>
-            </a:pPr>
-            <a:r>
-              <a:rPr sz="1500" b="0">
-                <a:solidFill>
-                  <a:srgbClr val="1A1A1A"/>
-                </a:solidFill>
-                <a:latin typeface="DejaVu Sans"/>
-              </a:rPr>
-              <a:t>Pixel-mask prefill adds 301 editable suggestions on set 2, applied only to untouched tasks</a:t>
-            </a:r>
-          </a:p>
-        </p:txBody>
-      </p:sp>
-      <p:sp>
-        <p:nvSpPr>
-          <p:cNvPr id="4" name="TextBox 3"/>
-          <p:cNvSpPr txBox="1"/>
-          <p:nvPr/>
-        </p:nvSpPr>
-        <p:spPr>
-          <a:xfrm>
-            <a:off x="548640" y="6327648"/>
-            <a:ext cx="9601200" cy="365760"/>
-          </a:xfrm>
-          <a:prstGeom prst="rect">
-            <a:avLst/>
-          </a:prstGeom>
-          <a:noFill/>
-        </p:spPr>
-        <p:txBody>
-          <a:bodyPr wrap="square">
-            <a:spAutoFit/>
-          </a:bodyPr>
-          <a:lstStyle/>
-          <a:p>
-            <a:r>
-              <a:rPr sz="1000" b="0">
-                <a:solidFill>
-                  <a:srgbClr val="6B6B6B"/>
-                </a:solidFill>
-                <a:latin typeface="DejaVu Sans"/>
-              </a:rPr>
-              <a:t>Source: status.md (branch), labeling docs</a:t>
-            </a:r>
-          </a:p>
-        </p:txBody>
-      </p:sp>
-      <p:sp>
-        <p:nvSpPr>
-          <p:cNvPr id="5" name="TextBox 4"/>
-          <p:cNvSpPr txBox="1"/>
-          <p:nvPr/>
-        </p:nvSpPr>
-        <p:spPr>
-          <a:xfrm>
-            <a:off x="11247120" y="6327648"/>
-            <a:ext cx="548640" cy="365760"/>
-          </a:xfrm>
-          <a:prstGeom prst="rect">
-            <a:avLst/>
-          </a:prstGeom>
-          <a:noFill/>
-        </p:spPr>
-        <p:txBody>
-          <a:bodyPr wrap="square">
-            <a:spAutoFit/>
-          </a:bodyPr>
-          <a:lstStyle/>
-          <a:p>
-            <a:pPr algn="r"/>
-            <a:r>
-              <a:rPr sz="1000" b="0">
-                <a:solidFill>
-                  <a:srgbClr val="6B6B6B"/>
-                </a:solidFill>
-                <a:latin typeface="DejaVu Sans"/>
-              </a:rPr>
-              <a:t>9</a:t>
             </a:r>
           </a:p>
         </p:txBody>

--- a/assets/pitch/pitch-deck.pptx
+++ b/assets/pitch/pitch-deck.pptx
@@ -504,7 +504,7 @@
           <a:lstStyle/>
           <a:p>
             <a:r>
-              <a:t>Introduce the project as a practical data-to-insight toolkit: run records, camera checks and recipe settings become a structured view for analysis. Source: repository documentation and private Maus export. The project code is public; the run data remains private.</a:t>
+              <a:t>Open with the value: turn robot run records and camera checks into a structured set of measurements. The public project includes the code and model artifacts; the Maus export stays private.</a:t>
             </a:r>
           </a:p>
         </p:txBody>
@@ -574,7 +574,7 @@
           <a:lstStyle/>
           <a:p>
             <a:r>
-              <a:t>The export contains 828 run records; the flat table has 177 columns; 138 runs have extracted vision measurements; and the workflow exposes four camera-check stages: spread, fold1, fold2 and push-off. Sources: private data/runs.parquet and data/vision.parquet, with the public schemas and commands in documentation/data/pipeline.md and documentation/status.md. The remaining callouts describe implemented data, measurement and review tools.</a:t>
+              <a:t>The private export has 828 rows and 177 columns in runs.parquet. Vision.parquet has 138 rows. The current local export also has 257 push_off overlay attempts, with 248 passing the line detector's quality gate. Measurements include diameter, area, normalized centre offset, circularity, robot-marked holes, uncovered fraction, residue, CIE L* browning, ideal-fold IoU, folded area ratio, outline position and axis angle. Sources: the local aggregate export and documentation/data/pipeline.md. The push_off figures count attempts, not unique runs.</a:t>
             </a:r>
           </a:p>
         </p:txBody>
@@ -644,7 +644,7 @@
           <a:lstStyle/>
           <a:p>
             <a:r>
-              <a:t>Invite the audience to explore the public project and its pipeline, data schemas, vision measurements, model artifacts and review tools. Teams can use their own authorized run records to compare batches and shape follow-up experiments. The source code is public; private Maus run data is not included.</a:t>
+              <a:t>The segmentation student's 0.966 test IoU is against SAM 3 teacher masks on 225 frames from 57 held-out runs. The human comparison is median IoU 0.944 on 62 valid masks; it covers five consecutive runs of one robot, and four of those runs were in student training. The fold-state rule agrees with the robot's passed-check state on 991 frames, but thresholds were selected on those same frames, including the evaluation subset. Four check-verdict heads report balanced accuracy from 0.67 to 0.92 on holdouts of 31 to 61 frames; their labels are robot verdicts. Sources: code/models/crepe-student/model.json, documentation/vision/crepe-student.md and the check-verdict model cards. Repository: https://github.com/leonardoAB1/maus-crepe-insights.</a:t>
             </a:r>
           </a:p>
         </p:txBody>
@@ -3723,7 +3723,7 @@
                 </a:solidFill>
                 <a:latin typeface="DejaVu Sans"/>
               </a:rPr>
-              <a:t>Turn robot run records and camera checks into measurable crêpe-quality signals.</a:t>
+              <a:t>Turn robot camera checks into measurable crêpe-quality signals.</a:t>
             </a:r>
           </a:p>
         </p:txBody>
@@ -3758,7 +3758,7 @@
                 </a:solidFill>
                 <a:latin typeface="DejaVu Sans"/>
               </a:rPr>
-              <a:t>A data-to-insight toolkit for the Maus Robotics challenge</a:t>
+              <a:t>Spread, fold, pose and run metrics from real robot records</a:t>
             </a:r>
           </a:p>
         </p:txBody>
@@ -3819,7 +3819,7 @@
                 </a:solidFill>
                 <a:latin typeface="DejaVu Sans"/>
               </a:rPr>
-              <a:t>One run. A richer view.</a:t>
+              <a:t>What we can measure</a:t>
             </a:r>
           </a:p>
         </p:txBody>
@@ -3981,7 +3981,7 @@
                 </a:solidFill>
                 <a:latin typeface="DejaVu Sans"/>
               </a:rPr>
-              <a:t>fields per run</a:t>
+              <a:t>analysis fields</a:t>
             </a:r>
           </a:p>
           <a:p>
@@ -3997,7 +3997,7 @@
                 </a:solidFill>
                 <a:latin typeface="DejaVu Sans"/>
               </a:rPr>
-              <a:t>one analysis table</a:t>
+              <a:t>one row per run</a:t>
             </a:r>
           </a:p>
         </p:txBody>
@@ -4070,7 +4070,7 @@
                 </a:solidFill>
                 <a:latin typeface="DejaVu Sans"/>
               </a:rPr>
-              <a:t>runs with vision metrics</a:t>
+              <a:t>vision metric rows</a:t>
             </a:r>
           </a:p>
           <a:p>
@@ -4086,7 +4086,7 @@
                 </a:solidFill>
                 <a:latin typeface="DejaVu Sans"/>
               </a:rPr>
-              <a:t>check-overlay measurements</a:t>
+              <a:t>of 828 exported runs</a:t>
             </a:r>
           </a:p>
         </p:txBody>
@@ -4143,7 +4143,7 @@
                 </a:solidFill>
                 <a:latin typeface="DejaVu Sans"/>
               </a:rPr>
-              <a:t>4</a:t>
+              <a:t>257</a:t>
             </a:r>
           </a:p>
           <a:p>
@@ -4159,7 +4159,7 @@
                 </a:solidFill>
                 <a:latin typeface="DejaVu Sans"/>
               </a:rPr>
-              <a:t>camera checks</a:t>
+              <a:t>push-off overlays</a:t>
             </a:r>
           </a:p>
           <a:p>
@@ -4175,7 +4175,7 @@
                 </a:solidFill>
                 <a:latin typeface="DejaVu Sans"/>
               </a:rPr>
-              <a:t>spread / fold1 / fold2 / push-off</a:t>
+              <a:t>248 passed the line-quality gate</a:t>
             </a:r>
           </a:p>
         </p:txBody>
@@ -4217,7 +4217,7 @@
                 </a:solidFill>
                 <a:latin typeface="DejaVu Sans"/>
               </a:rPr>
-              <a:t>- Join robot runs, recipe settings and check images in one analysis workflow.</a:t>
+              <a:t>- Spread: diameter, area, centre offset and circularity.</a:t>
             </a:r>
           </a:p>
           <a:p>
@@ -4236,7 +4236,7 @@
                 </a:solidFill>
                 <a:latin typeface="DejaVu Sans"/>
               </a:rPr>
-              <a:t>- Measure diameter, centre offset, holes and fold overlap from the robot's check overlays.</a:t>
+              <a:t>- Surface: robot-marked holes, uncovered plate, residue and browning.</a:t>
             </a:r>
           </a:p>
           <a:p>
@@ -4255,7 +4255,26 @@
                 </a:solidFill>
                 <a:latin typeface="DejaVu Sans"/>
               </a:rPr>
-              <a:t>- Review video alongside frame records, then explore model artifacts and follow-up experiments.</a:t>
+              <a:t>- Fold and pose: ideal-shape overlap, fold-area ratio, centre and axis angle.</a:t>
+            </a:r>
+          </a:p>
+          <a:p>
+            <a:pPr>
+              <a:lnSpc>
+                <a:spcPct val="100000"/>
+              </a:lnSpc>
+              <a:spcAft>
+                <a:spcPts val="900"/>
+              </a:spcAft>
+            </a:pPr>
+            <a:r>
+              <a:rPr sz="1300" b="0">
+                <a:solidFill>
+                  <a:srgbClr val="4A3226"/>
+                </a:solidFill>
+                <a:latin typeface="DejaVu Sans"/>
+              </a:rPr>
+              <a:t>- Run context: stages, check attempts, outcomes and recipe settings.</a:t>
             </a:r>
           </a:p>
         </p:txBody>
@@ -4289,7 +4308,7 @@
                 </a:solidFill>
                 <a:latin typeface="DejaVu Sans"/>
               </a:rPr>
-              <a:t>Sources: run table + vision metrics</a:t>
+              <a:t>Sources: private run tables + pipeline guide</a:t>
             </a:r>
           </a:p>
         </p:txBody>
@@ -4385,21 +4404,377 @@
                 </a:solidFill>
                 <a:latin typeface="DejaVu Sans"/>
               </a:rPr>
-              <a:t>Make the next run more informative</a:t>
-            </a:r>
-          </a:p>
-        </p:txBody>
-      </p:sp>
-      <p:sp>
-        <p:nvSpPr>
-          <p:cNvPr id="3" name="TextBox 2"/>
+              <a:t>Model metrics, with their scope</a:t>
+            </a:r>
+          </a:p>
+        </p:txBody>
+      </p:sp>
+      <p:sp>
+        <p:nvSpPr>
+          <p:cNvPr id="3" name="Rounded Rectangle 2"/>
+          <p:cNvSpPr/>
+          <p:nvPr/>
+        </p:nvSpPr>
+        <p:spPr>
+          <a:xfrm>
+            <a:off x="365760" y="1325880"/>
+            <a:ext cx="2658618" cy="2286000"/>
+          </a:xfrm>
+          <a:prstGeom prst="roundRect">
+            <a:avLst>
+              <a:gd name="adj" fmla="val 12000"/>
+            </a:avLst>
+          </a:prstGeom>
+          <a:solidFill>
+            <a:srgbClr val="E8A87C"/>
+          </a:solidFill>
+          <a:ln w="15875">
+            <a:solidFill>
+              <a:srgbClr val="E8A87C"/>
+            </a:solidFill>
+          </a:ln>
+          <a:effectLst/>
+        </p:spPr>
+        <p:style>
+          <a:lnRef idx="1">
+            <a:schemeClr val="accent1"/>
+          </a:lnRef>
+          <a:fillRef idx="3">
+            <a:schemeClr val="accent1"/>
+          </a:fillRef>
+          <a:effectRef idx="2">
+            <a:schemeClr val="accent1"/>
+          </a:effectRef>
+          <a:fontRef idx="minor">
+            <a:schemeClr val="lt1"/>
+          </a:fontRef>
+        </p:style>
+        <p:txBody>
+          <a:bodyPr rtlCol="0" anchor="ctr" wrap="square" lIns="164592" rIns="164592" tIns="219456" bIns="146304"/>
+          <a:lstStyle/>
+          <a:p>
+            <a:pPr algn="l"/>
+            <a:r>
+              <a:rPr sz="4000" b="1">
+                <a:solidFill>
+                  <a:srgbClr val="4A3226"/>
+                </a:solidFill>
+                <a:latin typeface="DejaVu Sans"/>
+              </a:rPr>
+              <a:t>0.966</a:t>
+            </a:r>
+          </a:p>
+          <a:p>
+            <a:pPr algn="l">
+              <a:spcBef>
+                <a:spcPts val="400"/>
+              </a:spcBef>
+            </a:pPr>
+            <a:r>
+              <a:rPr sz="1500" b="1">
+                <a:solidFill>
+                  <a:srgbClr val="4A3226"/>
+                </a:solidFill>
+                <a:latin typeface="DejaVu Sans"/>
+              </a:rPr>
+              <a:t>mask IoU vs SAM 3</a:t>
+            </a:r>
+          </a:p>
+          <a:p>
+            <a:pPr algn="l">
+              <a:spcBef>
+                <a:spcPts val="600"/>
+              </a:spcBef>
+            </a:pPr>
+            <a:r>
+              <a:rPr sz="1100" b="0">
+                <a:solidFill>
+                  <a:srgbClr val="4A3226"/>
+                </a:solidFill>
+                <a:latin typeface="DejaVu Sans"/>
+              </a:rPr>
+              <a:t>225 held-out frames</a:t>
+            </a:r>
+          </a:p>
+        </p:txBody>
+      </p:sp>
+      <p:sp>
+        <p:nvSpPr>
+          <p:cNvPr id="4" name="Rounded Rectangle 3"/>
+          <p:cNvSpPr/>
+          <p:nvPr/>
+        </p:nvSpPr>
+        <p:spPr>
+          <a:xfrm>
+            <a:off x="3298698" y="1325880"/>
+            <a:ext cx="2658618" cy="2286000"/>
+          </a:xfrm>
+          <a:prstGeom prst="roundRect">
+            <a:avLst>
+              <a:gd name="adj" fmla="val 12000"/>
+            </a:avLst>
+          </a:prstGeom>
+          <a:solidFill>
+            <a:srgbClr val="F28B9B"/>
+          </a:solidFill>
+          <a:ln w="15875">
+            <a:solidFill>
+              <a:srgbClr val="E8A87C"/>
+            </a:solidFill>
+          </a:ln>
+          <a:effectLst/>
+        </p:spPr>
+        <p:style>
+          <a:lnRef idx="1">
+            <a:schemeClr val="accent1"/>
+          </a:lnRef>
+          <a:fillRef idx="3">
+            <a:schemeClr val="accent1"/>
+          </a:fillRef>
+          <a:effectRef idx="2">
+            <a:schemeClr val="accent1"/>
+          </a:effectRef>
+          <a:fontRef idx="minor">
+            <a:schemeClr val="lt1"/>
+          </a:fontRef>
+        </p:style>
+        <p:txBody>
+          <a:bodyPr rtlCol="0" anchor="ctr" wrap="square" lIns="164592" rIns="164592" tIns="219456" bIns="146304"/>
+          <a:lstStyle/>
+          <a:p>
+            <a:pPr algn="l"/>
+            <a:r>
+              <a:rPr sz="4000" b="1">
+                <a:solidFill>
+                  <a:srgbClr val="4A3226"/>
+                </a:solidFill>
+                <a:latin typeface="DejaVu Sans"/>
+              </a:rPr>
+              <a:t>0.944</a:t>
+            </a:r>
+          </a:p>
+          <a:p>
+            <a:pPr algn="l">
+              <a:spcBef>
+                <a:spcPts val="400"/>
+              </a:spcBef>
+            </a:pPr>
+            <a:r>
+              <a:rPr sz="1500" b="1">
+                <a:solidFill>
+                  <a:srgbClr val="4A3226"/>
+                </a:solidFill>
+                <a:latin typeface="DejaVu Sans"/>
+              </a:rPr>
+              <a:t>median IoU vs human</a:t>
+            </a:r>
+          </a:p>
+          <a:p>
+            <a:pPr algn="l">
+              <a:spcBef>
+                <a:spcPts val="600"/>
+              </a:spcBef>
+            </a:pPr>
+            <a:r>
+              <a:rPr sz="1100" b="0">
+                <a:solidFill>
+                  <a:srgbClr val="4A3226"/>
+                </a:solidFill>
+                <a:latin typeface="DejaVu Sans"/>
+              </a:rPr>
+              <a:t>62 valid masks</a:t>
+            </a:r>
+          </a:p>
+        </p:txBody>
+      </p:sp>
+      <p:sp>
+        <p:nvSpPr>
+          <p:cNvPr id="5" name="Rounded Rectangle 4"/>
+          <p:cNvSpPr/>
+          <p:nvPr/>
+        </p:nvSpPr>
+        <p:spPr>
+          <a:xfrm>
+            <a:off x="6231636" y="1325880"/>
+            <a:ext cx="2658618" cy="2286000"/>
+          </a:xfrm>
+          <a:prstGeom prst="roundRect">
+            <a:avLst>
+              <a:gd name="adj" fmla="val 12000"/>
+            </a:avLst>
+          </a:prstGeom>
+          <a:solidFill>
+            <a:srgbClr val="E8A87C"/>
+          </a:solidFill>
+          <a:ln w="15875">
+            <a:solidFill>
+              <a:srgbClr val="E8A87C"/>
+            </a:solidFill>
+          </a:ln>
+          <a:effectLst/>
+        </p:spPr>
+        <p:style>
+          <a:lnRef idx="1">
+            <a:schemeClr val="accent1"/>
+          </a:lnRef>
+          <a:fillRef idx="3">
+            <a:schemeClr val="accent1"/>
+          </a:fillRef>
+          <a:effectRef idx="2">
+            <a:schemeClr val="accent1"/>
+          </a:effectRef>
+          <a:fontRef idx="minor">
+            <a:schemeClr val="lt1"/>
+          </a:fontRef>
+        </p:style>
+        <p:txBody>
+          <a:bodyPr rtlCol="0" anchor="ctr" wrap="square" lIns="164592" rIns="164592" tIns="219456" bIns="146304"/>
+          <a:lstStyle/>
+          <a:p>
+            <a:pPr algn="l"/>
+            <a:r>
+              <a:rPr sz="4000" b="1">
+                <a:solidFill>
+                  <a:srgbClr val="4A3226"/>
+                </a:solidFill>
+                <a:latin typeface="DejaVu Sans"/>
+              </a:rPr>
+              <a:t>99.5%</a:t>
+            </a:r>
+          </a:p>
+          <a:p>
+            <a:pPr algn="l">
+              <a:spcBef>
+                <a:spcPts val="400"/>
+              </a:spcBef>
+            </a:pPr>
+            <a:r>
+              <a:rPr sz="1500" b="1">
+                <a:solidFill>
+                  <a:srgbClr val="4A3226"/>
+                </a:solidFill>
+                <a:latin typeface="DejaVu Sans"/>
+              </a:rPr>
+              <a:t>fold-state agreement</a:t>
+            </a:r>
+          </a:p>
+          <a:p>
+            <a:pPr algn="l">
+              <a:spcBef>
+                <a:spcPts val="600"/>
+              </a:spcBef>
+            </a:pPr>
+            <a:r>
+              <a:rPr sz="1100" b="0">
+                <a:solidFill>
+                  <a:srgbClr val="4A3226"/>
+                </a:solidFill>
+                <a:latin typeface="DejaVu Sans"/>
+              </a:rPr>
+              <a:t>991 passed-check moments</a:t>
+            </a:r>
+          </a:p>
+        </p:txBody>
+      </p:sp>
+      <p:sp>
+        <p:nvSpPr>
+          <p:cNvPr id="6" name="Rounded Rectangle 5"/>
+          <p:cNvSpPr/>
+          <p:nvPr/>
+        </p:nvSpPr>
+        <p:spPr>
+          <a:xfrm>
+            <a:off x="9164574" y="1325880"/>
+            <a:ext cx="2658618" cy="2286000"/>
+          </a:xfrm>
+          <a:prstGeom prst="roundRect">
+            <a:avLst>
+              <a:gd name="adj" fmla="val 12000"/>
+            </a:avLst>
+          </a:prstGeom>
+          <a:solidFill>
+            <a:srgbClr val="F28B9B"/>
+          </a:solidFill>
+          <a:ln w="15875">
+            <a:solidFill>
+              <a:srgbClr val="E8A87C"/>
+            </a:solidFill>
+          </a:ln>
+          <a:effectLst/>
+        </p:spPr>
+        <p:style>
+          <a:lnRef idx="1">
+            <a:schemeClr val="accent1"/>
+          </a:lnRef>
+          <a:fillRef idx="3">
+            <a:schemeClr val="accent1"/>
+          </a:fillRef>
+          <a:effectRef idx="2">
+            <a:schemeClr val="accent1"/>
+          </a:effectRef>
+          <a:fontRef idx="minor">
+            <a:schemeClr val="lt1"/>
+          </a:fontRef>
+        </p:style>
+        <p:txBody>
+          <a:bodyPr rtlCol="0" anchor="ctr" wrap="square" lIns="164592" rIns="164592" tIns="219456" bIns="146304"/>
+          <a:lstStyle/>
+          <a:p>
+            <a:pPr algn="l"/>
+            <a:r>
+              <a:rPr sz="3100" b="1">
+                <a:solidFill>
+                  <a:srgbClr val="4A3226"/>
+                </a:solidFill>
+                <a:latin typeface="DejaVu Sans"/>
+              </a:rPr>
+              <a:t>0.67-0.92</a:t>
+            </a:r>
+          </a:p>
+          <a:p>
+            <a:pPr algn="l">
+              <a:spcBef>
+                <a:spcPts val="400"/>
+              </a:spcBef>
+            </a:pPr>
+            <a:r>
+              <a:rPr sz="1500" b="1">
+                <a:solidFill>
+                  <a:srgbClr val="4A3226"/>
+                </a:solidFill>
+                <a:latin typeface="DejaVu Sans"/>
+              </a:rPr>
+              <a:t>check-head balanced accuracy</a:t>
+            </a:r>
+          </a:p>
+          <a:p>
+            <a:pPr algn="l">
+              <a:spcBef>
+                <a:spcPts val="600"/>
+              </a:spcBef>
+            </a:pPr>
+            <a:r>
+              <a:rPr sz="1100" b="0">
+                <a:solidFill>
+                  <a:srgbClr val="4A3226"/>
+                </a:solidFill>
+                <a:latin typeface="DejaVu Sans"/>
+              </a:rPr>
+              <a:t>31-61 frame holdouts</a:t>
+            </a:r>
+          </a:p>
+        </p:txBody>
+      </p:sp>
+      <p:sp>
+        <p:nvSpPr>
+          <p:cNvPr id="7" name="TextBox 6"/>
           <p:cNvSpPr txBox="1"/>
           <p:nvPr/>
         </p:nvSpPr>
         <p:spPr>
           <a:xfrm>
-            <a:off x="640080" y="1463040"/>
-            <a:ext cx="10972800" cy="4572000"/>
+            <a:off x="640080" y="3977640"/>
+            <a:ext cx="10972800" cy="2103120"/>
           </a:xfrm>
           <a:prstGeom prst="rect">
             <a:avLst/>
@@ -4417,18 +4792,17 @@
                 <a:spcPct val="100000"/>
               </a:lnSpc>
               <a:spcAft>
-                <a:spcPts val="2400"/>
+                <a:spcPts val="900"/>
               </a:spcAft>
             </a:pPr>
             <a:r>
-              <a:rPr sz="1800" b="1">
-                <a:solidFill>
-                  <a:srgbClr val="F28B9B"/>
+              <a:rPr sz="1300" b="0">
+                <a:solidFill>
+                  <a:srgbClr val="4A3226"/>
                 </a:solidFill>
                 <a:latin typeface="DejaVu Sans"/>
-                <a:hlinkClick r:id="rId3"/>
               </a:rPr>
-              <a:t>Explore the project: github.com/leonardoAB1/maus-crepe-insights</a:t>
+              <a:t>- Teacher IoU compares with SAM 3 masks, not ground truth.</a:t>
             </a:r>
           </a:p>
           <a:p>
@@ -4437,17 +4811,17 @@
                 <a:spcPct val="100000"/>
               </a:lnSpc>
               <a:spcAft>
-                <a:spcPts val="2200"/>
+                <a:spcPts val="900"/>
               </a:spcAft>
             </a:pPr>
             <a:r>
-              <a:rPr sz="1800" b="1">
-                <a:solidFill>
-                  <a:srgbClr val="E8A87C"/>
+              <a:rPr sz="1300" b="0">
+                <a:solidFill>
+                  <a:srgbClr val="4A3226"/>
                 </a:solidFill>
                 <a:latin typeface="DejaVu Sans"/>
               </a:rPr>
-              <a:t>Compare batches using the run table, camera-derived metrics and recipe settings.</a:t>
+              <a:t>- Human-mask review spans five runs on one robot; four were in student training.</a:t>
             </a:r>
           </a:p>
           <a:p>
@@ -4456,24 +4830,24 @@
                 <a:spcPct val="100000"/>
               </a:lnSpc>
               <a:spcAft>
-                <a:spcPts val="1200"/>
+                <a:spcPts val="900"/>
               </a:spcAft>
             </a:pPr>
             <a:r>
-              <a:rPr sz="1700" b="0">
+              <a:rPr sz="1300" b="0">
                 <a:solidFill>
                   <a:srgbClr val="4A3226"/>
                 </a:solidFill>
                 <a:latin typeface="DejaVu Sans"/>
               </a:rPr>
-              <a:t>Bring more run records and check images into the analysis, then use the evidence to shape the next experiment.</a:t>
-            </a:r>
-          </a:p>
-        </p:txBody>
-      </p:sp>
-      <p:sp>
-        <p:nvSpPr>
-          <p:cNvPr id="4" name="TextBox 3"/>
+              <a:t>- Fold thresholds use the same passed-check frames; check-head labels are robot verdicts.</a:t>
+            </a:r>
+          </a:p>
+        </p:txBody>
+      </p:sp>
+      <p:sp>
+        <p:nvSpPr>
+          <p:cNvPr id="8" name="TextBox 7"/>
           <p:cNvSpPr txBox="1"/>
           <p:nvPr/>
         </p:nvSpPr>
@@ -4499,15 +4873,16 @@
                   <a:srgbClr val="9C7A63"/>
                 </a:solidFill>
                 <a:latin typeface="DejaVu Sans"/>
+                <a:hlinkClick r:id="rId3"/>
               </a:rPr>
-              <a:t>Public code; run data stays private</a:t>
-            </a:r>
-          </a:p>
-        </p:txBody>
-      </p:sp>
-      <p:sp>
-        <p:nvSpPr>
-          <p:cNvPr id="5" name="TextBox 4"/>
+              <a:t>Explore the public repo</a:t>
+            </a:r>
+          </a:p>
+        </p:txBody>
+      </p:sp>
+      <p:sp>
+        <p:nvSpPr>
+          <p:cNvPr id="9" name="TextBox 8"/>
           <p:cNvSpPr txBox="1"/>
           <p:nvPr/>
         </p:nvSpPr>
